--- a/public/fun/pack/pptx/review/보장점검양식_44_부모님점검_대보름달집.pptx
+++ b/public/fun/pack/pptx/review/보장점검양식_44_부모님점검_대보름달집.pptx
@@ -3286,6 +3286,14 @@
 <file path=ppt/slides/slide1.xml><?xml version="1.0" encoding="utf-8"?>
 <p:sld xmlns:a="http://schemas.openxmlformats.org/drawingml/2006/main" xmlns:p="http://schemas.openxmlformats.org/presentationml/2006/main" xmlns:r="http://schemas.openxmlformats.org/officeDocument/2006/relationships">
   <p:cSld>
+    <p:bg>
+      <p:bgPr>
+        <a:solidFill>
+          <a:srgbClr val="F6EDD5"/>
+        </a:solidFill>
+        <a:effectLst/>
+      </p:bgPr>
+    </p:bg>
     <p:spTree>
       <p:nvGrpSpPr>
         <p:cNvPr id="1" name=""/>
@@ -3293,30 +3301,102 @@
         <p:nvPr/>
       </p:nvGrpSpPr>
       <p:grpSpPr/>
-      <p:pic>
-        <p:nvPicPr>
-          <p:cNvPr id="3" name="표지 그림" descr="review-44.jpg"/>
-          <p:cNvPicPr>
-            <a:picLocks noChangeAspect="1"/>
-          </p:cNvPicPr>
+      <p:sp>
+        <p:nvSpPr>
+          <p:cNvPr id="3" name="장식"/>
+          <p:cNvSpPr/>
           <p:nvPr/>
-        </p:nvPicPr>
-        <p:blipFill>
-          <a:blip r:embed="rId2"/>
-          <a:stretch>
-            <a:fillRect/>
-          </a:stretch>
-        </p:blipFill>
-        <p:spPr>
-          <a:xfrm>
-            <a:off x="0" y="0"/>
-            <a:ext cx="12191695" cy="6858000"/>
+        </p:nvSpPr>
+        <p:spPr>
+          <a:xfrm>
+            <a:off x="7071183" y="-3200400"/>
+            <a:ext cx="6400800" cy="6400800"/>
+          </a:xfrm>
+          <a:prstGeom prst="ellipse">
+            <a:avLst/>
+          </a:prstGeom>
+          <a:solidFill>
+            <a:srgbClr val="EBDAAD"/>
+          </a:solidFill>
+          <a:ln>
+            <a:noFill/>
+          </a:ln>
+        </p:spPr>
+        <p:txBody>
+          <a:bodyPr rtlCol="0" anchor="ctr"/>
+          <a:lstStyle/>
+          <a:p>
+            <a:pPr algn="ctr"/>
+          </a:p>
+        </p:txBody>
+      </p:sp>
+      <p:sp>
+        <p:nvSpPr>
+          <p:cNvPr id="4" name="장식"/>
+          <p:cNvSpPr/>
+          <p:nvPr/>
+        </p:nvSpPr>
+        <p:spPr>
+          <a:xfrm>
+            <a:off x="8534186" y="-914400"/>
+            <a:ext cx="3291840" cy="3291840"/>
+          </a:xfrm>
+          <a:prstGeom prst="ellipse">
+            <a:avLst/>
+          </a:prstGeom>
+          <a:solidFill>
+            <a:srgbClr val="FFFFFF"/>
+          </a:solidFill>
+          <a:ln>
+            <a:noFill/>
+          </a:ln>
+        </p:spPr>
+        <p:txBody>
+          <a:bodyPr rtlCol="0" anchor="ctr"/>
+          <a:lstStyle/>
+          <a:p>
+            <a:pPr algn="ctr"/>
+          </a:p>
+        </p:txBody>
+      </p:sp>
+      <p:sp>
+        <p:nvSpPr>
+          <p:cNvPr id="5" name="라벨"/>
+          <p:cNvSpPr txBox="1"/>
+          <p:nvPr/>
+        </p:nvSpPr>
+        <p:spPr>
+          <a:xfrm>
+            <a:off x="822960" y="2148840"/>
+            <a:ext cx="5608179" cy="274320"/>
           </a:xfrm>
           <a:prstGeom prst="rect">
             <a:avLst/>
           </a:prstGeom>
-        </p:spPr>
-      </p:pic>
+          <a:noFill/>
+        </p:spPr>
+        <p:txBody>
+          <a:bodyPr wrap="square" lIns="54864" rIns="54864" tIns="27432" bIns="27432" anchor="t">
+            <a:noAutofit/>
+          </a:bodyPr>
+          <a:lstStyle/>
+          <a:p>
+            <a:pPr algn="l">
+              <a:lnSpc>
+                <a:spcPct val="115000"/>
+              </a:lnSpc>
+            </a:pPr>
+            <a:r>
+              <a:rPr sz="1000" b="1" i="0" spc="250">
+                <a:solidFill>
+                  <a:srgbClr val="26231F"/>
+                </a:solidFill>
+              </a:rPr>
+              <a:t>INSURANCE CHECK</a:t>
+            </a:r>
+          </a:p>
+        </p:txBody>
+      </p:sp>
       <p:sp>
         <p:nvSpPr>
           <p:cNvPr id="2" name="Title 1"/>
@@ -3329,8 +3409,8 @@
         </p:nvSpPr>
         <p:spPr>
           <a:xfrm>
-            <a:off x="853418" y="2057400"/>
-            <a:ext cx="6095847" cy="1554480"/>
+            <a:off x="822960" y="2606040"/>
+            <a:ext cx="5608179" cy="1188720"/>
           </a:xfrm>
         </p:spPr>
         <p:txBody>
@@ -3347,7 +3427,7 @@
             <a:r>
               <a:rPr sz="3600" b="1" i="0">
                 <a:solidFill>
-                  <a:srgbClr val="544212"/>
+                  <a:srgbClr val="26231F"/>
                 </a:solidFill>
               </a:rPr>
               <a:t>우리 보험 점검 시간</a:t>
@@ -3357,14 +3437,14 @@
       </p:sp>
       <p:sp>
         <p:nvSpPr>
-          <p:cNvPr id="4" name="한 줄 문구"/>
+          <p:cNvPr id="6" name="한 줄 문구"/>
           <p:cNvSpPr txBox="1"/>
           <p:nvPr/>
         </p:nvSpPr>
         <p:spPr>
           <a:xfrm>
-            <a:off x="853418" y="3749039"/>
-            <a:ext cx="6095847" cy="822960"/>
+            <a:off x="822960" y="3886200"/>
+            <a:ext cx="5608179" cy="822960"/>
           </a:xfrm>
           <a:prstGeom prst="rect">
             <a:avLst/>
@@ -3383,26 +3463,26 @@
               </a:lnSpc>
             </a:pPr>
             <a:r>
-              <a:rPr sz="1700" b="0" i="1">
+              <a:rPr sz="1700" b="0" i="0">
                 <a:solidFill>
-                  <a:srgbClr val="544212"/>
+                  <a:srgbClr val="26231F"/>
                 </a:solidFill>
               </a:rPr>
-              <a:t>설날에 가서 증권철 위치를 확인합니다</a:t>
+              <a:t>찾아뵙고 증권철 위치를 확인합니다</a:t>
             </a:r>
           </a:p>
         </p:txBody>
       </p:sp>
       <p:sp>
         <p:nvSpPr>
-          <p:cNvPr id="5" name="안내 문구"/>
+          <p:cNvPr id="7" name="안내 문구"/>
           <p:cNvSpPr txBox="1"/>
           <p:nvPr/>
         </p:nvSpPr>
         <p:spPr>
           <a:xfrm>
-            <a:off x="853418" y="4617720"/>
-            <a:ext cx="6095847" cy="914400"/>
+            <a:off x="822960" y="4754880"/>
+            <a:ext cx="5608179" cy="914400"/>
           </a:xfrm>
           <a:prstGeom prst="rect">
             <a:avLst/>
@@ -3423,10 +3503,10 @@
             <a:r>
               <a:rPr sz="1400" b="0" i="0">
                 <a:solidFill>
-                  <a:srgbClr val="666666"/>
+                  <a:srgbClr val="26231F"/>
                 </a:solidFill>
               </a:rPr>
-              <a:t>부모님 점검 · 2027. 00. 00</a:t>
+              <a:t>부모님 점검 · 날짜 입력</a:t>
             </a:r>
           </a:p>
           <a:p>
@@ -3438,7 +3518,7 @@
             <a:r>
               <a:rPr sz="1400" b="0" i="0">
                 <a:solidFill>
-                  <a:srgbClr val="666666"/>
+                  <a:srgbClr val="26231F"/>
                 </a:solidFill>
               </a:rPr>
               <a:t>가입 내용을 정리하고 함께 확인하는 양식</a:t>
@@ -3460,7 +3540,7 @@
     <p:bg>
       <p:bgPr>
         <a:solidFill>
-          <a:srgbClr val="FBF8EE"/>
+          <a:srgbClr val="FFFFFF"/>
         </a:solidFill>
         <a:effectLst/>
       </p:bgPr>
@@ -3479,18 +3559,111 @@
           <p:nvPr/>
         </p:nvSpPr>
         <p:spPr>
-          <a:xfrm rot="10800000">
-            <a:off x="10637215" y="0"/>
-            <a:ext cx="914400" cy="1554480"/>
-          </a:xfrm>
-          <a:prstGeom prst="round2SameRect">
-            <a:avLst>
-              <a:gd name="adj1" fmla="val 50000"/>
-              <a:gd name="adj2" fmla="val 0"/>
-            </a:avLst>
+          <a:xfrm>
+            <a:off x="0" y="6565392"/>
+            <a:ext cx="12191695" cy="292608"/>
+          </a:xfrm>
+          <a:prstGeom prst="rect">
+            <a:avLst/>
           </a:prstGeom>
           <a:solidFill>
-            <a:srgbClr val="F6EACB"/>
+            <a:srgbClr val="EBDAAD"/>
+          </a:solidFill>
+          <a:ln>
+            <a:noFill/>
+          </a:ln>
+        </p:spPr>
+        <p:txBody>
+          <a:bodyPr rtlCol="0" anchor="ctr"/>
+          <a:lstStyle/>
+          <a:p>
+            <a:pPr algn="ctr"/>
+          </a:p>
+        </p:txBody>
+      </p:sp>
+      <p:sp>
+        <p:nvSpPr>
+          <p:cNvPr id="4" name="장식"/>
+          <p:cNvSpPr/>
+          <p:nvPr/>
+        </p:nvSpPr>
+        <p:spPr>
+          <a:xfrm>
+            <a:off x="10180015" y="-1645920"/>
+            <a:ext cx="3474720" cy="3474720"/>
+          </a:xfrm>
+          <a:prstGeom prst="ellipse">
+            <a:avLst/>
+          </a:prstGeom>
+          <a:solidFill>
+            <a:srgbClr val="EBDAAD"/>
+          </a:solidFill>
+          <a:ln>
+            <a:noFill/>
+          </a:ln>
+        </p:spPr>
+        <p:txBody>
+          <a:bodyPr rtlCol="0" anchor="ctr"/>
+          <a:lstStyle/>
+          <a:p>
+            <a:pPr algn="ctr"/>
+          </a:p>
+        </p:txBody>
+      </p:sp>
+      <p:sp>
+        <p:nvSpPr>
+          <p:cNvPr id="5" name="상단 라벨"/>
+          <p:cNvSpPr txBox="1"/>
+          <p:nvPr/>
+        </p:nvSpPr>
+        <p:spPr>
+          <a:xfrm>
+            <a:off x="640080" y="274320"/>
+            <a:ext cx="5486400" cy="274320"/>
+          </a:xfrm>
+          <a:prstGeom prst="rect">
+            <a:avLst/>
+          </a:prstGeom>
+          <a:noFill/>
+        </p:spPr>
+        <p:txBody>
+          <a:bodyPr wrap="square" lIns="54864" rIns="54864" tIns="27432" bIns="27432" anchor="ctr">
+            <a:noAutofit/>
+          </a:bodyPr>
+          <a:lstStyle/>
+          <a:p>
+            <a:pPr algn="l">
+              <a:lnSpc>
+                <a:spcPct val="115000"/>
+              </a:lnSpc>
+            </a:pPr>
+            <a:r>
+              <a:rPr sz="900" b="1" i="0" spc="250">
+                <a:solidFill>
+                  <a:srgbClr val="26231F"/>
+                </a:solidFill>
+              </a:rPr>
+              <a:t>INSURANCE CHECK</a:t>
+            </a:r>
+          </a:p>
+        </p:txBody>
+      </p:sp>
+      <p:sp>
+        <p:nvSpPr>
+          <p:cNvPr id="6" name="포인트"/>
+          <p:cNvSpPr/>
+          <p:nvPr/>
+        </p:nvSpPr>
+        <p:spPr>
+          <a:xfrm>
+            <a:off x="11048695" y="502919"/>
+            <a:ext cx="274320" cy="274320"/>
+          </a:xfrm>
+          <a:prstGeom prst="moon">
+            <a:avLst/>
+          </a:prstGeom>
+          <a:solidFill>
+            <a:srgbClr val="FFFFFF"/>
           </a:solidFill>
           <a:ln>
             <a:noFill/>
@@ -3516,8 +3689,8 @@
         </p:nvSpPr>
         <p:spPr>
           <a:xfrm>
-            <a:off x="640080" y="457200"/>
-            <a:ext cx="9722815" cy="868680"/>
+            <a:off x="640080" y="658368"/>
+            <a:ext cx="9082735" cy="868680"/>
           </a:xfrm>
         </p:spPr>
         <p:txBody>
@@ -3534,7 +3707,7 @@
             <a:r>
               <a:rPr sz="3000" b="1" i="0">
                 <a:solidFill>
-                  <a:srgbClr val="544212"/>
+                  <a:srgbClr val="26231F"/>
                 </a:solidFill>
               </a:rPr>
               <a:t>점검 대상 현황</a:t>
@@ -3544,14 +3717,14 @@
       </p:sp>
       <p:graphicFrame>
         <p:nvGraphicFramePr>
-          <p:cNvPr id="4" name="표"/>
+          <p:cNvPr id="7" name="표"/>
           <p:cNvGraphicFramePr>
             <a:graphicFrameLocks noGrp="1"/>
           </p:cNvGraphicFramePr>
           <p:nvPr/>
         </p:nvGraphicFramePr>
         <p:xfrm>
-          <a:off x="640080" y="1600200"/>
+          <a:off x="640080" y="1783080"/>
           <a:ext cx="10911534" cy="3657600"/>
         </p:xfrm>
         <a:graphic>
@@ -3575,7 +3748,7 @@
                       <a:r>
                         <a:rPr sz="1600" b="1">
                           <a:solidFill>
-                            <a:srgbClr val="FFFFFF"/>
+                            <a:srgbClr val="26231F"/>
                           </a:solidFill>
                         </a:rPr>
                         <a:t>구분</a:t>
@@ -3585,30 +3758,30 @@
                   <a:tcPr anchor="ctr" marL="73152" marR="73152">
                     <a:lnL w="9525" cap="flat" cmpd="sng" algn="ctr">
                       <a:solidFill>
-                        <a:srgbClr val="A78425"/>
+                        <a:srgbClr val="E1CE98"/>
                       </a:solidFill>
                       <a:prstDash val="solid"/>
                     </a:lnL>
                     <a:lnR w="9525" cap="flat" cmpd="sng" algn="ctr">
                       <a:solidFill>
-                        <a:srgbClr val="A78425"/>
+                        <a:srgbClr val="E1CE98"/>
                       </a:solidFill>
                       <a:prstDash val="solid"/>
                     </a:lnR>
                     <a:lnT w="9525" cap="flat" cmpd="sng" algn="ctr">
                       <a:solidFill>
-                        <a:srgbClr val="A78425"/>
+                        <a:srgbClr val="E1CE98"/>
                       </a:solidFill>
                       <a:prstDash val="solid"/>
                     </a:lnT>
                     <a:lnB w="9525" cap="flat" cmpd="sng" algn="ctr">
                       <a:solidFill>
-                        <a:srgbClr val="A78425"/>
+                        <a:srgbClr val="E1CE98"/>
                       </a:solidFill>
                       <a:prstDash val="solid"/>
                     </a:lnB>
                     <a:solidFill>
-                      <a:srgbClr val="A78425"/>
+                      <a:srgbClr val="E1CE98"/>
                     </a:solidFill>
                   </a:tcPr>
                 </a:tc>
@@ -3621,7 +3794,7 @@
                       <a:r>
                         <a:rPr sz="1600" b="1">
                           <a:solidFill>
-                            <a:srgbClr val="FFFFFF"/>
+                            <a:srgbClr val="26231F"/>
                           </a:solidFill>
                         </a:rPr>
                         <a:t>아버지</a:t>
@@ -3631,30 +3804,30 @@
                   <a:tcPr anchor="ctr" marL="73152" marR="73152">
                     <a:lnL w="9525" cap="flat" cmpd="sng" algn="ctr">
                       <a:solidFill>
-                        <a:srgbClr val="A78425"/>
+                        <a:srgbClr val="E1CE98"/>
                       </a:solidFill>
                       <a:prstDash val="solid"/>
                     </a:lnL>
                     <a:lnR w="9525" cap="flat" cmpd="sng" algn="ctr">
                       <a:solidFill>
-                        <a:srgbClr val="A78425"/>
+                        <a:srgbClr val="E1CE98"/>
                       </a:solidFill>
                       <a:prstDash val="solid"/>
                     </a:lnR>
                     <a:lnT w="9525" cap="flat" cmpd="sng" algn="ctr">
                       <a:solidFill>
-                        <a:srgbClr val="A78425"/>
+                        <a:srgbClr val="E1CE98"/>
                       </a:solidFill>
                       <a:prstDash val="solid"/>
                     </a:lnT>
                     <a:lnB w="9525" cap="flat" cmpd="sng" algn="ctr">
                       <a:solidFill>
-                        <a:srgbClr val="A78425"/>
+                        <a:srgbClr val="E1CE98"/>
                       </a:solidFill>
                       <a:prstDash val="solid"/>
                     </a:lnB>
                     <a:solidFill>
-                      <a:srgbClr val="A78425"/>
+                      <a:srgbClr val="E1CE98"/>
                     </a:solidFill>
                   </a:tcPr>
                 </a:tc>
@@ -3667,7 +3840,7 @@
                       <a:r>
                         <a:rPr sz="1600" b="1">
                           <a:solidFill>
-                            <a:srgbClr val="FFFFFF"/>
+                            <a:srgbClr val="26231F"/>
                           </a:solidFill>
                         </a:rPr>
                         <a:t>어머니</a:t>
@@ -3677,30 +3850,30 @@
                   <a:tcPr anchor="ctr" marL="73152" marR="73152">
                     <a:lnL w="9525" cap="flat" cmpd="sng" algn="ctr">
                       <a:solidFill>
-                        <a:srgbClr val="A78425"/>
+                        <a:srgbClr val="E1CE98"/>
                       </a:solidFill>
                       <a:prstDash val="solid"/>
                     </a:lnL>
                     <a:lnR w="9525" cap="flat" cmpd="sng" algn="ctr">
                       <a:solidFill>
-                        <a:srgbClr val="A78425"/>
+                        <a:srgbClr val="E1CE98"/>
                       </a:solidFill>
                       <a:prstDash val="solid"/>
                     </a:lnR>
                     <a:lnT w="9525" cap="flat" cmpd="sng" algn="ctr">
                       <a:solidFill>
-                        <a:srgbClr val="A78425"/>
+                        <a:srgbClr val="E1CE98"/>
                       </a:solidFill>
                       <a:prstDash val="solid"/>
                     </a:lnT>
                     <a:lnB w="9525" cap="flat" cmpd="sng" algn="ctr">
                       <a:solidFill>
-                        <a:srgbClr val="A78425"/>
+                        <a:srgbClr val="E1CE98"/>
                       </a:solidFill>
                       <a:prstDash val="solid"/>
                     </a:lnB>
                     <a:solidFill>
-                      <a:srgbClr val="A78425"/>
+                      <a:srgbClr val="E1CE98"/>
                     </a:solidFill>
                   </a:tcPr>
                 </a:tc>
@@ -3715,7 +3888,7 @@
                       <a:r>
                         <a:rPr sz="1600" b="1">
                           <a:solidFill>
-                            <a:srgbClr val="544212"/>
+                            <a:srgbClr val="494027"/>
                           </a:solidFill>
                         </a:rPr>
                         <a:t>성함</a:t>
@@ -3725,30 +3898,30 @@
                   <a:tcPr anchor="ctr" marL="73152" marR="73152">
                     <a:lnL w="9525" cap="flat" cmpd="sng" algn="ctr">
                       <a:solidFill>
-                        <a:srgbClr val="F6EACB"/>
+                        <a:srgbClr val="F6EDD5"/>
                       </a:solidFill>
                       <a:prstDash val="solid"/>
                     </a:lnL>
                     <a:lnR w="9525" cap="flat" cmpd="sng" algn="ctr">
                       <a:solidFill>
-                        <a:srgbClr val="F6EACB"/>
+                        <a:srgbClr val="F6EDD5"/>
                       </a:solidFill>
                       <a:prstDash val="solid"/>
                     </a:lnR>
                     <a:lnT w="9525" cap="flat" cmpd="sng" algn="ctr">
                       <a:solidFill>
-                        <a:srgbClr val="F6EACB"/>
+                        <a:srgbClr val="F6EDD5"/>
                       </a:solidFill>
                       <a:prstDash val="solid"/>
                     </a:lnT>
                     <a:lnB w="9525" cap="flat" cmpd="sng" algn="ctr">
                       <a:solidFill>
-                        <a:srgbClr val="F6EACB"/>
+                        <a:srgbClr val="F6EDD5"/>
                       </a:solidFill>
                       <a:prstDash val="solid"/>
                     </a:lnB>
                     <a:solidFill>
-                      <a:srgbClr val="F6EACB"/>
+                      <a:srgbClr val="F6EDD5"/>
                     </a:solidFill>
                   </a:tcPr>
                 </a:tc>
@@ -3761,7 +3934,7 @@
                       <a:r>
                         <a:rPr sz="1600" b="0">
                           <a:solidFill>
-                            <a:srgbClr val="2B2B2B"/>
+                            <a:srgbClr val="26231F"/>
                           </a:solidFill>
                         </a:rPr>
                         <a:t/>
@@ -3771,25 +3944,25 @@
                   <a:tcPr anchor="ctr" marL="73152" marR="73152">
                     <a:lnL w="9525" cap="flat" cmpd="sng" algn="ctr">
                       <a:solidFill>
-                        <a:srgbClr val="F6EACB"/>
+                        <a:srgbClr val="F6EDD5"/>
                       </a:solidFill>
                       <a:prstDash val="solid"/>
                     </a:lnL>
                     <a:lnR w="9525" cap="flat" cmpd="sng" algn="ctr">
                       <a:solidFill>
-                        <a:srgbClr val="F6EACB"/>
+                        <a:srgbClr val="F6EDD5"/>
                       </a:solidFill>
                       <a:prstDash val="solid"/>
                     </a:lnR>
                     <a:lnT w="9525" cap="flat" cmpd="sng" algn="ctr">
                       <a:solidFill>
-                        <a:srgbClr val="F6EACB"/>
+                        <a:srgbClr val="F6EDD5"/>
                       </a:solidFill>
                       <a:prstDash val="solid"/>
                     </a:lnT>
                     <a:lnB w="9525" cap="flat" cmpd="sng" algn="ctr">
                       <a:solidFill>
-                        <a:srgbClr val="F6EACB"/>
+                        <a:srgbClr val="F6EDD5"/>
                       </a:solidFill>
                       <a:prstDash val="solid"/>
                     </a:lnB>
@@ -3807,7 +3980,7 @@
                       <a:r>
                         <a:rPr sz="1600" b="0">
                           <a:solidFill>
-                            <a:srgbClr val="2B2B2B"/>
+                            <a:srgbClr val="26231F"/>
                           </a:solidFill>
                         </a:rPr>
                         <a:t/>
@@ -3817,25 +3990,25 @@
                   <a:tcPr anchor="ctr" marL="73152" marR="73152">
                     <a:lnL w="9525" cap="flat" cmpd="sng" algn="ctr">
                       <a:solidFill>
-                        <a:srgbClr val="F6EACB"/>
+                        <a:srgbClr val="F6EDD5"/>
                       </a:solidFill>
                       <a:prstDash val="solid"/>
                     </a:lnL>
                     <a:lnR w="9525" cap="flat" cmpd="sng" algn="ctr">
                       <a:solidFill>
-                        <a:srgbClr val="F6EACB"/>
+                        <a:srgbClr val="F6EDD5"/>
                       </a:solidFill>
                       <a:prstDash val="solid"/>
                     </a:lnR>
                     <a:lnT w="9525" cap="flat" cmpd="sng" algn="ctr">
                       <a:solidFill>
-                        <a:srgbClr val="F6EACB"/>
+                        <a:srgbClr val="F6EDD5"/>
                       </a:solidFill>
                       <a:prstDash val="solid"/>
                     </a:lnT>
                     <a:lnB w="9525" cap="flat" cmpd="sng" algn="ctr">
                       <a:solidFill>
-                        <a:srgbClr val="F6EACB"/>
+                        <a:srgbClr val="F6EDD5"/>
                       </a:solidFill>
                       <a:prstDash val="solid"/>
                     </a:lnB>
@@ -3855,7 +4028,7 @@
                       <a:r>
                         <a:rPr sz="1600" b="1">
                           <a:solidFill>
-                            <a:srgbClr val="544212"/>
+                            <a:srgbClr val="494027"/>
                           </a:solidFill>
                         </a:rPr>
                         <a:t>연세</a:t>
@@ -3865,30 +4038,30 @@
                   <a:tcPr anchor="ctr" marL="73152" marR="73152">
                     <a:lnL w="9525" cap="flat" cmpd="sng" algn="ctr">
                       <a:solidFill>
-                        <a:srgbClr val="F6EACB"/>
+                        <a:srgbClr val="F6EDD5"/>
                       </a:solidFill>
                       <a:prstDash val="solid"/>
                     </a:lnL>
                     <a:lnR w="9525" cap="flat" cmpd="sng" algn="ctr">
                       <a:solidFill>
-                        <a:srgbClr val="F6EACB"/>
+                        <a:srgbClr val="F6EDD5"/>
                       </a:solidFill>
                       <a:prstDash val="solid"/>
                     </a:lnR>
                     <a:lnT w="9525" cap="flat" cmpd="sng" algn="ctr">
                       <a:solidFill>
-                        <a:srgbClr val="F6EACB"/>
+                        <a:srgbClr val="F6EDD5"/>
                       </a:solidFill>
                       <a:prstDash val="solid"/>
                     </a:lnT>
                     <a:lnB w="9525" cap="flat" cmpd="sng" algn="ctr">
                       <a:solidFill>
-                        <a:srgbClr val="F6EACB"/>
+                        <a:srgbClr val="F6EDD5"/>
                       </a:solidFill>
                       <a:prstDash val="solid"/>
                     </a:lnB>
                     <a:solidFill>
-                      <a:srgbClr val="F6EACB"/>
+                      <a:srgbClr val="F6EDD5"/>
                     </a:solidFill>
                   </a:tcPr>
                 </a:tc>
@@ -3901,7 +4074,7 @@
                       <a:r>
                         <a:rPr sz="1600" b="0">
                           <a:solidFill>
-                            <a:srgbClr val="2B2B2B"/>
+                            <a:srgbClr val="26231F"/>
                           </a:solidFill>
                         </a:rPr>
                         <a:t/>
@@ -3911,30 +4084,30 @@
                   <a:tcPr anchor="ctr" marL="73152" marR="73152">
                     <a:lnL w="9525" cap="flat" cmpd="sng" algn="ctr">
                       <a:solidFill>
-                        <a:srgbClr val="F6EACB"/>
+                        <a:srgbClr val="F6EDD5"/>
                       </a:solidFill>
                       <a:prstDash val="solid"/>
                     </a:lnL>
                     <a:lnR w="9525" cap="flat" cmpd="sng" algn="ctr">
                       <a:solidFill>
-                        <a:srgbClr val="F6EACB"/>
+                        <a:srgbClr val="F6EDD5"/>
                       </a:solidFill>
                       <a:prstDash val="solid"/>
                     </a:lnR>
                     <a:lnT w="9525" cap="flat" cmpd="sng" algn="ctr">
                       <a:solidFill>
-                        <a:srgbClr val="F6EACB"/>
+                        <a:srgbClr val="F6EDD5"/>
                       </a:solidFill>
                       <a:prstDash val="solid"/>
                     </a:lnT>
                     <a:lnB w="9525" cap="flat" cmpd="sng" algn="ctr">
                       <a:solidFill>
-                        <a:srgbClr val="F6EACB"/>
+                        <a:srgbClr val="F6EDD5"/>
                       </a:solidFill>
                       <a:prstDash val="solid"/>
                     </a:lnB>
                     <a:solidFill>
-                      <a:srgbClr val="FBF8EE"/>
+                      <a:srgbClr val="FBF7EC"/>
                     </a:solidFill>
                   </a:tcPr>
                 </a:tc>
@@ -3947,7 +4120,7 @@
                       <a:r>
                         <a:rPr sz="1600" b="0">
                           <a:solidFill>
-                            <a:srgbClr val="2B2B2B"/>
+                            <a:srgbClr val="26231F"/>
                           </a:solidFill>
                         </a:rPr>
                         <a:t/>
@@ -3957,30 +4130,30 @@
                   <a:tcPr anchor="ctr" marL="73152" marR="73152">
                     <a:lnL w="9525" cap="flat" cmpd="sng" algn="ctr">
                       <a:solidFill>
-                        <a:srgbClr val="F6EACB"/>
+                        <a:srgbClr val="F6EDD5"/>
                       </a:solidFill>
                       <a:prstDash val="solid"/>
                     </a:lnL>
                     <a:lnR w="9525" cap="flat" cmpd="sng" algn="ctr">
                       <a:solidFill>
-                        <a:srgbClr val="F6EACB"/>
+                        <a:srgbClr val="F6EDD5"/>
                       </a:solidFill>
                       <a:prstDash val="solid"/>
                     </a:lnR>
                     <a:lnT w="9525" cap="flat" cmpd="sng" algn="ctr">
                       <a:solidFill>
-                        <a:srgbClr val="F6EACB"/>
+                        <a:srgbClr val="F6EDD5"/>
                       </a:solidFill>
                       <a:prstDash val="solid"/>
                     </a:lnT>
                     <a:lnB w="9525" cap="flat" cmpd="sng" algn="ctr">
                       <a:solidFill>
-                        <a:srgbClr val="F6EACB"/>
+                        <a:srgbClr val="F6EDD5"/>
                       </a:solidFill>
                       <a:prstDash val="solid"/>
                     </a:lnB>
                     <a:solidFill>
-                      <a:srgbClr val="FBF8EE"/>
+                      <a:srgbClr val="FBF7EC"/>
                     </a:solidFill>
                   </a:tcPr>
                 </a:tc>
@@ -3995,7 +4168,7 @@
                       <a:r>
                         <a:rPr sz="1600" b="1">
                           <a:solidFill>
-                            <a:srgbClr val="544212"/>
+                            <a:srgbClr val="494027"/>
                           </a:solidFill>
                         </a:rPr>
                         <a:t>건강 상태 메모</a:t>
@@ -4005,30 +4178,30 @@
                   <a:tcPr anchor="ctr" marL="73152" marR="73152">
                     <a:lnL w="9525" cap="flat" cmpd="sng" algn="ctr">
                       <a:solidFill>
-                        <a:srgbClr val="F6EACB"/>
+                        <a:srgbClr val="F6EDD5"/>
                       </a:solidFill>
                       <a:prstDash val="solid"/>
                     </a:lnL>
                     <a:lnR w="9525" cap="flat" cmpd="sng" algn="ctr">
                       <a:solidFill>
-                        <a:srgbClr val="F6EACB"/>
+                        <a:srgbClr val="F6EDD5"/>
                       </a:solidFill>
                       <a:prstDash val="solid"/>
                     </a:lnR>
                     <a:lnT w="9525" cap="flat" cmpd="sng" algn="ctr">
                       <a:solidFill>
-                        <a:srgbClr val="F6EACB"/>
+                        <a:srgbClr val="F6EDD5"/>
                       </a:solidFill>
                       <a:prstDash val="solid"/>
                     </a:lnT>
                     <a:lnB w="9525" cap="flat" cmpd="sng" algn="ctr">
                       <a:solidFill>
-                        <a:srgbClr val="F6EACB"/>
+                        <a:srgbClr val="F6EDD5"/>
                       </a:solidFill>
                       <a:prstDash val="solid"/>
                     </a:lnB>
                     <a:solidFill>
-                      <a:srgbClr val="F6EACB"/>
+                      <a:srgbClr val="F6EDD5"/>
                     </a:solidFill>
                   </a:tcPr>
                 </a:tc>
@@ -4041,7 +4214,7 @@
                       <a:r>
                         <a:rPr sz="1600" b="0">
                           <a:solidFill>
-                            <a:srgbClr val="2B2B2B"/>
+                            <a:srgbClr val="26231F"/>
                           </a:solidFill>
                         </a:rPr>
                         <a:t/>
@@ -4051,25 +4224,25 @@
                   <a:tcPr anchor="ctr" marL="73152" marR="73152">
                     <a:lnL w="9525" cap="flat" cmpd="sng" algn="ctr">
                       <a:solidFill>
-                        <a:srgbClr val="F6EACB"/>
+                        <a:srgbClr val="F6EDD5"/>
                       </a:solidFill>
                       <a:prstDash val="solid"/>
                     </a:lnL>
                     <a:lnR w="9525" cap="flat" cmpd="sng" algn="ctr">
                       <a:solidFill>
-                        <a:srgbClr val="F6EACB"/>
+                        <a:srgbClr val="F6EDD5"/>
                       </a:solidFill>
                       <a:prstDash val="solid"/>
                     </a:lnR>
                     <a:lnT w="9525" cap="flat" cmpd="sng" algn="ctr">
                       <a:solidFill>
-                        <a:srgbClr val="F6EACB"/>
+                        <a:srgbClr val="F6EDD5"/>
                       </a:solidFill>
                       <a:prstDash val="solid"/>
                     </a:lnT>
                     <a:lnB w="9525" cap="flat" cmpd="sng" algn="ctr">
                       <a:solidFill>
-                        <a:srgbClr val="F6EACB"/>
+                        <a:srgbClr val="F6EDD5"/>
                       </a:solidFill>
                       <a:prstDash val="solid"/>
                     </a:lnB>
@@ -4087,7 +4260,7 @@
                       <a:r>
                         <a:rPr sz="1600" b="0">
                           <a:solidFill>
-                            <a:srgbClr val="2B2B2B"/>
+                            <a:srgbClr val="26231F"/>
                           </a:solidFill>
                         </a:rPr>
                         <a:t/>
@@ -4097,25 +4270,25 @@
                   <a:tcPr anchor="ctr" marL="73152" marR="73152">
                     <a:lnL w="9525" cap="flat" cmpd="sng" algn="ctr">
                       <a:solidFill>
-                        <a:srgbClr val="F6EACB"/>
+                        <a:srgbClr val="F6EDD5"/>
                       </a:solidFill>
                       <a:prstDash val="solid"/>
                     </a:lnL>
                     <a:lnR w="9525" cap="flat" cmpd="sng" algn="ctr">
                       <a:solidFill>
-                        <a:srgbClr val="F6EACB"/>
+                        <a:srgbClr val="F6EDD5"/>
                       </a:solidFill>
                       <a:prstDash val="solid"/>
                     </a:lnR>
                     <a:lnT w="9525" cap="flat" cmpd="sng" algn="ctr">
                       <a:solidFill>
-                        <a:srgbClr val="F6EACB"/>
+                        <a:srgbClr val="F6EDD5"/>
                       </a:solidFill>
                       <a:prstDash val="solid"/>
                     </a:lnT>
                     <a:lnB w="9525" cap="flat" cmpd="sng" algn="ctr">
                       <a:solidFill>
-                        <a:srgbClr val="F6EACB"/>
+                        <a:srgbClr val="F6EDD5"/>
                       </a:solidFill>
                       <a:prstDash val="solid"/>
                     </a:lnB>
@@ -4135,7 +4308,7 @@
                       <a:r>
                         <a:rPr sz="1600" b="1">
                           <a:solidFill>
-                            <a:srgbClr val="544212"/>
+                            <a:srgbClr val="494027"/>
                           </a:solidFill>
                         </a:rPr>
                         <a:t>함께 확인할 것</a:t>
@@ -4145,30 +4318,30 @@
                   <a:tcPr anchor="ctr" marL="73152" marR="73152">
                     <a:lnL w="9525" cap="flat" cmpd="sng" algn="ctr">
                       <a:solidFill>
-                        <a:srgbClr val="F6EACB"/>
+                        <a:srgbClr val="F6EDD5"/>
                       </a:solidFill>
                       <a:prstDash val="solid"/>
                     </a:lnL>
                     <a:lnR w="9525" cap="flat" cmpd="sng" algn="ctr">
                       <a:solidFill>
-                        <a:srgbClr val="F6EACB"/>
+                        <a:srgbClr val="F6EDD5"/>
                       </a:solidFill>
                       <a:prstDash val="solid"/>
                     </a:lnR>
                     <a:lnT w="9525" cap="flat" cmpd="sng" algn="ctr">
                       <a:solidFill>
-                        <a:srgbClr val="F6EACB"/>
+                        <a:srgbClr val="F6EDD5"/>
                       </a:solidFill>
                       <a:prstDash val="solid"/>
                     </a:lnT>
                     <a:lnB w="9525" cap="flat" cmpd="sng" algn="ctr">
                       <a:solidFill>
-                        <a:srgbClr val="F6EACB"/>
+                        <a:srgbClr val="F6EDD5"/>
                       </a:solidFill>
                       <a:prstDash val="solid"/>
                     </a:lnB>
                     <a:solidFill>
-                      <a:srgbClr val="F6EACB"/>
+                      <a:srgbClr val="F6EDD5"/>
                     </a:solidFill>
                   </a:tcPr>
                 </a:tc>
@@ -4181,7 +4354,7 @@
                       <a:r>
                         <a:rPr sz="1600" b="0">
                           <a:solidFill>
-                            <a:srgbClr val="2B2B2B"/>
+                            <a:srgbClr val="26231F"/>
                           </a:solidFill>
                         </a:rPr>
                         <a:t/>
@@ -4191,30 +4364,30 @@
                   <a:tcPr anchor="ctr" marL="73152" marR="73152">
                     <a:lnL w="9525" cap="flat" cmpd="sng" algn="ctr">
                       <a:solidFill>
-                        <a:srgbClr val="F6EACB"/>
+                        <a:srgbClr val="F6EDD5"/>
                       </a:solidFill>
                       <a:prstDash val="solid"/>
                     </a:lnL>
                     <a:lnR w="9525" cap="flat" cmpd="sng" algn="ctr">
                       <a:solidFill>
-                        <a:srgbClr val="F6EACB"/>
+                        <a:srgbClr val="F6EDD5"/>
                       </a:solidFill>
                       <a:prstDash val="solid"/>
                     </a:lnR>
                     <a:lnT w="9525" cap="flat" cmpd="sng" algn="ctr">
                       <a:solidFill>
-                        <a:srgbClr val="F6EACB"/>
+                        <a:srgbClr val="F6EDD5"/>
                       </a:solidFill>
                       <a:prstDash val="solid"/>
                     </a:lnT>
                     <a:lnB w="9525" cap="flat" cmpd="sng" algn="ctr">
                       <a:solidFill>
-                        <a:srgbClr val="F6EACB"/>
+                        <a:srgbClr val="F6EDD5"/>
                       </a:solidFill>
                       <a:prstDash val="solid"/>
                     </a:lnB>
                     <a:solidFill>
-                      <a:srgbClr val="FBF8EE"/>
+                      <a:srgbClr val="FBF7EC"/>
                     </a:solidFill>
                   </a:tcPr>
                 </a:tc>
@@ -4227,7 +4400,7 @@
                       <a:r>
                         <a:rPr sz="1600" b="0">
                           <a:solidFill>
-                            <a:srgbClr val="2B2B2B"/>
+                            <a:srgbClr val="26231F"/>
                           </a:solidFill>
                         </a:rPr>
                         <a:t/>
@@ -4237,30 +4410,30 @@
                   <a:tcPr anchor="ctr" marL="73152" marR="73152">
                     <a:lnL w="9525" cap="flat" cmpd="sng" algn="ctr">
                       <a:solidFill>
-                        <a:srgbClr val="F6EACB"/>
+                        <a:srgbClr val="F6EDD5"/>
                       </a:solidFill>
                       <a:prstDash val="solid"/>
                     </a:lnL>
                     <a:lnR w="9525" cap="flat" cmpd="sng" algn="ctr">
                       <a:solidFill>
-                        <a:srgbClr val="F6EACB"/>
+                        <a:srgbClr val="F6EDD5"/>
                       </a:solidFill>
                       <a:prstDash val="solid"/>
                     </a:lnR>
                     <a:lnT w="9525" cap="flat" cmpd="sng" algn="ctr">
                       <a:solidFill>
-                        <a:srgbClr val="F6EACB"/>
+                        <a:srgbClr val="F6EDD5"/>
                       </a:solidFill>
                       <a:prstDash val="solid"/>
                     </a:lnT>
                     <a:lnB w="9525" cap="flat" cmpd="sng" algn="ctr">
                       <a:solidFill>
-                        <a:srgbClr val="F6EACB"/>
+                        <a:srgbClr val="F6EDD5"/>
                       </a:solidFill>
                       <a:prstDash val="solid"/>
                     </a:lnB>
                     <a:solidFill>
-                      <a:srgbClr val="FBF8EE"/>
+                      <a:srgbClr val="FBF7EC"/>
                     </a:solidFill>
                   </a:tcPr>
                 </a:tc>
@@ -4283,7 +4456,7 @@
     <p:bg>
       <p:bgPr>
         <a:solidFill>
-          <a:srgbClr val="FBF8EE"/>
+          <a:srgbClr val="FFFFFF"/>
         </a:solidFill>
         <a:effectLst/>
       </p:bgPr>
@@ -4302,18 +4475,111 @@
           <p:nvPr/>
         </p:nvSpPr>
         <p:spPr>
-          <a:xfrm rot="10800000">
-            <a:off x="10637215" y="0"/>
-            <a:ext cx="914400" cy="1554480"/>
-          </a:xfrm>
-          <a:prstGeom prst="round2SameRect">
-            <a:avLst>
-              <a:gd name="adj1" fmla="val 50000"/>
-              <a:gd name="adj2" fmla="val 0"/>
-            </a:avLst>
+          <a:xfrm>
+            <a:off x="0" y="6565392"/>
+            <a:ext cx="12191695" cy="292608"/>
+          </a:xfrm>
+          <a:prstGeom prst="rect">
+            <a:avLst/>
           </a:prstGeom>
           <a:solidFill>
-            <a:srgbClr val="F6EACB"/>
+            <a:srgbClr val="EBDAAD"/>
+          </a:solidFill>
+          <a:ln>
+            <a:noFill/>
+          </a:ln>
+        </p:spPr>
+        <p:txBody>
+          <a:bodyPr rtlCol="0" anchor="ctr"/>
+          <a:lstStyle/>
+          <a:p>
+            <a:pPr algn="ctr"/>
+          </a:p>
+        </p:txBody>
+      </p:sp>
+      <p:sp>
+        <p:nvSpPr>
+          <p:cNvPr id="4" name="장식"/>
+          <p:cNvSpPr/>
+          <p:nvPr/>
+        </p:nvSpPr>
+        <p:spPr>
+          <a:xfrm>
+            <a:off x="10180015" y="-1645920"/>
+            <a:ext cx="3474720" cy="3474720"/>
+          </a:xfrm>
+          <a:prstGeom prst="ellipse">
+            <a:avLst/>
+          </a:prstGeom>
+          <a:solidFill>
+            <a:srgbClr val="EBDAAD"/>
+          </a:solidFill>
+          <a:ln>
+            <a:noFill/>
+          </a:ln>
+        </p:spPr>
+        <p:txBody>
+          <a:bodyPr rtlCol="0" anchor="ctr"/>
+          <a:lstStyle/>
+          <a:p>
+            <a:pPr algn="ctr"/>
+          </a:p>
+        </p:txBody>
+      </p:sp>
+      <p:sp>
+        <p:nvSpPr>
+          <p:cNvPr id="5" name="상단 라벨"/>
+          <p:cNvSpPr txBox="1"/>
+          <p:nvPr/>
+        </p:nvSpPr>
+        <p:spPr>
+          <a:xfrm>
+            <a:off x="640080" y="274320"/>
+            <a:ext cx="5486400" cy="274320"/>
+          </a:xfrm>
+          <a:prstGeom prst="rect">
+            <a:avLst/>
+          </a:prstGeom>
+          <a:noFill/>
+        </p:spPr>
+        <p:txBody>
+          <a:bodyPr wrap="square" lIns="54864" rIns="54864" tIns="27432" bIns="27432" anchor="ctr">
+            <a:noAutofit/>
+          </a:bodyPr>
+          <a:lstStyle/>
+          <a:p>
+            <a:pPr algn="l">
+              <a:lnSpc>
+                <a:spcPct val="115000"/>
+              </a:lnSpc>
+            </a:pPr>
+            <a:r>
+              <a:rPr sz="900" b="1" i="0" spc="250">
+                <a:solidFill>
+                  <a:srgbClr val="26231F"/>
+                </a:solidFill>
+              </a:rPr>
+              <a:t>INSURANCE CHECK</a:t>
+            </a:r>
+          </a:p>
+        </p:txBody>
+      </p:sp>
+      <p:sp>
+        <p:nvSpPr>
+          <p:cNvPr id="6" name="포인트"/>
+          <p:cNvSpPr/>
+          <p:nvPr/>
+        </p:nvSpPr>
+        <p:spPr>
+          <a:xfrm>
+            <a:off x="11048695" y="502919"/>
+            <a:ext cx="274320" cy="274320"/>
+          </a:xfrm>
+          <a:prstGeom prst="moon">
+            <a:avLst/>
+          </a:prstGeom>
+          <a:solidFill>
+            <a:srgbClr val="FFFFFF"/>
           </a:solidFill>
           <a:ln>
             <a:noFill/>
@@ -4339,8 +4605,8 @@
         </p:nvSpPr>
         <p:spPr>
           <a:xfrm>
-            <a:off x="640080" y="457200"/>
-            <a:ext cx="9722815" cy="868680"/>
+            <a:off x="640080" y="658368"/>
+            <a:ext cx="9082735" cy="868680"/>
           </a:xfrm>
         </p:spPr>
         <p:txBody>
@@ -4357,7 +4623,7 @@
             <a:r>
               <a:rPr sz="3000" b="1" i="0">
                 <a:solidFill>
-                  <a:srgbClr val="544212"/>
+                  <a:srgbClr val="26231F"/>
                 </a:solidFill>
               </a:rPr>
               <a:t>가입한 보험 목록</a:t>
@@ -4367,14 +4633,14 @@
       </p:sp>
       <p:graphicFrame>
         <p:nvGraphicFramePr>
-          <p:cNvPr id="4" name="표"/>
+          <p:cNvPr id="7" name="표"/>
           <p:cNvGraphicFramePr>
             <a:graphicFrameLocks noGrp="1"/>
           </p:cNvGraphicFramePr>
           <p:nvPr/>
         </p:nvGraphicFramePr>
         <p:xfrm>
-          <a:off x="640080" y="1600200"/>
+          <a:off x="640080" y="1783080"/>
           <a:ext cx="10911535" cy="4224528"/>
         </p:xfrm>
         <a:graphic>
@@ -4400,7 +4666,7 @@
                       <a:r>
                         <a:rPr sz="1400" b="1">
                           <a:solidFill>
-                            <a:srgbClr val="FFFFFF"/>
+                            <a:srgbClr val="26231F"/>
                           </a:solidFill>
                         </a:rPr>
                         <a:t>보험회사</a:t>
@@ -4410,30 +4676,30 @@
                   <a:tcPr anchor="ctr" marL="73152" marR="73152">
                     <a:lnL w="9525" cap="flat" cmpd="sng" algn="ctr">
                       <a:solidFill>
-                        <a:srgbClr val="A78425"/>
+                        <a:srgbClr val="E1CE98"/>
                       </a:solidFill>
                       <a:prstDash val="solid"/>
                     </a:lnL>
                     <a:lnR w="9525" cap="flat" cmpd="sng" algn="ctr">
                       <a:solidFill>
-                        <a:srgbClr val="A78425"/>
+                        <a:srgbClr val="E1CE98"/>
                       </a:solidFill>
                       <a:prstDash val="solid"/>
                     </a:lnR>
                     <a:lnT w="9525" cap="flat" cmpd="sng" algn="ctr">
                       <a:solidFill>
-                        <a:srgbClr val="A78425"/>
+                        <a:srgbClr val="E1CE98"/>
                       </a:solidFill>
                       <a:prstDash val="solid"/>
                     </a:lnT>
                     <a:lnB w="9525" cap="flat" cmpd="sng" algn="ctr">
                       <a:solidFill>
-                        <a:srgbClr val="A78425"/>
+                        <a:srgbClr val="E1CE98"/>
                       </a:solidFill>
                       <a:prstDash val="solid"/>
                     </a:lnB>
                     <a:solidFill>
-                      <a:srgbClr val="A78425"/>
+                      <a:srgbClr val="E1CE98"/>
                     </a:solidFill>
                   </a:tcPr>
                 </a:tc>
@@ -4446,7 +4712,7 @@
                       <a:r>
                         <a:rPr sz="1400" b="1">
                           <a:solidFill>
-                            <a:srgbClr val="FFFFFF"/>
+                            <a:srgbClr val="26231F"/>
                           </a:solidFill>
                         </a:rPr>
                         <a:t>상품명</a:t>
@@ -4456,30 +4722,30 @@
                   <a:tcPr anchor="ctr" marL="73152" marR="73152">
                     <a:lnL w="9525" cap="flat" cmpd="sng" algn="ctr">
                       <a:solidFill>
-                        <a:srgbClr val="A78425"/>
+                        <a:srgbClr val="E1CE98"/>
                       </a:solidFill>
                       <a:prstDash val="solid"/>
                     </a:lnL>
                     <a:lnR w="9525" cap="flat" cmpd="sng" algn="ctr">
                       <a:solidFill>
-                        <a:srgbClr val="A78425"/>
+                        <a:srgbClr val="E1CE98"/>
                       </a:solidFill>
                       <a:prstDash val="solid"/>
                     </a:lnR>
                     <a:lnT w="9525" cap="flat" cmpd="sng" algn="ctr">
                       <a:solidFill>
-                        <a:srgbClr val="A78425"/>
+                        <a:srgbClr val="E1CE98"/>
                       </a:solidFill>
                       <a:prstDash val="solid"/>
                     </a:lnT>
                     <a:lnB w="9525" cap="flat" cmpd="sng" algn="ctr">
                       <a:solidFill>
-                        <a:srgbClr val="A78425"/>
+                        <a:srgbClr val="E1CE98"/>
                       </a:solidFill>
                       <a:prstDash val="solid"/>
                     </a:lnB>
                     <a:solidFill>
-                      <a:srgbClr val="A78425"/>
+                      <a:srgbClr val="E1CE98"/>
                     </a:solidFill>
                   </a:tcPr>
                 </a:tc>
@@ -4492,7 +4758,7 @@
                       <a:r>
                         <a:rPr sz="1400" b="1">
                           <a:solidFill>
-                            <a:srgbClr val="FFFFFF"/>
+                            <a:srgbClr val="26231F"/>
                           </a:solidFill>
                         </a:rPr>
                         <a:t>종류</a:t>
@@ -4502,30 +4768,30 @@
                   <a:tcPr anchor="ctr" marL="73152" marR="73152">
                     <a:lnL w="9525" cap="flat" cmpd="sng" algn="ctr">
                       <a:solidFill>
-                        <a:srgbClr val="A78425"/>
+                        <a:srgbClr val="E1CE98"/>
                       </a:solidFill>
                       <a:prstDash val="solid"/>
                     </a:lnL>
                     <a:lnR w="9525" cap="flat" cmpd="sng" algn="ctr">
                       <a:solidFill>
-                        <a:srgbClr val="A78425"/>
+                        <a:srgbClr val="E1CE98"/>
                       </a:solidFill>
                       <a:prstDash val="solid"/>
                     </a:lnR>
                     <a:lnT w="9525" cap="flat" cmpd="sng" algn="ctr">
                       <a:solidFill>
-                        <a:srgbClr val="A78425"/>
+                        <a:srgbClr val="E1CE98"/>
                       </a:solidFill>
                       <a:prstDash val="solid"/>
                     </a:lnT>
                     <a:lnB w="9525" cap="flat" cmpd="sng" algn="ctr">
                       <a:solidFill>
-                        <a:srgbClr val="A78425"/>
+                        <a:srgbClr val="E1CE98"/>
                       </a:solidFill>
                       <a:prstDash val="solid"/>
                     </a:lnB>
                     <a:solidFill>
-                      <a:srgbClr val="A78425"/>
+                      <a:srgbClr val="E1CE98"/>
                     </a:solidFill>
                   </a:tcPr>
                 </a:tc>
@@ -4538,7 +4804,7 @@
                       <a:r>
                         <a:rPr sz="1400" b="1">
                           <a:solidFill>
-                            <a:srgbClr val="FFFFFF"/>
+                            <a:srgbClr val="26231F"/>
                           </a:solidFill>
                         </a:rPr>
                         <a:t>만기일</a:t>
@@ -4548,30 +4814,30 @@
                   <a:tcPr anchor="ctr" marL="73152" marR="73152">
                     <a:lnL w="9525" cap="flat" cmpd="sng" algn="ctr">
                       <a:solidFill>
-                        <a:srgbClr val="A78425"/>
+                        <a:srgbClr val="E1CE98"/>
                       </a:solidFill>
                       <a:prstDash val="solid"/>
                     </a:lnL>
                     <a:lnR w="9525" cap="flat" cmpd="sng" algn="ctr">
                       <a:solidFill>
-                        <a:srgbClr val="A78425"/>
+                        <a:srgbClr val="E1CE98"/>
                       </a:solidFill>
                       <a:prstDash val="solid"/>
                     </a:lnR>
                     <a:lnT w="9525" cap="flat" cmpd="sng" algn="ctr">
                       <a:solidFill>
-                        <a:srgbClr val="A78425"/>
+                        <a:srgbClr val="E1CE98"/>
                       </a:solidFill>
                       <a:prstDash val="solid"/>
                     </a:lnT>
                     <a:lnB w="9525" cap="flat" cmpd="sng" algn="ctr">
                       <a:solidFill>
-                        <a:srgbClr val="A78425"/>
+                        <a:srgbClr val="E1CE98"/>
                       </a:solidFill>
                       <a:prstDash val="solid"/>
                     </a:lnB>
                     <a:solidFill>
-                      <a:srgbClr val="A78425"/>
+                      <a:srgbClr val="E1CE98"/>
                     </a:solidFill>
                   </a:tcPr>
                 </a:tc>
@@ -4584,7 +4850,7 @@
                       <a:r>
                         <a:rPr sz="1400" b="1">
                           <a:solidFill>
-                            <a:srgbClr val="FFFFFF"/>
+                            <a:srgbClr val="26231F"/>
                           </a:solidFill>
                         </a:rPr>
                         <a:t>월 보험료</a:t>
@@ -4594,30 +4860,30 @@
                   <a:tcPr anchor="ctr" marL="73152" marR="73152">
                     <a:lnL w="9525" cap="flat" cmpd="sng" algn="ctr">
                       <a:solidFill>
-                        <a:srgbClr val="A78425"/>
+                        <a:srgbClr val="E1CE98"/>
                       </a:solidFill>
                       <a:prstDash val="solid"/>
                     </a:lnL>
                     <a:lnR w="9525" cap="flat" cmpd="sng" algn="ctr">
                       <a:solidFill>
-                        <a:srgbClr val="A78425"/>
+                        <a:srgbClr val="E1CE98"/>
                       </a:solidFill>
                       <a:prstDash val="solid"/>
                     </a:lnR>
                     <a:lnT w="9525" cap="flat" cmpd="sng" algn="ctr">
                       <a:solidFill>
-                        <a:srgbClr val="A78425"/>
+                        <a:srgbClr val="E1CE98"/>
                       </a:solidFill>
                       <a:prstDash val="solid"/>
                     </a:lnT>
                     <a:lnB w="9525" cap="flat" cmpd="sng" algn="ctr">
                       <a:solidFill>
-                        <a:srgbClr val="A78425"/>
+                        <a:srgbClr val="E1CE98"/>
                       </a:solidFill>
                       <a:prstDash val="solid"/>
                     </a:lnB>
                     <a:solidFill>
-                      <a:srgbClr val="A78425"/>
+                      <a:srgbClr val="E1CE98"/>
                     </a:solidFill>
                   </a:tcPr>
                 </a:tc>
@@ -4632,7 +4898,7 @@
                       <a:r>
                         <a:rPr sz="1400" b="0">
                           <a:solidFill>
-                            <a:srgbClr val="2B2B2B"/>
+                            <a:srgbClr val="26231F"/>
                           </a:solidFill>
                         </a:rPr>
                         <a:t/>
@@ -4642,25 +4908,25 @@
                   <a:tcPr anchor="ctr" marL="73152" marR="73152">
                     <a:lnL w="9525" cap="flat" cmpd="sng" algn="ctr">
                       <a:solidFill>
-                        <a:srgbClr val="F6EACB"/>
+                        <a:srgbClr val="F6EDD5"/>
                       </a:solidFill>
                       <a:prstDash val="solid"/>
                     </a:lnL>
                     <a:lnR w="9525" cap="flat" cmpd="sng" algn="ctr">
                       <a:solidFill>
-                        <a:srgbClr val="F6EACB"/>
+                        <a:srgbClr val="F6EDD5"/>
                       </a:solidFill>
                       <a:prstDash val="solid"/>
                     </a:lnR>
                     <a:lnT w="9525" cap="flat" cmpd="sng" algn="ctr">
                       <a:solidFill>
-                        <a:srgbClr val="F6EACB"/>
+                        <a:srgbClr val="F6EDD5"/>
                       </a:solidFill>
                       <a:prstDash val="solid"/>
                     </a:lnT>
                     <a:lnB w="9525" cap="flat" cmpd="sng" algn="ctr">
                       <a:solidFill>
-                        <a:srgbClr val="F6EACB"/>
+                        <a:srgbClr val="F6EDD5"/>
                       </a:solidFill>
                       <a:prstDash val="solid"/>
                     </a:lnB>
@@ -4678,7 +4944,7 @@
                       <a:r>
                         <a:rPr sz="1400" b="0">
                           <a:solidFill>
-                            <a:srgbClr val="2B2B2B"/>
+                            <a:srgbClr val="26231F"/>
                           </a:solidFill>
                         </a:rPr>
                         <a:t/>
@@ -4688,25 +4954,25 @@
                   <a:tcPr anchor="ctr" marL="73152" marR="73152">
                     <a:lnL w="9525" cap="flat" cmpd="sng" algn="ctr">
                       <a:solidFill>
-                        <a:srgbClr val="F6EACB"/>
+                        <a:srgbClr val="F6EDD5"/>
                       </a:solidFill>
                       <a:prstDash val="solid"/>
                     </a:lnL>
                     <a:lnR w="9525" cap="flat" cmpd="sng" algn="ctr">
                       <a:solidFill>
-                        <a:srgbClr val="F6EACB"/>
+                        <a:srgbClr val="F6EDD5"/>
                       </a:solidFill>
                       <a:prstDash val="solid"/>
                     </a:lnR>
                     <a:lnT w="9525" cap="flat" cmpd="sng" algn="ctr">
                       <a:solidFill>
-                        <a:srgbClr val="F6EACB"/>
+                        <a:srgbClr val="F6EDD5"/>
                       </a:solidFill>
                       <a:prstDash val="solid"/>
                     </a:lnT>
                     <a:lnB w="9525" cap="flat" cmpd="sng" algn="ctr">
                       <a:solidFill>
-                        <a:srgbClr val="F6EACB"/>
+                        <a:srgbClr val="F6EDD5"/>
                       </a:solidFill>
                       <a:prstDash val="solid"/>
                     </a:lnB>
@@ -4724,7 +4990,7 @@
                       <a:r>
                         <a:rPr sz="1400" b="0">
                           <a:solidFill>
-                            <a:srgbClr val="2B2B2B"/>
+                            <a:srgbClr val="26231F"/>
                           </a:solidFill>
                         </a:rPr>
                         <a:t/>
@@ -4734,25 +5000,25 @@
                   <a:tcPr anchor="ctr" marL="73152" marR="73152">
                     <a:lnL w="9525" cap="flat" cmpd="sng" algn="ctr">
                       <a:solidFill>
-                        <a:srgbClr val="F6EACB"/>
+                        <a:srgbClr val="F6EDD5"/>
                       </a:solidFill>
                       <a:prstDash val="solid"/>
                     </a:lnL>
                     <a:lnR w="9525" cap="flat" cmpd="sng" algn="ctr">
                       <a:solidFill>
-                        <a:srgbClr val="F6EACB"/>
+                        <a:srgbClr val="F6EDD5"/>
                       </a:solidFill>
                       <a:prstDash val="solid"/>
                     </a:lnR>
                     <a:lnT w="9525" cap="flat" cmpd="sng" algn="ctr">
                       <a:solidFill>
-                        <a:srgbClr val="F6EACB"/>
+                        <a:srgbClr val="F6EDD5"/>
                       </a:solidFill>
                       <a:prstDash val="solid"/>
                     </a:lnT>
                     <a:lnB w="9525" cap="flat" cmpd="sng" algn="ctr">
                       <a:solidFill>
-                        <a:srgbClr val="F6EACB"/>
+                        <a:srgbClr val="F6EDD5"/>
                       </a:solidFill>
                       <a:prstDash val="solid"/>
                     </a:lnB>
@@ -4770,7 +5036,7 @@
                       <a:r>
                         <a:rPr sz="1400" b="0">
                           <a:solidFill>
-                            <a:srgbClr val="2B2B2B"/>
+                            <a:srgbClr val="26231F"/>
                           </a:solidFill>
                         </a:rPr>
                         <a:t/>
@@ -4780,25 +5046,25 @@
                   <a:tcPr anchor="ctr" marL="73152" marR="73152">
                     <a:lnL w="9525" cap="flat" cmpd="sng" algn="ctr">
                       <a:solidFill>
-                        <a:srgbClr val="F6EACB"/>
+                        <a:srgbClr val="F6EDD5"/>
                       </a:solidFill>
                       <a:prstDash val="solid"/>
                     </a:lnL>
                     <a:lnR w="9525" cap="flat" cmpd="sng" algn="ctr">
                       <a:solidFill>
-                        <a:srgbClr val="F6EACB"/>
+                        <a:srgbClr val="F6EDD5"/>
                       </a:solidFill>
                       <a:prstDash val="solid"/>
                     </a:lnR>
                     <a:lnT w="9525" cap="flat" cmpd="sng" algn="ctr">
                       <a:solidFill>
-                        <a:srgbClr val="F6EACB"/>
+                        <a:srgbClr val="F6EDD5"/>
                       </a:solidFill>
                       <a:prstDash val="solid"/>
                     </a:lnT>
                     <a:lnB w="9525" cap="flat" cmpd="sng" algn="ctr">
                       <a:solidFill>
-                        <a:srgbClr val="F6EACB"/>
+                        <a:srgbClr val="F6EDD5"/>
                       </a:solidFill>
                       <a:prstDash val="solid"/>
                     </a:lnB>
@@ -4816,7 +5082,7 @@
                       <a:r>
                         <a:rPr sz="1400" b="0">
                           <a:solidFill>
-                            <a:srgbClr val="2B2B2B"/>
+                            <a:srgbClr val="26231F"/>
                           </a:solidFill>
                         </a:rPr>
                         <a:t/>
@@ -4826,25 +5092,25 @@
                   <a:tcPr anchor="ctr" marL="73152" marR="73152">
                     <a:lnL w="9525" cap="flat" cmpd="sng" algn="ctr">
                       <a:solidFill>
-                        <a:srgbClr val="F6EACB"/>
+                        <a:srgbClr val="F6EDD5"/>
                       </a:solidFill>
                       <a:prstDash val="solid"/>
                     </a:lnL>
                     <a:lnR w="9525" cap="flat" cmpd="sng" algn="ctr">
                       <a:solidFill>
-                        <a:srgbClr val="F6EACB"/>
+                        <a:srgbClr val="F6EDD5"/>
                       </a:solidFill>
                       <a:prstDash val="solid"/>
                     </a:lnR>
                     <a:lnT w="9525" cap="flat" cmpd="sng" algn="ctr">
                       <a:solidFill>
-                        <a:srgbClr val="F6EACB"/>
+                        <a:srgbClr val="F6EDD5"/>
                       </a:solidFill>
                       <a:prstDash val="solid"/>
                     </a:lnT>
                     <a:lnB w="9525" cap="flat" cmpd="sng" algn="ctr">
                       <a:solidFill>
-                        <a:srgbClr val="F6EACB"/>
+                        <a:srgbClr val="F6EDD5"/>
                       </a:solidFill>
                       <a:prstDash val="solid"/>
                     </a:lnB>
@@ -4864,7 +5130,7 @@
                       <a:r>
                         <a:rPr sz="1400" b="0">
                           <a:solidFill>
-                            <a:srgbClr val="2B2B2B"/>
+                            <a:srgbClr val="26231F"/>
                           </a:solidFill>
                         </a:rPr>
                         <a:t/>
@@ -4874,30 +5140,30 @@
                   <a:tcPr anchor="ctr" marL="73152" marR="73152">
                     <a:lnL w="9525" cap="flat" cmpd="sng" algn="ctr">
                       <a:solidFill>
-                        <a:srgbClr val="F6EACB"/>
+                        <a:srgbClr val="F6EDD5"/>
                       </a:solidFill>
                       <a:prstDash val="solid"/>
                     </a:lnL>
                     <a:lnR w="9525" cap="flat" cmpd="sng" algn="ctr">
                       <a:solidFill>
-                        <a:srgbClr val="F6EACB"/>
+                        <a:srgbClr val="F6EDD5"/>
                       </a:solidFill>
                       <a:prstDash val="solid"/>
                     </a:lnR>
                     <a:lnT w="9525" cap="flat" cmpd="sng" algn="ctr">
                       <a:solidFill>
-                        <a:srgbClr val="F6EACB"/>
+                        <a:srgbClr val="F6EDD5"/>
                       </a:solidFill>
                       <a:prstDash val="solid"/>
                     </a:lnT>
                     <a:lnB w="9525" cap="flat" cmpd="sng" algn="ctr">
                       <a:solidFill>
-                        <a:srgbClr val="F6EACB"/>
+                        <a:srgbClr val="F6EDD5"/>
                       </a:solidFill>
                       <a:prstDash val="solid"/>
                     </a:lnB>
                     <a:solidFill>
-                      <a:srgbClr val="FBF8EE"/>
+                      <a:srgbClr val="FBF7EC"/>
                     </a:solidFill>
                   </a:tcPr>
                 </a:tc>
@@ -4910,7 +5176,7 @@
                       <a:r>
                         <a:rPr sz="1400" b="0">
                           <a:solidFill>
-                            <a:srgbClr val="2B2B2B"/>
+                            <a:srgbClr val="26231F"/>
                           </a:solidFill>
                         </a:rPr>
                         <a:t/>
@@ -4920,30 +5186,30 @@
                   <a:tcPr anchor="ctr" marL="73152" marR="73152">
                     <a:lnL w="9525" cap="flat" cmpd="sng" algn="ctr">
                       <a:solidFill>
-                        <a:srgbClr val="F6EACB"/>
+                        <a:srgbClr val="F6EDD5"/>
                       </a:solidFill>
                       <a:prstDash val="solid"/>
                     </a:lnL>
                     <a:lnR w="9525" cap="flat" cmpd="sng" algn="ctr">
                       <a:solidFill>
-                        <a:srgbClr val="F6EACB"/>
+                        <a:srgbClr val="F6EDD5"/>
                       </a:solidFill>
                       <a:prstDash val="solid"/>
                     </a:lnR>
                     <a:lnT w="9525" cap="flat" cmpd="sng" algn="ctr">
                       <a:solidFill>
-                        <a:srgbClr val="F6EACB"/>
+                        <a:srgbClr val="F6EDD5"/>
                       </a:solidFill>
                       <a:prstDash val="solid"/>
                     </a:lnT>
                     <a:lnB w="9525" cap="flat" cmpd="sng" algn="ctr">
                       <a:solidFill>
-                        <a:srgbClr val="F6EACB"/>
+                        <a:srgbClr val="F6EDD5"/>
                       </a:solidFill>
                       <a:prstDash val="solid"/>
                     </a:lnB>
                     <a:solidFill>
-                      <a:srgbClr val="FBF8EE"/>
+                      <a:srgbClr val="FBF7EC"/>
                     </a:solidFill>
                   </a:tcPr>
                 </a:tc>
@@ -4956,7 +5222,7 @@
                       <a:r>
                         <a:rPr sz="1400" b="0">
                           <a:solidFill>
-                            <a:srgbClr val="2B2B2B"/>
+                            <a:srgbClr val="26231F"/>
                           </a:solidFill>
                         </a:rPr>
                         <a:t/>
@@ -4966,30 +5232,30 @@
                   <a:tcPr anchor="ctr" marL="73152" marR="73152">
                     <a:lnL w="9525" cap="flat" cmpd="sng" algn="ctr">
                       <a:solidFill>
-                        <a:srgbClr val="F6EACB"/>
+                        <a:srgbClr val="F6EDD5"/>
                       </a:solidFill>
                       <a:prstDash val="solid"/>
                     </a:lnL>
                     <a:lnR w="9525" cap="flat" cmpd="sng" algn="ctr">
                       <a:solidFill>
-                        <a:srgbClr val="F6EACB"/>
+                        <a:srgbClr val="F6EDD5"/>
                       </a:solidFill>
                       <a:prstDash val="solid"/>
                     </a:lnR>
                     <a:lnT w="9525" cap="flat" cmpd="sng" algn="ctr">
                       <a:solidFill>
-                        <a:srgbClr val="F6EACB"/>
+                        <a:srgbClr val="F6EDD5"/>
                       </a:solidFill>
                       <a:prstDash val="solid"/>
                     </a:lnT>
                     <a:lnB w="9525" cap="flat" cmpd="sng" algn="ctr">
                       <a:solidFill>
-                        <a:srgbClr val="F6EACB"/>
+                        <a:srgbClr val="F6EDD5"/>
                       </a:solidFill>
                       <a:prstDash val="solid"/>
                     </a:lnB>
                     <a:solidFill>
-                      <a:srgbClr val="FBF8EE"/>
+                      <a:srgbClr val="FBF7EC"/>
                     </a:solidFill>
                   </a:tcPr>
                 </a:tc>
@@ -5002,7 +5268,7 @@
                       <a:r>
                         <a:rPr sz="1400" b="0">
                           <a:solidFill>
-                            <a:srgbClr val="2B2B2B"/>
+                            <a:srgbClr val="26231F"/>
                           </a:solidFill>
                         </a:rPr>
                         <a:t/>
@@ -5012,30 +5278,30 @@
                   <a:tcPr anchor="ctr" marL="73152" marR="73152">
                     <a:lnL w="9525" cap="flat" cmpd="sng" algn="ctr">
                       <a:solidFill>
-                        <a:srgbClr val="F6EACB"/>
+                        <a:srgbClr val="F6EDD5"/>
                       </a:solidFill>
                       <a:prstDash val="solid"/>
                     </a:lnL>
                     <a:lnR w="9525" cap="flat" cmpd="sng" algn="ctr">
                       <a:solidFill>
-                        <a:srgbClr val="F6EACB"/>
+                        <a:srgbClr val="F6EDD5"/>
                       </a:solidFill>
                       <a:prstDash val="solid"/>
                     </a:lnR>
                     <a:lnT w="9525" cap="flat" cmpd="sng" algn="ctr">
                       <a:solidFill>
-                        <a:srgbClr val="F6EACB"/>
+                        <a:srgbClr val="F6EDD5"/>
                       </a:solidFill>
                       <a:prstDash val="solid"/>
                     </a:lnT>
                     <a:lnB w="9525" cap="flat" cmpd="sng" algn="ctr">
                       <a:solidFill>
-                        <a:srgbClr val="F6EACB"/>
+                        <a:srgbClr val="F6EDD5"/>
                       </a:solidFill>
                       <a:prstDash val="solid"/>
                     </a:lnB>
                     <a:solidFill>
-                      <a:srgbClr val="FBF8EE"/>
+                      <a:srgbClr val="FBF7EC"/>
                     </a:solidFill>
                   </a:tcPr>
                 </a:tc>
@@ -5048,7 +5314,7 @@
                       <a:r>
                         <a:rPr sz="1400" b="0">
                           <a:solidFill>
-                            <a:srgbClr val="2B2B2B"/>
+                            <a:srgbClr val="26231F"/>
                           </a:solidFill>
                         </a:rPr>
                         <a:t/>
@@ -5058,30 +5324,30 @@
                   <a:tcPr anchor="ctr" marL="73152" marR="73152">
                     <a:lnL w="9525" cap="flat" cmpd="sng" algn="ctr">
                       <a:solidFill>
-                        <a:srgbClr val="F6EACB"/>
+                        <a:srgbClr val="F6EDD5"/>
                       </a:solidFill>
                       <a:prstDash val="solid"/>
                     </a:lnL>
                     <a:lnR w="9525" cap="flat" cmpd="sng" algn="ctr">
                       <a:solidFill>
-                        <a:srgbClr val="F6EACB"/>
+                        <a:srgbClr val="F6EDD5"/>
                       </a:solidFill>
                       <a:prstDash val="solid"/>
                     </a:lnR>
                     <a:lnT w="9525" cap="flat" cmpd="sng" algn="ctr">
                       <a:solidFill>
-                        <a:srgbClr val="F6EACB"/>
+                        <a:srgbClr val="F6EDD5"/>
                       </a:solidFill>
                       <a:prstDash val="solid"/>
                     </a:lnT>
                     <a:lnB w="9525" cap="flat" cmpd="sng" algn="ctr">
                       <a:solidFill>
-                        <a:srgbClr val="F6EACB"/>
+                        <a:srgbClr val="F6EDD5"/>
                       </a:solidFill>
                       <a:prstDash val="solid"/>
                     </a:lnB>
                     <a:solidFill>
-                      <a:srgbClr val="FBF8EE"/>
+                      <a:srgbClr val="FBF7EC"/>
                     </a:solidFill>
                   </a:tcPr>
                 </a:tc>
@@ -5096,7 +5362,7 @@
                       <a:r>
                         <a:rPr sz="1400" b="0">
                           <a:solidFill>
-                            <a:srgbClr val="2B2B2B"/>
+                            <a:srgbClr val="26231F"/>
                           </a:solidFill>
                         </a:rPr>
                         <a:t/>
@@ -5106,25 +5372,25 @@
                   <a:tcPr anchor="ctr" marL="73152" marR="73152">
                     <a:lnL w="9525" cap="flat" cmpd="sng" algn="ctr">
                       <a:solidFill>
-                        <a:srgbClr val="F6EACB"/>
+                        <a:srgbClr val="F6EDD5"/>
                       </a:solidFill>
                       <a:prstDash val="solid"/>
                     </a:lnL>
                     <a:lnR w="9525" cap="flat" cmpd="sng" algn="ctr">
                       <a:solidFill>
-                        <a:srgbClr val="F6EACB"/>
+                        <a:srgbClr val="F6EDD5"/>
                       </a:solidFill>
                       <a:prstDash val="solid"/>
                     </a:lnR>
                     <a:lnT w="9525" cap="flat" cmpd="sng" algn="ctr">
                       <a:solidFill>
-                        <a:srgbClr val="F6EACB"/>
+                        <a:srgbClr val="F6EDD5"/>
                       </a:solidFill>
                       <a:prstDash val="solid"/>
                     </a:lnT>
                     <a:lnB w="9525" cap="flat" cmpd="sng" algn="ctr">
                       <a:solidFill>
-                        <a:srgbClr val="F6EACB"/>
+                        <a:srgbClr val="F6EDD5"/>
                       </a:solidFill>
                       <a:prstDash val="solid"/>
                     </a:lnB>
@@ -5142,7 +5408,7 @@
                       <a:r>
                         <a:rPr sz="1400" b="0">
                           <a:solidFill>
-                            <a:srgbClr val="2B2B2B"/>
+                            <a:srgbClr val="26231F"/>
                           </a:solidFill>
                         </a:rPr>
                         <a:t/>
@@ -5152,25 +5418,25 @@
                   <a:tcPr anchor="ctr" marL="73152" marR="73152">
                     <a:lnL w="9525" cap="flat" cmpd="sng" algn="ctr">
                       <a:solidFill>
-                        <a:srgbClr val="F6EACB"/>
+                        <a:srgbClr val="F6EDD5"/>
                       </a:solidFill>
                       <a:prstDash val="solid"/>
                     </a:lnL>
                     <a:lnR w="9525" cap="flat" cmpd="sng" algn="ctr">
                       <a:solidFill>
-                        <a:srgbClr val="F6EACB"/>
+                        <a:srgbClr val="F6EDD5"/>
                       </a:solidFill>
                       <a:prstDash val="solid"/>
                     </a:lnR>
                     <a:lnT w="9525" cap="flat" cmpd="sng" algn="ctr">
                       <a:solidFill>
-                        <a:srgbClr val="F6EACB"/>
+                        <a:srgbClr val="F6EDD5"/>
                       </a:solidFill>
                       <a:prstDash val="solid"/>
                     </a:lnT>
                     <a:lnB w="9525" cap="flat" cmpd="sng" algn="ctr">
                       <a:solidFill>
-                        <a:srgbClr val="F6EACB"/>
+                        <a:srgbClr val="F6EDD5"/>
                       </a:solidFill>
                       <a:prstDash val="solid"/>
                     </a:lnB>
@@ -5188,7 +5454,7 @@
                       <a:r>
                         <a:rPr sz="1400" b="0">
                           <a:solidFill>
-                            <a:srgbClr val="2B2B2B"/>
+                            <a:srgbClr val="26231F"/>
                           </a:solidFill>
                         </a:rPr>
                         <a:t/>
@@ -5198,25 +5464,25 @@
                   <a:tcPr anchor="ctr" marL="73152" marR="73152">
                     <a:lnL w="9525" cap="flat" cmpd="sng" algn="ctr">
                       <a:solidFill>
-                        <a:srgbClr val="F6EACB"/>
+                        <a:srgbClr val="F6EDD5"/>
                       </a:solidFill>
                       <a:prstDash val="solid"/>
                     </a:lnL>
                     <a:lnR w="9525" cap="flat" cmpd="sng" algn="ctr">
                       <a:solidFill>
-                        <a:srgbClr val="F6EACB"/>
+                        <a:srgbClr val="F6EDD5"/>
                       </a:solidFill>
                       <a:prstDash val="solid"/>
                     </a:lnR>
                     <a:lnT w="9525" cap="flat" cmpd="sng" algn="ctr">
                       <a:solidFill>
-                        <a:srgbClr val="F6EACB"/>
+                        <a:srgbClr val="F6EDD5"/>
                       </a:solidFill>
                       <a:prstDash val="solid"/>
                     </a:lnT>
                     <a:lnB w="9525" cap="flat" cmpd="sng" algn="ctr">
                       <a:solidFill>
-                        <a:srgbClr val="F6EACB"/>
+                        <a:srgbClr val="F6EDD5"/>
                       </a:solidFill>
                       <a:prstDash val="solid"/>
                     </a:lnB>
@@ -5234,7 +5500,7 @@
                       <a:r>
                         <a:rPr sz="1400" b="0">
                           <a:solidFill>
-                            <a:srgbClr val="2B2B2B"/>
+                            <a:srgbClr val="26231F"/>
                           </a:solidFill>
                         </a:rPr>
                         <a:t/>
@@ -5244,25 +5510,25 @@
                   <a:tcPr anchor="ctr" marL="73152" marR="73152">
                     <a:lnL w="9525" cap="flat" cmpd="sng" algn="ctr">
                       <a:solidFill>
-                        <a:srgbClr val="F6EACB"/>
+                        <a:srgbClr val="F6EDD5"/>
                       </a:solidFill>
                       <a:prstDash val="solid"/>
                     </a:lnL>
                     <a:lnR w="9525" cap="flat" cmpd="sng" algn="ctr">
                       <a:solidFill>
-                        <a:srgbClr val="F6EACB"/>
+                        <a:srgbClr val="F6EDD5"/>
                       </a:solidFill>
                       <a:prstDash val="solid"/>
                     </a:lnR>
                     <a:lnT w="9525" cap="flat" cmpd="sng" algn="ctr">
                       <a:solidFill>
-                        <a:srgbClr val="F6EACB"/>
+                        <a:srgbClr val="F6EDD5"/>
                       </a:solidFill>
                       <a:prstDash val="solid"/>
                     </a:lnT>
                     <a:lnB w="9525" cap="flat" cmpd="sng" algn="ctr">
                       <a:solidFill>
-                        <a:srgbClr val="F6EACB"/>
+                        <a:srgbClr val="F6EDD5"/>
                       </a:solidFill>
                       <a:prstDash val="solid"/>
                     </a:lnB>
@@ -5280,7 +5546,7 @@
                       <a:r>
                         <a:rPr sz="1400" b="0">
                           <a:solidFill>
-                            <a:srgbClr val="2B2B2B"/>
+                            <a:srgbClr val="26231F"/>
                           </a:solidFill>
                         </a:rPr>
                         <a:t/>
@@ -5290,25 +5556,25 @@
                   <a:tcPr anchor="ctr" marL="73152" marR="73152">
                     <a:lnL w="9525" cap="flat" cmpd="sng" algn="ctr">
                       <a:solidFill>
-                        <a:srgbClr val="F6EACB"/>
+                        <a:srgbClr val="F6EDD5"/>
                       </a:solidFill>
                       <a:prstDash val="solid"/>
                     </a:lnL>
                     <a:lnR w="9525" cap="flat" cmpd="sng" algn="ctr">
                       <a:solidFill>
-                        <a:srgbClr val="F6EACB"/>
+                        <a:srgbClr val="F6EDD5"/>
                       </a:solidFill>
                       <a:prstDash val="solid"/>
                     </a:lnR>
                     <a:lnT w="9525" cap="flat" cmpd="sng" algn="ctr">
                       <a:solidFill>
-                        <a:srgbClr val="F6EACB"/>
+                        <a:srgbClr val="F6EDD5"/>
                       </a:solidFill>
                       <a:prstDash val="solid"/>
                     </a:lnT>
                     <a:lnB w="9525" cap="flat" cmpd="sng" algn="ctr">
                       <a:solidFill>
-                        <a:srgbClr val="F6EACB"/>
+                        <a:srgbClr val="F6EDD5"/>
                       </a:solidFill>
                       <a:prstDash val="solid"/>
                     </a:lnB>
@@ -5328,7 +5594,7 @@
                       <a:r>
                         <a:rPr sz="1400" b="0">
                           <a:solidFill>
-                            <a:srgbClr val="2B2B2B"/>
+                            <a:srgbClr val="26231F"/>
                           </a:solidFill>
                         </a:rPr>
                         <a:t/>
@@ -5338,30 +5604,30 @@
                   <a:tcPr anchor="ctr" marL="73152" marR="73152">
                     <a:lnL w="9525" cap="flat" cmpd="sng" algn="ctr">
                       <a:solidFill>
-                        <a:srgbClr val="F6EACB"/>
+                        <a:srgbClr val="F6EDD5"/>
                       </a:solidFill>
                       <a:prstDash val="solid"/>
                     </a:lnL>
                     <a:lnR w="9525" cap="flat" cmpd="sng" algn="ctr">
                       <a:solidFill>
-                        <a:srgbClr val="F6EACB"/>
+                        <a:srgbClr val="F6EDD5"/>
                       </a:solidFill>
                       <a:prstDash val="solid"/>
                     </a:lnR>
                     <a:lnT w="9525" cap="flat" cmpd="sng" algn="ctr">
                       <a:solidFill>
-                        <a:srgbClr val="F6EACB"/>
+                        <a:srgbClr val="F6EDD5"/>
                       </a:solidFill>
                       <a:prstDash val="solid"/>
                     </a:lnT>
                     <a:lnB w="9525" cap="flat" cmpd="sng" algn="ctr">
                       <a:solidFill>
-                        <a:srgbClr val="F6EACB"/>
+                        <a:srgbClr val="F6EDD5"/>
                       </a:solidFill>
                       <a:prstDash val="solid"/>
                     </a:lnB>
                     <a:solidFill>
-                      <a:srgbClr val="FBF8EE"/>
+                      <a:srgbClr val="FBF7EC"/>
                     </a:solidFill>
                   </a:tcPr>
                 </a:tc>
@@ -5374,7 +5640,7 @@
                       <a:r>
                         <a:rPr sz="1400" b="0">
                           <a:solidFill>
-                            <a:srgbClr val="2B2B2B"/>
+                            <a:srgbClr val="26231F"/>
                           </a:solidFill>
                         </a:rPr>
                         <a:t/>
@@ -5384,30 +5650,30 @@
                   <a:tcPr anchor="ctr" marL="73152" marR="73152">
                     <a:lnL w="9525" cap="flat" cmpd="sng" algn="ctr">
                       <a:solidFill>
-                        <a:srgbClr val="F6EACB"/>
+                        <a:srgbClr val="F6EDD5"/>
                       </a:solidFill>
                       <a:prstDash val="solid"/>
                     </a:lnL>
                     <a:lnR w="9525" cap="flat" cmpd="sng" algn="ctr">
                       <a:solidFill>
-                        <a:srgbClr val="F6EACB"/>
+                        <a:srgbClr val="F6EDD5"/>
                       </a:solidFill>
                       <a:prstDash val="solid"/>
                     </a:lnR>
                     <a:lnT w="9525" cap="flat" cmpd="sng" algn="ctr">
                       <a:solidFill>
-                        <a:srgbClr val="F6EACB"/>
+                        <a:srgbClr val="F6EDD5"/>
                       </a:solidFill>
                       <a:prstDash val="solid"/>
                     </a:lnT>
                     <a:lnB w="9525" cap="flat" cmpd="sng" algn="ctr">
                       <a:solidFill>
-                        <a:srgbClr val="F6EACB"/>
+                        <a:srgbClr val="F6EDD5"/>
                       </a:solidFill>
                       <a:prstDash val="solid"/>
                     </a:lnB>
                     <a:solidFill>
-                      <a:srgbClr val="FBF8EE"/>
+                      <a:srgbClr val="FBF7EC"/>
                     </a:solidFill>
                   </a:tcPr>
                 </a:tc>
@@ -5420,7 +5686,7 @@
                       <a:r>
                         <a:rPr sz="1400" b="0">
                           <a:solidFill>
-                            <a:srgbClr val="2B2B2B"/>
+                            <a:srgbClr val="26231F"/>
                           </a:solidFill>
                         </a:rPr>
                         <a:t/>
@@ -5430,30 +5696,30 @@
                   <a:tcPr anchor="ctr" marL="73152" marR="73152">
                     <a:lnL w="9525" cap="flat" cmpd="sng" algn="ctr">
                       <a:solidFill>
-                        <a:srgbClr val="F6EACB"/>
+                        <a:srgbClr val="F6EDD5"/>
                       </a:solidFill>
                       <a:prstDash val="solid"/>
                     </a:lnL>
                     <a:lnR w="9525" cap="flat" cmpd="sng" algn="ctr">
                       <a:solidFill>
-                        <a:srgbClr val="F6EACB"/>
+                        <a:srgbClr val="F6EDD5"/>
                       </a:solidFill>
                       <a:prstDash val="solid"/>
                     </a:lnR>
                     <a:lnT w="9525" cap="flat" cmpd="sng" algn="ctr">
                       <a:solidFill>
-                        <a:srgbClr val="F6EACB"/>
+                        <a:srgbClr val="F6EDD5"/>
                       </a:solidFill>
                       <a:prstDash val="solid"/>
                     </a:lnT>
                     <a:lnB w="9525" cap="flat" cmpd="sng" algn="ctr">
                       <a:solidFill>
-                        <a:srgbClr val="F6EACB"/>
+                        <a:srgbClr val="F6EDD5"/>
                       </a:solidFill>
                       <a:prstDash val="solid"/>
                     </a:lnB>
                     <a:solidFill>
-                      <a:srgbClr val="FBF8EE"/>
+                      <a:srgbClr val="FBF7EC"/>
                     </a:solidFill>
                   </a:tcPr>
                 </a:tc>
@@ -5466,7 +5732,7 @@
                       <a:r>
                         <a:rPr sz="1400" b="0">
                           <a:solidFill>
-                            <a:srgbClr val="2B2B2B"/>
+                            <a:srgbClr val="26231F"/>
                           </a:solidFill>
                         </a:rPr>
                         <a:t/>
@@ -5476,30 +5742,30 @@
                   <a:tcPr anchor="ctr" marL="73152" marR="73152">
                     <a:lnL w="9525" cap="flat" cmpd="sng" algn="ctr">
                       <a:solidFill>
-                        <a:srgbClr val="F6EACB"/>
+                        <a:srgbClr val="F6EDD5"/>
                       </a:solidFill>
                       <a:prstDash val="solid"/>
                     </a:lnL>
                     <a:lnR w="9525" cap="flat" cmpd="sng" algn="ctr">
                       <a:solidFill>
-                        <a:srgbClr val="F6EACB"/>
+                        <a:srgbClr val="F6EDD5"/>
                       </a:solidFill>
                       <a:prstDash val="solid"/>
                     </a:lnR>
                     <a:lnT w="9525" cap="flat" cmpd="sng" algn="ctr">
                       <a:solidFill>
-                        <a:srgbClr val="F6EACB"/>
+                        <a:srgbClr val="F6EDD5"/>
                       </a:solidFill>
                       <a:prstDash val="solid"/>
                     </a:lnT>
                     <a:lnB w="9525" cap="flat" cmpd="sng" algn="ctr">
                       <a:solidFill>
-                        <a:srgbClr val="F6EACB"/>
+                        <a:srgbClr val="F6EDD5"/>
                       </a:solidFill>
                       <a:prstDash val="solid"/>
                     </a:lnB>
                     <a:solidFill>
-                      <a:srgbClr val="FBF8EE"/>
+                      <a:srgbClr val="FBF7EC"/>
                     </a:solidFill>
                   </a:tcPr>
                 </a:tc>
@@ -5512,7 +5778,7 @@
                       <a:r>
                         <a:rPr sz="1400" b="0">
                           <a:solidFill>
-                            <a:srgbClr val="2B2B2B"/>
+                            <a:srgbClr val="26231F"/>
                           </a:solidFill>
                         </a:rPr>
                         <a:t/>
@@ -5522,30 +5788,30 @@
                   <a:tcPr anchor="ctr" marL="73152" marR="73152">
                     <a:lnL w="9525" cap="flat" cmpd="sng" algn="ctr">
                       <a:solidFill>
-                        <a:srgbClr val="F6EACB"/>
+                        <a:srgbClr val="F6EDD5"/>
                       </a:solidFill>
                       <a:prstDash val="solid"/>
                     </a:lnL>
                     <a:lnR w="9525" cap="flat" cmpd="sng" algn="ctr">
                       <a:solidFill>
-                        <a:srgbClr val="F6EACB"/>
+                        <a:srgbClr val="F6EDD5"/>
                       </a:solidFill>
                       <a:prstDash val="solid"/>
                     </a:lnR>
                     <a:lnT w="9525" cap="flat" cmpd="sng" algn="ctr">
                       <a:solidFill>
-                        <a:srgbClr val="F6EACB"/>
+                        <a:srgbClr val="F6EDD5"/>
                       </a:solidFill>
                       <a:prstDash val="solid"/>
                     </a:lnT>
                     <a:lnB w="9525" cap="flat" cmpd="sng" algn="ctr">
                       <a:solidFill>
-                        <a:srgbClr val="F6EACB"/>
+                        <a:srgbClr val="F6EDD5"/>
                       </a:solidFill>
                       <a:prstDash val="solid"/>
                     </a:lnB>
                     <a:solidFill>
-                      <a:srgbClr val="FBF8EE"/>
+                      <a:srgbClr val="FBF7EC"/>
                     </a:solidFill>
                   </a:tcPr>
                 </a:tc>
@@ -5560,7 +5826,7 @@
                       <a:r>
                         <a:rPr sz="1400" b="0">
                           <a:solidFill>
-                            <a:srgbClr val="2B2B2B"/>
+                            <a:srgbClr val="26231F"/>
                           </a:solidFill>
                         </a:rPr>
                         <a:t/>
@@ -5570,25 +5836,25 @@
                   <a:tcPr anchor="ctr" marL="73152" marR="73152">
                     <a:lnL w="9525" cap="flat" cmpd="sng" algn="ctr">
                       <a:solidFill>
-                        <a:srgbClr val="F6EACB"/>
+                        <a:srgbClr val="F6EDD5"/>
                       </a:solidFill>
                       <a:prstDash val="solid"/>
                     </a:lnL>
                     <a:lnR w="9525" cap="flat" cmpd="sng" algn="ctr">
                       <a:solidFill>
-                        <a:srgbClr val="F6EACB"/>
+                        <a:srgbClr val="F6EDD5"/>
                       </a:solidFill>
                       <a:prstDash val="solid"/>
                     </a:lnR>
                     <a:lnT w="9525" cap="flat" cmpd="sng" algn="ctr">
                       <a:solidFill>
-                        <a:srgbClr val="F6EACB"/>
+                        <a:srgbClr val="F6EDD5"/>
                       </a:solidFill>
                       <a:prstDash val="solid"/>
                     </a:lnT>
                     <a:lnB w="9525" cap="flat" cmpd="sng" algn="ctr">
                       <a:solidFill>
-                        <a:srgbClr val="F6EACB"/>
+                        <a:srgbClr val="F6EDD5"/>
                       </a:solidFill>
                       <a:prstDash val="solid"/>
                     </a:lnB>
@@ -5606,7 +5872,7 @@
                       <a:r>
                         <a:rPr sz="1400" b="0">
                           <a:solidFill>
-                            <a:srgbClr val="2B2B2B"/>
+                            <a:srgbClr val="26231F"/>
                           </a:solidFill>
                         </a:rPr>
                         <a:t/>
@@ -5616,25 +5882,25 @@
                   <a:tcPr anchor="ctr" marL="73152" marR="73152">
                     <a:lnL w="9525" cap="flat" cmpd="sng" algn="ctr">
                       <a:solidFill>
-                        <a:srgbClr val="F6EACB"/>
+                        <a:srgbClr val="F6EDD5"/>
                       </a:solidFill>
                       <a:prstDash val="solid"/>
                     </a:lnL>
                     <a:lnR w="9525" cap="flat" cmpd="sng" algn="ctr">
                       <a:solidFill>
-                        <a:srgbClr val="F6EACB"/>
+                        <a:srgbClr val="F6EDD5"/>
                       </a:solidFill>
                       <a:prstDash val="solid"/>
                     </a:lnR>
                     <a:lnT w="9525" cap="flat" cmpd="sng" algn="ctr">
                       <a:solidFill>
-                        <a:srgbClr val="F6EACB"/>
+                        <a:srgbClr val="F6EDD5"/>
                       </a:solidFill>
                       <a:prstDash val="solid"/>
                     </a:lnT>
                     <a:lnB w="9525" cap="flat" cmpd="sng" algn="ctr">
                       <a:solidFill>
-                        <a:srgbClr val="F6EACB"/>
+                        <a:srgbClr val="F6EDD5"/>
                       </a:solidFill>
                       <a:prstDash val="solid"/>
                     </a:lnB>
@@ -5652,7 +5918,7 @@
                       <a:r>
                         <a:rPr sz="1400" b="0">
                           <a:solidFill>
-                            <a:srgbClr val="2B2B2B"/>
+                            <a:srgbClr val="26231F"/>
                           </a:solidFill>
                         </a:rPr>
                         <a:t/>
@@ -5662,25 +5928,25 @@
                   <a:tcPr anchor="ctr" marL="73152" marR="73152">
                     <a:lnL w="9525" cap="flat" cmpd="sng" algn="ctr">
                       <a:solidFill>
-                        <a:srgbClr val="F6EACB"/>
+                        <a:srgbClr val="F6EDD5"/>
                       </a:solidFill>
                       <a:prstDash val="solid"/>
                     </a:lnL>
                     <a:lnR w="9525" cap="flat" cmpd="sng" algn="ctr">
                       <a:solidFill>
-                        <a:srgbClr val="F6EACB"/>
+                        <a:srgbClr val="F6EDD5"/>
                       </a:solidFill>
                       <a:prstDash val="solid"/>
                     </a:lnR>
                     <a:lnT w="9525" cap="flat" cmpd="sng" algn="ctr">
                       <a:solidFill>
-                        <a:srgbClr val="F6EACB"/>
+                        <a:srgbClr val="F6EDD5"/>
                       </a:solidFill>
                       <a:prstDash val="solid"/>
                     </a:lnT>
                     <a:lnB w="9525" cap="flat" cmpd="sng" algn="ctr">
                       <a:solidFill>
-                        <a:srgbClr val="F6EACB"/>
+                        <a:srgbClr val="F6EDD5"/>
                       </a:solidFill>
                       <a:prstDash val="solid"/>
                     </a:lnB>
@@ -5698,7 +5964,7 @@
                       <a:r>
                         <a:rPr sz="1400" b="0">
                           <a:solidFill>
-                            <a:srgbClr val="2B2B2B"/>
+                            <a:srgbClr val="26231F"/>
                           </a:solidFill>
                         </a:rPr>
                         <a:t/>
@@ -5708,25 +5974,25 @@
                   <a:tcPr anchor="ctr" marL="73152" marR="73152">
                     <a:lnL w="9525" cap="flat" cmpd="sng" algn="ctr">
                       <a:solidFill>
-                        <a:srgbClr val="F6EACB"/>
+                        <a:srgbClr val="F6EDD5"/>
                       </a:solidFill>
                       <a:prstDash val="solid"/>
                     </a:lnL>
                     <a:lnR w="9525" cap="flat" cmpd="sng" algn="ctr">
                       <a:solidFill>
-                        <a:srgbClr val="F6EACB"/>
+                        <a:srgbClr val="F6EDD5"/>
                       </a:solidFill>
                       <a:prstDash val="solid"/>
                     </a:lnR>
                     <a:lnT w="9525" cap="flat" cmpd="sng" algn="ctr">
                       <a:solidFill>
-                        <a:srgbClr val="F6EACB"/>
+                        <a:srgbClr val="F6EDD5"/>
                       </a:solidFill>
                       <a:prstDash val="solid"/>
                     </a:lnT>
                     <a:lnB w="9525" cap="flat" cmpd="sng" algn="ctr">
                       <a:solidFill>
-                        <a:srgbClr val="F6EACB"/>
+                        <a:srgbClr val="F6EDD5"/>
                       </a:solidFill>
                       <a:prstDash val="solid"/>
                     </a:lnB>
@@ -5744,7 +6010,7 @@
                       <a:r>
                         <a:rPr sz="1400" b="0">
                           <a:solidFill>
-                            <a:srgbClr val="2B2B2B"/>
+                            <a:srgbClr val="26231F"/>
                           </a:solidFill>
                         </a:rPr>
                         <a:t/>
@@ -5754,25 +6020,25 @@
                   <a:tcPr anchor="ctr" marL="73152" marR="73152">
                     <a:lnL w="9525" cap="flat" cmpd="sng" algn="ctr">
                       <a:solidFill>
-                        <a:srgbClr val="F6EACB"/>
+                        <a:srgbClr val="F6EDD5"/>
                       </a:solidFill>
                       <a:prstDash val="solid"/>
                     </a:lnL>
                     <a:lnR w="9525" cap="flat" cmpd="sng" algn="ctr">
                       <a:solidFill>
-                        <a:srgbClr val="F6EACB"/>
+                        <a:srgbClr val="F6EDD5"/>
                       </a:solidFill>
                       <a:prstDash val="solid"/>
                     </a:lnR>
                     <a:lnT w="9525" cap="flat" cmpd="sng" algn="ctr">
                       <a:solidFill>
-                        <a:srgbClr val="F6EACB"/>
+                        <a:srgbClr val="F6EDD5"/>
                       </a:solidFill>
                       <a:prstDash val="solid"/>
                     </a:lnT>
                     <a:lnB w="9525" cap="flat" cmpd="sng" algn="ctr">
                       <a:solidFill>
-                        <a:srgbClr val="F6EACB"/>
+                        <a:srgbClr val="F6EDD5"/>
                       </a:solidFill>
                       <a:prstDash val="solid"/>
                     </a:lnB>
@@ -5792,7 +6058,7 @@
                       <a:r>
                         <a:rPr sz="1400" b="0">
                           <a:solidFill>
-                            <a:srgbClr val="2B2B2B"/>
+                            <a:srgbClr val="26231F"/>
                           </a:solidFill>
                         </a:rPr>
                         <a:t/>
@@ -5802,30 +6068,30 @@
                   <a:tcPr anchor="ctr" marL="73152" marR="73152">
                     <a:lnL w="9525" cap="flat" cmpd="sng" algn="ctr">
                       <a:solidFill>
-                        <a:srgbClr val="F6EACB"/>
+                        <a:srgbClr val="F6EDD5"/>
                       </a:solidFill>
                       <a:prstDash val="solid"/>
                     </a:lnL>
                     <a:lnR w="9525" cap="flat" cmpd="sng" algn="ctr">
                       <a:solidFill>
-                        <a:srgbClr val="F6EACB"/>
+                        <a:srgbClr val="F6EDD5"/>
                       </a:solidFill>
                       <a:prstDash val="solid"/>
                     </a:lnR>
                     <a:lnT w="9525" cap="flat" cmpd="sng" algn="ctr">
                       <a:solidFill>
-                        <a:srgbClr val="F6EACB"/>
+                        <a:srgbClr val="F6EDD5"/>
                       </a:solidFill>
                       <a:prstDash val="solid"/>
                     </a:lnT>
                     <a:lnB w="9525" cap="flat" cmpd="sng" algn="ctr">
                       <a:solidFill>
-                        <a:srgbClr val="F6EACB"/>
+                        <a:srgbClr val="F6EDD5"/>
                       </a:solidFill>
                       <a:prstDash val="solid"/>
                     </a:lnB>
                     <a:solidFill>
-                      <a:srgbClr val="FBF8EE"/>
+                      <a:srgbClr val="FBF7EC"/>
                     </a:solidFill>
                   </a:tcPr>
                 </a:tc>
@@ -5838,7 +6104,7 @@
                       <a:r>
                         <a:rPr sz="1400" b="0">
                           <a:solidFill>
-                            <a:srgbClr val="2B2B2B"/>
+                            <a:srgbClr val="26231F"/>
                           </a:solidFill>
                         </a:rPr>
                         <a:t/>
@@ -5848,30 +6114,30 @@
                   <a:tcPr anchor="ctr" marL="73152" marR="73152">
                     <a:lnL w="9525" cap="flat" cmpd="sng" algn="ctr">
                       <a:solidFill>
-                        <a:srgbClr val="F6EACB"/>
+                        <a:srgbClr val="F6EDD5"/>
                       </a:solidFill>
                       <a:prstDash val="solid"/>
                     </a:lnL>
                     <a:lnR w="9525" cap="flat" cmpd="sng" algn="ctr">
                       <a:solidFill>
-                        <a:srgbClr val="F6EACB"/>
+                        <a:srgbClr val="F6EDD5"/>
                       </a:solidFill>
                       <a:prstDash val="solid"/>
                     </a:lnR>
                     <a:lnT w="9525" cap="flat" cmpd="sng" algn="ctr">
                       <a:solidFill>
-                        <a:srgbClr val="F6EACB"/>
+                        <a:srgbClr val="F6EDD5"/>
                       </a:solidFill>
                       <a:prstDash val="solid"/>
                     </a:lnT>
                     <a:lnB w="9525" cap="flat" cmpd="sng" algn="ctr">
                       <a:solidFill>
-                        <a:srgbClr val="F6EACB"/>
+                        <a:srgbClr val="F6EDD5"/>
                       </a:solidFill>
                       <a:prstDash val="solid"/>
                     </a:lnB>
                     <a:solidFill>
-                      <a:srgbClr val="FBF8EE"/>
+                      <a:srgbClr val="FBF7EC"/>
                     </a:solidFill>
                   </a:tcPr>
                 </a:tc>
@@ -5884,7 +6150,7 @@
                       <a:r>
                         <a:rPr sz="1400" b="0">
                           <a:solidFill>
-                            <a:srgbClr val="2B2B2B"/>
+                            <a:srgbClr val="26231F"/>
                           </a:solidFill>
                         </a:rPr>
                         <a:t/>
@@ -5894,30 +6160,30 @@
                   <a:tcPr anchor="ctr" marL="73152" marR="73152">
                     <a:lnL w="9525" cap="flat" cmpd="sng" algn="ctr">
                       <a:solidFill>
-                        <a:srgbClr val="F6EACB"/>
+                        <a:srgbClr val="F6EDD5"/>
                       </a:solidFill>
                       <a:prstDash val="solid"/>
                     </a:lnL>
                     <a:lnR w="9525" cap="flat" cmpd="sng" algn="ctr">
                       <a:solidFill>
-                        <a:srgbClr val="F6EACB"/>
+                        <a:srgbClr val="F6EDD5"/>
                       </a:solidFill>
                       <a:prstDash val="solid"/>
                     </a:lnR>
                     <a:lnT w="9525" cap="flat" cmpd="sng" algn="ctr">
                       <a:solidFill>
-                        <a:srgbClr val="F6EACB"/>
+                        <a:srgbClr val="F6EDD5"/>
                       </a:solidFill>
                       <a:prstDash val="solid"/>
                     </a:lnT>
                     <a:lnB w="9525" cap="flat" cmpd="sng" algn="ctr">
                       <a:solidFill>
-                        <a:srgbClr val="F6EACB"/>
+                        <a:srgbClr val="F6EDD5"/>
                       </a:solidFill>
                       <a:prstDash val="solid"/>
                     </a:lnB>
                     <a:solidFill>
-                      <a:srgbClr val="FBF8EE"/>
+                      <a:srgbClr val="FBF7EC"/>
                     </a:solidFill>
                   </a:tcPr>
                 </a:tc>
@@ -5930,7 +6196,7 @@
                       <a:r>
                         <a:rPr sz="1400" b="0">
                           <a:solidFill>
-                            <a:srgbClr val="2B2B2B"/>
+                            <a:srgbClr val="26231F"/>
                           </a:solidFill>
                         </a:rPr>
                         <a:t/>
@@ -5940,30 +6206,30 @@
                   <a:tcPr anchor="ctr" marL="73152" marR="73152">
                     <a:lnL w="9525" cap="flat" cmpd="sng" algn="ctr">
                       <a:solidFill>
-                        <a:srgbClr val="F6EACB"/>
+                        <a:srgbClr val="F6EDD5"/>
                       </a:solidFill>
                       <a:prstDash val="solid"/>
                     </a:lnL>
                     <a:lnR w="9525" cap="flat" cmpd="sng" algn="ctr">
                       <a:solidFill>
-                        <a:srgbClr val="F6EACB"/>
+                        <a:srgbClr val="F6EDD5"/>
                       </a:solidFill>
                       <a:prstDash val="solid"/>
                     </a:lnR>
                     <a:lnT w="9525" cap="flat" cmpd="sng" algn="ctr">
                       <a:solidFill>
-                        <a:srgbClr val="F6EACB"/>
+                        <a:srgbClr val="F6EDD5"/>
                       </a:solidFill>
                       <a:prstDash val="solid"/>
                     </a:lnT>
                     <a:lnB w="9525" cap="flat" cmpd="sng" algn="ctr">
                       <a:solidFill>
-                        <a:srgbClr val="F6EACB"/>
+                        <a:srgbClr val="F6EDD5"/>
                       </a:solidFill>
                       <a:prstDash val="solid"/>
                     </a:lnB>
                     <a:solidFill>
-                      <a:srgbClr val="FBF8EE"/>
+                      <a:srgbClr val="FBF7EC"/>
                     </a:solidFill>
                   </a:tcPr>
                 </a:tc>
@@ -5976,7 +6242,7 @@
                       <a:r>
                         <a:rPr sz="1400" b="0">
                           <a:solidFill>
-                            <a:srgbClr val="2B2B2B"/>
+                            <a:srgbClr val="26231F"/>
                           </a:solidFill>
                         </a:rPr>
                         <a:t/>
@@ -5986,30 +6252,30 @@
                   <a:tcPr anchor="ctr" marL="73152" marR="73152">
                     <a:lnL w="9525" cap="flat" cmpd="sng" algn="ctr">
                       <a:solidFill>
-                        <a:srgbClr val="F6EACB"/>
+                        <a:srgbClr val="F6EDD5"/>
                       </a:solidFill>
                       <a:prstDash val="solid"/>
                     </a:lnL>
                     <a:lnR w="9525" cap="flat" cmpd="sng" algn="ctr">
                       <a:solidFill>
-                        <a:srgbClr val="F6EACB"/>
+                        <a:srgbClr val="F6EDD5"/>
                       </a:solidFill>
                       <a:prstDash val="solid"/>
                     </a:lnR>
                     <a:lnT w="9525" cap="flat" cmpd="sng" algn="ctr">
                       <a:solidFill>
-                        <a:srgbClr val="F6EACB"/>
+                        <a:srgbClr val="F6EDD5"/>
                       </a:solidFill>
                       <a:prstDash val="solid"/>
                     </a:lnT>
                     <a:lnB w="9525" cap="flat" cmpd="sng" algn="ctr">
                       <a:solidFill>
-                        <a:srgbClr val="F6EACB"/>
+                        <a:srgbClr val="F6EDD5"/>
                       </a:solidFill>
                       <a:prstDash val="solid"/>
                     </a:lnB>
                     <a:solidFill>
-                      <a:srgbClr val="FBF8EE"/>
+                      <a:srgbClr val="FBF7EC"/>
                     </a:solidFill>
                   </a:tcPr>
                 </a:tc>
@@ -6032,7 +6298,7 @@
     <p:bg>
       <p:bgPr>
         <a:solidFill>
-          <a:srgbClr val="FBF8EE"/>
+          <a:srgbClr val="FFFFFF"/>
         </a:solidFill>
         <a:effectLst/>
       </p:bgPr>
@@ -6051,18 +6317,111 @@
           <p:nvPr/>
         </p:nvSpPr>
         <p:spPr>
-          <a:xfrm rot="10800000">
-            <a:off x="10637215" y="0"/>
-            <a:ext cx="914400" cy="1554480"/>
-          </a:xfrm>
-          <a:prstGeom prst="round2SameRect">
-            <a:avLst>
-              <a:gd name="adj1" fmla="val 50000"/>
-              <a:gd name="adj2" fmla="val 0"/>
-            </a:avLst>
+          <a:xfrm>
+            <a:off x="0" y="6565392"/>
+            <a:ext cx="12191695" cy="292608"/>
+          </a:xfrm>
+          <a:prstGeom prst="rect">
+            <a:avLst/>
           </a:prstGeom>
           <a:solidFill>
-            <a:srgbClr val="F6EACB"/>
+            <a:srgbClr val="EBDAAD"/>
+          </a:solidFill>
+          <a:ln>
+            <a:noFill/>
+          </a:ln>
+        </p:spPr>
+        <p:txBody>
+          <a:bodyPr rtlCol="0" anchor="ctr"/>
+          <a:lstStyle/>
+          <a:p>
+            <a:pPr algn="ctr"/>
+          </a:p>
+        </p:txBody>
+      </p:sp>
+      <p:sp>
+        <p:nvSpPr>
+          <p:cNvPr id="4" name="장식"/>
+          <p:cNvSpPr/>
+          <p:nvPr/>
+        </p:nvSpPr>
+        <p:spPr>
+          <a:xfrm>
+            <a:off x="10180015" y="-1645920"/>
+            <a:ext cx="3474720" cy="3474720"/>
+          </a:xfrm>
+          <a:prstGeom prst="ellipse">
+            <a:avLst/>
+          </a:prstGeom>
+          <a:solidFill>
+            <a:srgbClr val="EBDAAD"/>
+          </a:solidFill>
+          <a:ln>
+            <a:noFill/>
+          </a:ln>
+        </p:spPr>
+        <p:txBody>
+          <a:bodyPr rtlCol="0" anchor="ctr"/>
+          <a:lstStyle/>
+          <a:p>
+            <a:pPr algn="ctr"/>
+          </a:p>
+        </p:txBody>
+      </p:sp>
+      <p:sp>
+        <p:nvSpPr>
+          <p:cNvPr id="5" name="상단 라벨"/>
+          <p:cNvSpPr txBox="1"/>
+          <p:nvPr/>
+        </p:nvSpPr>
+        <p:spPr>
+          <a:xfrm>
+            <a:off x="640080" y="274320"/>
+            <a:ext cx="5486400" cy="274320"/>
+          </a:xfrm>
+          <a:prstGeom prst="rect">
+            <a:avLst/>
+          </a:prstGeom>
+          <a:noFill/>
+        </p:spPr>
+        <p:txBody>
+          <a:bodyPr wrap="square" lIns="54864" rIns="54864" tIns="27432" bIns="27432" anchor="ctr">
+            <a:noAutofit/>
+          </a:bodyPr>
+          <a:lstStyle/>
+          <a:p>
+            <a:pPr algn="l">
+              <a:lnSpc>
+                <a:spcPct val="115000"/>
+              </a:lnSpc>
+            </a:pPr>
+            <a:r>
+              <a:rPr sz="900" b="1" i="0" spc="250">
+                <a:solidFill>
+                  <a:srgbClr val="26231F"/>
+                </a:solidFill>
+              </a:rPr>
+              <a:t>INSURANCE CHECK</a:t>
+            </a:r>
+          </a:p>
+        </p:txBody>
+      </p:sp>
+      <p:sp>
+        <p:nvSpPr>
+          <p:cNvPr id="6" name="포인트"/>
+          <p:cNvSpPr/>
+          <p:nvPr/>
+        </p:nvSpPr>
+        <p:spPr>
+          <a:xfrm>
+            <a:off x="11048695" y="502919"/>
+            <a:ext cx="274320" cy="274320"/>
+          </a:xfrm>
+          <a:prstGeom prst="moon">
+            <a:avLst/>
+          </a:prstGeom>
+          <a:solidFill>
+            <a:srgbClr val="FFFFFF"/>
           </a:solidFill>
           <a:ln>
             <a:noFill/>
@@ -6088,8 +6447,8 @@
         </p:nvSpPr>
         <p:spPr>
           <a:xfrm>
-            <a:off x="640080" y="457200"/>
-            <a:ext cx="9722815" cy="868680"/>
+            <a:off x="640080" y="658368"/>
+            <a:ext cx="9082735" cy="868680"/>
           </a:xfrm>
         </p:spPr>
         <p:txBody>
@@ -6106,7 +6465,7 @@
             <a:r>
               <a:rPr sz="3000" b="1" i="0">
                 <a:solidFill>
-                  <a:srgbClr val="544212"/>
+                  <a:srgbClr val="26231F"/>
                 </a:solidFill>
               </a:rPr>
               <a:t>보장 항목 체크</a:t>
@@ -6116,14 +6475,14 @@
       </p:sp>
       <p:graphicFrame>
         <p:nvGraphicFramePr>
-          <p:cNvPr id="4" name="표"/>
+          <p:cNvPr id="7" name="표"/>
           <p:cNvGraphicFramePr>
             <a:graphicFrameLocks noGrp="1"/>
           </p:cNvGraphicFramePr>
           <p:nvPr/>
         </p:nvGraphicFramePr>
         <p:xfrm>
-          <a:off x="640080" y="1600200"/>
+          <a:off x="640080" y="1783080"/>
           <a:ext cx="10911534" cy="4773168"/>
         </p:xfrm>
         <a:graphic>
@@ -6148,7 +6507,7 @@
                       <a:r>
                         <a:rPr sz="1400" b="1">
                           <a:solidFill>
-                            <a:srgbClr val="FFFFFF"/>
+                            <a:srgbClr val="26231F"/>
                           </a:solidFill>
                         </a:rPr>
                         <a:t>보장 항목</a:t>
@@ -6158,30 +6517,30 @@
                   <a:tcPr anchor="ctr" marL="73152" marR="73152">
                     <a:lnL w="9525" cap="flat" cmpd="sng" algn="ctr">
                       <a:solidFill>
-                        <a:srgbClr val="A78425"/>
+                        <a:srgbClr val="E1CE98"/>
                       </a:solidFill>
                       <a:prstDash val="solid"/>
                     </a:lnL>
                     <a:lnR w="9525" cap="flat" cmpd="sng" algn="ctr">
                       <a:solidFill>
-                        <a:srgbClr val="A78425"/>
+                        <a:srgbClr val="E1CE98"/>
                       </a:solidFill>
                       <a:prstDash val="solid"/>
                     </a:lnR>
                     <a:lnT w="9525" cap="flat" cmpd="sng" algn="ctr">
                       <a:solidFill>
-                        <a:srgbClr val="A78425"/>
+                        <a:srgbClr val="E1CE98"/>
                       </a:solidFill>
                       <a:prstDash val="solid"/>
                     </a:lnT>
                     <a:lnB w="9525" cap="flat" cmpd="sng" algn="ctr">
                       <a:solidFill>
-                        <a:srgbClr val="A78425"/>
+                        <a:srgbClr val="E1CE98"/>
                       </a:solidFill>
                       <a:prstDash val="solid"/>
                     </a:lnB>
                     <a:solidFill>
-                      <a:srgbClr val="A78425"/>
+                      <a:srgbClr val="E1CE98"/>
                     </a:solidFill>
                   </a:tcPr>
                 </a:tc>
@@ -6194,7 +6553,7 @@
                       <a:r>
                         <a:rPr sz="1400" b="1">
                           <a:solidFill>
-                            <a:srgbClr val="FFFFFF"/>
+                            <a:srgbClr val="26231F"/>
                           </a:solidFill>
                         </a:rPr>
                         <a:t>가입 확인</a:t>
@@ -6204,30 +6563,30 @@
                   <a:tcPr anchor="ctr" marL="73152" marR="73152">
                     <a:lnL w="9525" cap="flat" cmpd="sng" algn="ctr">
                       <a:solidFill>
-                        <a:srgbClr val="A78425"/>
+                        <a:srgbClr val="E1CE98"/>
                       </a:solidFill>
                       <a:prstDash val="solid"/>
                     </a:lnL>
                     <a:lnR w="9525" cap="flat" cmpd="sng" algn="ctr">
                       <a:solidFill>
-                        <a:srgbClr val="A78425"/>
+                        <a:srgbClr val="E1CE98"/>
                       </a:solidFill>
                       <a:prstDash val="solid"/>
                     </a:lnR>
                     <a:lnT w="9525" cap="flat" cmpd="sng" algn="ctr">
                       <a:solidFill>
-                        <a:srgbClr val="A78425"/>
+                        <a:srgbClr val="E1CE98"/>
                       </a:solidFill>
                       <a:prstDash val="solid"/>
                     </a:lnT>
                     <a:lnB w="9525" cap="flat" cmpd="sng" algn="ctr">
                       <a:solidFill>
-                        <a:srgbClr val="A78425"/>
+                        <a:srgbClr val="E1CE98"/>
                       </a:solidFill>
                       <a:prstDash val="solid"/>
                     </a:lnB>
                     <a:solidFill>
-                      <a:srgbClr val="A78425"/>
+                      <a:srgbClr val="E1CE98"/>
                     </a:solidFill>
                   </a:tcPr>
                 </a:tc>
@@ -6240,7 +6599,7 @@
                       <a:r>
                         <a:rPr sz="1400" b="1">
                           <a:solidFill>
-                            <a:srgbClr val="FFFFFF"/>
+                            <a:srgbClr val="26231F"/>
                           </a:solidFill>
                         </a:rPr>
                         <a:t>확인 필요</a:t>
@@ -6250,30 +6609,30 @@
                   <a:tcPr anchor="ctr" marL="73152" marR="73152">
                     <a:lnL w="9525" cap="flat" cmpd="sng" algn="ctr">
                       <a:solidFill>
-                        <a:srgbClr val="A78425"/>
+                        <a:srgbClr val="E1CE98"/>
                       </a:solidFill>
                       <a:prstDash val="solid"/>
                     </a:lnL>
                     <a:lnR w="9525" cap="flat" cmpd="sng" algn="ctr">
                       <a:solidFill>
-                        <a:srgbClr val="A78425"/>
+                        <a:srgbClr val="E1CE98"/>
                       </a:solidFill>
                       <a:prstDash val="solid"/>
                     </a:lnR>
                     <a:lnT w="9525" cap="flat" cmpd="sng" algn="ctr">
                       <a:solidFill>
-                        <a:srgbClr val="A78425"/>
+                        <a:srgbClr val="E1CE98"/>
                       </a:solidFill>
                       <a:prstDash val="solid"/>
                     </a:lnT>
                     <a:lnB w="9525" cap="flat" cmpd="sng" algn="ctr">
                       <a:solidFill>
-                        <a:srgbClr val="A78425"/>
+                        <a:srgbClr val="E1CE98"/>
                       </a:solidFill>
                       <a:prstDash val="solid"/>
                     </a:lnB>
                     <a:solidFill>
-                      <a:srgbClr val="A78425"/>
+                      <a:srgbClr val="E1CE98"/>
                     </a:solidFill>
                   </a:tcPr>
                 </a:tc>
@@ -6286,7 +6645,7 @@
                       <a:r>
                         <a:rPr sz="1400" b="1">
                           <a:solidFill>
-                            <a:srgbClr val="FFFFFF"/>
+                            <a:srgbClr val="26231F"/>
                           </a:solidFill>
                         </a:rPr>
                         <a:t>해당 없음</a:t>
@@ -6296,30 +6655,30 @@
                   <a:tcPr anchor="ctr" marL="73152" marR="73152">
                     <a:lnL w="9525" cap="flat" cmpd="sng" algn="ctr">
                       <a:solidFill>
-                        <a:srgbClr val="A78425"/>
+                        <a:srgbClr val="E1CE98"/>
                       </a:solidFill>
                       <a:prstDash val="solid"/>
                     </a:lnL>
                     <a:lnR w="9525" cap="flat" cmpd="sng" algn="ctr">
                       <a:solidFill>
-                        <a:srgbClr val="A78425"/>
+                        <a:srgbClr val="E1CE98"/>
                       </a:solidFill>
                       <a:prstDash val="solid"/>
                     </a:lnR>
                     <a:lnT w="9525" cap="flat" cmpd="sng" algn="ctr">
                       <a:solidFill>
-                        <a:srgbClr val="A78425"/>
+                        <a:srgbClr val="E1CE98"/>
                       </a:solidFill>
                       <a:prstDash val="solid"/>
                     </a:lnT>
                     <a:lnB w="9525" cap="flat" cmpd="sng" algn="ctr">
                       <a:solidFill>
-                        <a:srgbClr val="A78425"/>
+                        <a:srgbClr val="E1CE98"/>
                       </a:solidFill>
                       <a:prstDash val="solid"/>
                     </a:lnB>
                     <a:solidFill>
-                      <a:srgbClr val="A78425"/>
+                      <a:srgbClr val="E1CE98"/>
                     </a:solidFill>
                   </a:tcPr>
                 </a:tc>
@@ -6334,7 +6693,7 @@
                       <a:r>
                         <a:rPr sz="1400" b="1">
                           <a:solidFill>
-                            <a:srgbClr val="544212"/>
+                            <a:srgbClr val="494027"/>
                           </a:solidFill>
                         </a:rPr>
                         <a:t>사망·재해</a:t>
@@ -6344,30 +6703,30 @@
                   <a:tcPr anchor="ctr" marL="73152" marR="73152">
                     <a:lnL w="9525" cap="flat" cmpd="sng" algn="ctr">
                       <a:solidFill>
-                        <a:srgbClr val="F6EACB"/>
+                        <a:srgbClr val="F6EDD5"/>
                       </a:solidFill>
                       <a:prstDash val="solid"/>
                     </a:lnL>
                     <a:lnR w="9525" cap="flat" cmpd="sng" algn="ctr">
                       <a:solidFill>
-                        <a:srgbClr val="F6EACB"/>
+                        <a:srgbClr val="F6EDD5"/>
                       </a:solidFill>
                       <a:prstDash val="solid"/>
                     </a:lnR>
                     <a:lnT w="9525" cap="flat" cmpd="sng" algn="ctr">
                       <a:solidFill>
-                        <a:srgbClr val="F6EACB"/>
+                        <a:srgbClr val="F6EDD5"/>
                       </a:solidFill>
                       <a:prstDash val="solid"/>
                     </a:lnT>
                     <a:lnB w="9525" cap="flat" cmpd="sng" algn="ctr">
                       <a:solidFill>
-                        <a:srgbClr val="F6EACB"/>
+                        <a:srgbClr val="F6EDD5"/>
                       </a:solidFill>
                       <a:prstDash val="solid"/>
                     </a:lnB>
                     <a:solidFill>
-                      <a:srgbClr val="F6EACB"/>
+                      <a:srgbClr val="F6EDD5"/>
                     </a:solidFill>
                   </a:tcPr>
                 </a:tc>
@@ -6380,7 +6739,7 @@
                       <a:r>
                         <a:rPr sz="1400" b="0">
                           <a:solidFill>
-                            <a:srgbClr val="2B2B2B"/>
+                            <a:srgbClr val="26231F"/>
                           </a:solidFill>
                         </a:rPr>
                         <a:t>□</a:t>
@@ -6390,25 +6749,25 @@
                   <a:tcPr anchor="ctr" marL="73152" marR="73152">
                     <a:lnL w="9525" cap="flat" cmpd="sng" algn="ctr">
                       <a:solidFill>
-                        <a:srgbClr val="F6EACB"/>
+                        <a:srgbClr val="F6EDD5"/>
                       </a:solidFill>
                       <a:prstDash val="solid"/>
                     </a:lnL>
                     <a:lnR w="9525" cap="flat" cmpd="sng" algn="ctr">
                       <a:solidFill>
-                        <a:srgbClr val="F6EACB"/>
+                        <a:srgbClr val="F6EDD5"/>
                       </a:solidFill>
                       <a:prstDash val="solid"/>
                     </a:lnR>
                     <a:lnT w="9525" cap="flat" cmpd="sng" algn="ctr">
                       <a:solidFill>
-                        <a:srgbClr val="F6EACB"/>
+                        <a:srgbClr val="F6EDD5"/>
                       </a:solidFill>
                       <a:prstDash val="solid"/>
                     </a:lnT>
                     <a:lnB w="9525" cap="flat" cmpd="sng" algn="ctr">
                       <a:solidFill>
-                        <a:srgbClr val="F6EACB"/>
+                        <a:srgbClr val="F6EDD5"/>
                       </a:solidFill>
                       <a:prstDash val="solid"/>
                     </a:lnB>
@@ -6426,7 +6785,7 @@
                       <a:r>
                         <a:rPr sz="1400" b="0">
                           <a:solidFill>
-                            <a:srgbClr val="2B2B2B"/>
+                            <a:srgbClr val="26231F"/>
                           </a:solidFill>
                         </a:rPr>
                         <a:t>□</a:t>
@@ -6436,25 +6795,25 @@
                   <a:tcPr anchor="ctr" marL="73152" marR="73152">
                     <a:lnL w="9525" cap="flat" cmpd="sng" algn="ctr">
                       <a:solidFill>
-                        <a:srgbClr val="F6EACB"/>
+                        <a:srgbClr val="F6EDD5"/>
                       </a:solidFill>
                       <a:prstDash val="solid"/>
                     </a:lnL>
                     <a:lnR w="9525" cap="flat" cmpd="sng" algn="ctr">
                       <a:solidFill>
-                        <a:srgbClr val="F6EACB"/>
+                        <a:srgbClr val="F6EDD5"/>
                       </a:solidFill>
                       <a:prstDash val="solid"/>
                     </a:lnR>
                     <a:lnT w="9525" cap="flat" cmpd="sng" algn="ctr">
                       <a:solidFill>
-                        <a:srgbClr val="F6EACB"/>
+                        <a:srgbClr val="F6EDD5"/>
                       </a:solidFill>
                       <a:prstDash val="solid"/>
                     </a:lnT>
                     <a:lnB w="9525" cap="flat" cmpd="sng" algn="ctr">
                       <a:solidFill>
-                        <a:srgbClr val="F6EACB"/>
+                        <a:srgbClr val="F6EDD5"/>
                       </a:solidFill>
                       <a:prstDash val="solid"/>
                     </a:lnB>
@@ -6472,7 +6831,7 @@
                       <a:r>
                         <a:rPr sz="1400" b="0">
                           <a:solidFill>
-                            <a:srgbClr val="2B2B2B"/>
+                            <a:srgbClr val="26231F"/>
                           </a:solidFill>
                         </a:rPr>
                         <a:t>□</a:t>
@@ -6482,25 +6841,25 @@
                   <a:tcPr anchor="ctr" marL="73152" marR="73152">
                     <a:lnL w="9525" cap="flat" cmpd="sng" algn="ctr">
                       <a:solidFill>
-                        <a:srgbClr val="F6EACB"/>
+                        <a:srgbClr val="F6EDD5"/>
                       </a:solidFill>
                       <a:prstDash val="solid"/>
                     </a:lnL>
                     <a:lnR w="9525" cap="flat" cmpd="sng" algn="ctr">
                       <a:solidFill>
-                        <a:srgbClr val="F6EACB"/>
+                        <a:srgbClr val="F6EDD5"/>
                       </a:solidFill>
                       <a:prstDash val="solid"/>
                     </a:lnR>
                     <a:lnT w="9525" cap="flat" cmpd="sng" algn="ctr">
                       <a:solidFill>
-                        <a:srgbClr val="F6EACB"/>
+                        <a:srgbClr val="F6EDD5"/>
                       </a:solidFill>
                       <a:prstDash val="solid"/>
                     </a:lnT>
                     <a:lnB w="9525" cap="flat" cmpd="sng" algn="ctr">
                       <a:solidFill>
-                        <a:srgbClr val="F6EACB"/>
+                        <a:srgbClr val="F6EDD5"/>
                       </a:solidFill>
                       <a:prstDash val="solid"/>
                     </a:lnB>
@@ -6520,7 +6879,7 @@
                       <a:r>
                         <a:rPr sz="1400" b="1">
                           <a:solidFill>
-                            <a:srgbClr val="544212"/>
+                            <a:srgbClr val="494027"/>
                           </a:solidFill>
                         </a:rPr>
                         <a:t>질병 진단</a:t>
@@ -6530,30 +6889,30 @@
                   <a:tcPr anchor="ctr" marL="73152" marR="73152">
                     <a:lnL w="9525" cap="flat" cmpd="sng" algn="ctr">
                       <a:solidFill>
-                        <a:srgbClr val="F6EACB"/>
+                        <a:srgbClr val="F6EDD5"/>
                       </a:solidFill>
                       <a:prstDash val="solid"/>
                     </a:lnL>
                     <a:lnR w="9525" cap="flat" cmpd="sng" algn="ctr">
                       <a:solidFill>
-                        <a:srgbClr val="F6EACB"/>
+                        <a:srgbClr val="F6EDD5"/>
                       </a:solidFill>
                       <a:prstDash val="solid"/>
                     </a:lnR>
                     <a:lnT w="9525" cap="flat" cmpd="sng" algn="ctr">
                       <a:solidFill>
-                        <a:srgbClr val="F6EACB"/>
+                        <a:srgbClr val="F6EDD5"/>
                       </a:solidFill>
                       <a:prstDash val="solid"/>
                     </a:lnT>
                     <a:lnB w="9525" cap="flat" cmpd="sng" algn="ctr">
                       <a:solidFill>
-                        <a:srgbClr val="F6EACB"/>
+                        <a:srgbClr val="F6EDD5"/>
                       </a:solidFill>
                       <a:prstDash val="solid"/>
                     </a:lnB>
                     <a:solidFill>
-                      <a:srgbClr val="F6EACB"/>
+                      <a:srgbClr val="F6EDD5"/>
                     </a:solidFill>
                   </a:tcPr>
                 </a:tc>
@@ -6566,7 +6925,7 @@
                       <a:r>
                         <a:rPr sz="1400" b="0">
                           <a:solidFill>
-                            <a:srgbClr val="2B2B2B"/>
+                            <a:srgbClr val="26231F"/>
                           </a:solidFill>
                         </a:rPr>
                         <a:t>□</a:t>
@@ -6576,30 +6935,30 @@
                   <a:tcPr anchor="ctr" marL="73152" marR="73152">
                     <a:lnL w="9525" cap="flat" cmpd="sng" algn="ctr">
                       <a:solidFill>
-                        <a:srgbClr val="F6EACB"/>
+                        <a:srgbClr val="F6EDD5"/>
                       </a:solidFill>
                       <a:prstDash val="solid"/>
                     </a:lnL>
                     <a:lnR w="9525" cap="flat" cmpd="sng" algn="ctr">
                       <a:solidFill>
-                        <a:srgbClr val="F6EACB"/>
+                        <a:srgbClr val="F6EDD5"/>
                       </a:solidFill>
                       <a:prstDash val="solid"/>
                     </a:lnR>
                     <a:lnT w="9525" cap="flat" cmpd="sng" algn="ctr">
                       <a:solidFill>
-                        <a:srgbClr val="F6EACB"/>
+                        <a:srgbClr val="F6EDD5"/>
                       </a:solidFill>
                       <a:prstDash val="solid"/>
                     </a:lnT>
                     <a:lnB w="9525" cap="flat" cmpd="sng" algn="ctr">
                       <a:solidFill>
-                        <a:srgbClr val="F6EACB"/>
+                        <a:srgbClr val="F6EDD5"/>
                       </a:solidFill>
                       <a:prstDash val="solid"/>
                     </a:lnB>
                     <a:solidFill>
-                      <a:srgbClr val="FBF8EE"/>
+                      <a:srgbClr val="FBF7EC"/>
                     </a:solidFill>
                   </a:tcPr>
                 </a:tc>
@@ -6612,7 +6971,7 @@
                       <a:r>
                         <a:rPr sz="1400" b="0">
                           <a:solidFill>
-                            <a:srgbClr val="2B2B2B"/>
+                            <a:srgbClr val="26231F"/>
                           </a:solidFill>
                         </a:rPr>
                         <a:t>□</a:t>
@@ -6622,30 +6981,30 @@
                   <a:tcPr anchor="ctr" marL="73152" marR="73152">
                     <a:lnL w="9525" cap="flat" cmpd="sng" algn="ctr">
                       <a:solidFill>
-                        <a:srgbClr val="F6EACB"/>
+                        <a:srgbClr val="F6EDD5"/>
                       </a:solidFill>
                       <a:prstDash val="solid"/>
                     </a:lnL>
                     <a:lnR w="9525" cap="flat" cmpd="sng" algn="ctr">
                       <a:solidFill>
-                        <a:srgbClr val="F6EACB"/>
+                        <a:srgbClr val="F6EDD5"/>
                       </a:solidFill>
                       <a:prstDash val="solid"/>
                     </a:lnR>
                     <a:lnT w="9525" cap="flat" cmpd="sng" algn="ctr">
                       <a:solidFill>
-                        <a:srgbClr val="F6EACB"/>
+                        <a:srgbClr val="F6EDD5"/>
                       </a:solidFill>
                       <a:prstDash val="solid"/>
                     </a:lnT>
                     <a:lnB w="9525" cap="flat" cmpd="sng" algn="ctr">
                       <a:solidFill>
-                        <a:srgbClr val="F6EACB"/>
+                        <a:srgbClr val="F6EDD5"/>
                       </a:solidFill>
                       <a:prstDash val="solid"/>
                     </a:lnB>
                     <a:solidFill>
-                      <a:srgbClr val="FBF8EE"/>
+                      <a:srgbClr val="FBF7EC"/>
                     </a:solidFill>
                   </a:tcPr>
                 </a:tc>
@@ -6658,7 +7017,7 @@
                       <a:r>
                         <a:rPr sz="1400" b="0">
                           <a:solidFill>
-                            <a:srgbClr val="2B2B2B"/>
+                            <a:srgbClr val="26231F"/>
                           </a:solidFill>
                         </a:rPr>
                         <a:t>□</a:t>
@@ -6668,30 +7027,30 @@
                   <a:tcPr anchor="ctr" marL="73152" marR="73152">
                     <a:lnL w="9525" cap="flat" cmpd="sng" algn="ctr">
                       <a:solidFill>
-                        <a:srgbClr val="F6EACB"/>
+                        <a:srgbClr val="F6EDD5"/>
                       </a:solidFill>
                       <a:prstDash val="solid"/>
                     </a:lnL>
                     <a:lnR w="9525" cap="flat" cmpd="sng" algn="ctr">
                       <a:solidFill>
-                        <a:srgbClr val="F6EACB"/>
+                        <a:srgbClr val="F6EDD5"/>
                       </a:solidFill>
                       <a:prstDash val="solid"/>
                     </a:lnR>
                     <a:lnT w="9525" cap="flat" cmpd="sng" algn="ctr">
                       <a:solidFill>
-                        <a:srgbClr val="F6EACB"/>
+                        <a:srgbClr val="F6EDD5"/>
                       </a:solidFill>
                       <a:prstDash val="solid"/>
                     </a:lnT>
                     <a:lnB w="9525" cap="flat" cmpd="sng" algn="ctr">
                       <a:solidFill>
-                        <a:srgbClr val="F6EACB"/>
+                        <a:srgbClr val="F6EDD5"/>
                       </a:solidFill>
                       <a:prstDash val="solid"/>
                     </a:lnB>
                     <a:solidFill>
-                      <a:srgbClr val="FBF8EE"/>
+                      <a:srgbClr val="FBF7EC"/>
                     </a:solidFill>
                   </a:tcPr>
                 </a:tc>
@@ -6706,7 +7065,7 @@
                       <a:r>
                         <a:rPr sz="1400" b="1">
                           <a:solidFill>
-                            <a:srgbClr val="544212"/>
+                            <a:srgbClr val="494027"/>
                           </a:solidFill>
                         </a:rPr>
                         <a:t>암</a:t>
@@ -6716,30 +7075,30 @@
                   <a:tcPr anchor="ctr" marL="73152" marR="73152">
                     <a:lnL w="9525" cap="flat" cmpd="sng" algn="ctr">
                       <a:solidFill>
-                        <a:srgbClr val="F6EACB"/>
+                        <a:srgbClr val="F6EDD5"/>
                       </a:solidFill>
                       <a:prstDash val="solid"/>
                     </a:lnL>
                     <a:lnR w="9525" cap="flat" cmpd="sng" algn="ctr">
                       <a:solidFill>
-                        <a:srgbClr val="F6EACB"/>
+                        <a:srgbClr val="F6EDD5"/>
                       </a:solidFill>
                       <a:prstDash val="solid"/>
                     </a:lnR>
                     <a:lnT w="9525" cap="flat" cmpd="sng" algn="ctr">
                       <a:solidFill>
-                        <a:srgbClr val="F6EACB"/>
+                        <a:srgbClr val="F6EDD5"/>
                       </a:solidFill>
                       <a:prstDash val="solid"/>
                     </a:lnT>
                     <a:lnB w="9525" cap="flat" cmpd="sng" algn="ctr">
                       <a:solidFill>
-                        <a:srgbClr val="F6EACB"/>
+                        <a:srgbClr val="F6EDD5"/>
                       </a:solidFill>
                       <a:prstDash val="solid"/>
                     </a:lnB>
                     <a:solidFill>
-                      <a:srgbClr val="F6EACB"/>
+                      <a:srgbClr val="F6EDD5"/>
                     </a:solidFill>
                   </a:tcPr>
                 </a:tc>
@@ -6752,7 +7111,7 @@
                       <a:r>
                         <a:rPr sz="1400" b="0">
                           <a:solidFill>
-                            <a:srgbClr val="2B2B2B"/>
+                            <a:srgbClr val="26231F"/>
                           </a:solidFill>
                         </a:rPr>
                         <a:t>□</a:t>
@@ -6762,25 +7121,25 @@
                   <a:tcPr anchor="ctr" marL="73152" marR="73152">
                     <a:lnL w="9525" cap="flat" cmpd="sng" algn="ctr">
                       <a:solidFill>
-                        <a:srgbClr val="F6EACB"/>
+                        <a:srgbClr val="F6EDD5"/>
                       </a:solidFill>
                       <a:prstDash val="solid"/>
                     </a:lnL>
                     <a:lnR w="9525" cap="flat" cmpd="sng" algn="ctr">
                       <a:solidFill>
-                        <a:srgbClr val="F6EACB"/>
+                        <a:srgbClr val="F6EDD5"/>
                       </a:solidFill>
                       <a:prstDash val="solid"/>
                     </a:lnR>
                     <a:lnT w="9525" cap="flat" cmpd="sng" algn="ctr">
                       <a:solidFill>
-                        <a:srgbClr val="F6EACB"/>
+                        <a:srgbClr val="F6EDD5"/>
                       </a:solidFill>
                       <a:prstDash val="solid"/>
                     </a:lnT>
                     <a:lnB w="9525" cap="flat" cmpd="sng" algn="ctr">
                       <a:solidFill>
-                        <a:srgbClr val="F6EACB"/>
+                        <a:srgbClr val="F6EDD5"/>
                       </a:solidFill>
                       <a:prstDash val="solid"/>
                     </a:lnB>
@@ -6798,7 +7157,7 @@
                       <a:r>
                         <a:rPr sz="1400" b="0">
                           <a:solidFill>
-                            <a:srgbClr val="2B2B2B"/>
+                            <a:srgbClr val="26231F"/>
                           </a:solidFill>
                         </a:rPr>
                         <a:t>□</a:t>
@@ -6808,25 +7167,25 @@
                   <a:tcPr anchor="ctr" marL="73152" marR="73152">
                     <a:lnL w="9525" cap="flat" cmpd="sng" algn="ctr">
                       <a:solidFill>
-                        <a:srgbClr val="F6EACB"/>
+                        <a:srgbClr val="F6EDD5"/>
                       </a:solidFill>
                       <a:prstDash val="solid"/>
                     </a:lnL>
                     <a:lnR w="9525" cap="flat" cmpd="sng" algn="ctr">
                       <a:solidFill>
-                        <a:srgbClr val="F6EACB"/>
+                        <a:srgbClr val="F6EDD5"/>
                       </a:solidFill>
                       <a:prstDash val="solid"/>
                     </a:lnR>
                     <a:lnT w="9525" cap="flat" cmpd="sng" algn="ctr">
                       <a:solidFill>
-                        <a:srgbClr val="F6EACB"/>
+                        <a:srgbClr val="F6EDD5"/>
                       </a:solidFill>
                       <a:prstDash val="solid"/>
                     </a:lnT>
                     <a:lnB w="9525" cap="flat" cmpd="sng" algn="ctr">
                       <a:solidFill>
-                        <a:srgbClr val="F6EACB"/>
+                        <a:srgbClr val="F6EDD5"/>
                       </a:solidFill>
                       <a:prstDash val="solid"/>
                     </a:lnB>
@@ -6844,7 +7203,7 @@
                       <a:r>
                         <a:rPr sz="1400" b="0">
                           <a:solidFill>
-                            <a:srgbClr val="2B2B2B"/>
+                            <a:srgbClr val="26231F"/>
                           </a:solidFill>
                         </a:rPr>
                         <a:t>□</a:t>
@@ -6854,25 +7213,25 @@
                   <a:tcPr anchor="ctr" marL="73152" marR="73152">
                     <a:lnL w="9525" cap="flat" cmpd="sng" algn="ctr">
                       <a:solidFill>
-                        <a:srgbClr val="F6EACB"/>
+                        <a:srgbClr val="F6EDD5"/>
                       </a:solidFill>
                       <a:prstDash val="solid"/>
                     </a:lnL>
                     <a:lnR w="9525" cap="flat" cmpd="sng" algn="ctr">
                       <a:solidFill>
-                        <a:srgbClr val="F6EACB"/>
+                        <a:srgbClr val="F6EDD5"/>
                       </a:solidFill>
                       <a:prstDash val="solid"/>
                     </a:lnR>
                     <a:lnT w="9525" cap="flat" cmpd="sng" algn="ctr">
                       <a:solidFill>
-                        <a:srgbClr val="F6EACB"/>
+                        <a:srgbClr val="F6EDD5"/>
                       </a:solidFill>
                       <a:prstDash val="solid"/>
                     </a:lnT>
                     <a:lnB w="9525" cap="flat" cmpd="sng" algn="ctr">
                       <a:solidFill>
-                        <a:srgbClr val="F6EACB"/>
+                        <a:srgbClr val="F6EDD5"/>
                       </a:solidFill>
                       <a:prstDash val="solid"/>
                     </a:lnB>
@@ -6892,7 +7251,7 @@
                       <a:r>
                         <a:rPr sz="1400" b="1">
                           <a:solidFill>
-                            <a:srgbClr val="544212"/>
+                            <a:srgbClr val="494027"/>
                           </a:solidFill>
                         </a:rPr>
                         <a:t>뇌·심장</a:t>
@@ -6902,30 +7261,30 @@
                   <a:tcPr anchor="ctr" marL="73152" marR="73152">
                     <a:lnL w="9525" cap="flat" cmpd="sng" algn="ctr">
                       <a:solidFill>
-                        <a:srgbClr val="F6EACB"/>
+                        <a:srgbClr val="F6EDD5"/>
                       </a:solidFill>
                       <a:prstDash val="solid"/>
                     </a:lnL>
                     <a:lnR w="9525" cap="flat" cmpd="sng" algn="ctr">
                       <a:solidFill>
-                        <a:srgbClr val="F6EACB"/>
+                        <a:srgbClr val="F6EDD5"/>
                       </a:solidFill>
                       <a:prstDash val="solid"/>
                     </a:lnR>
                     <a:lnT w="9525" cap="flat" cmpd="sng" algn="ctr">
                       <a:solidFill>
-                        <a:srgbClr val="F6EACB"/>
+                        <a:srgbClr val="F6EDD5"/>
                       </a:solidFill>
                       <a:prstDash val="solid"/>
                     </a:lnT>
                     <a:lnB w="9525" cap="flat" cmpd="sng" algn="ctr">
                       <a:solidFill>
-                        <a:srgbClr val="F6EACB"/>
+                        <a:srgbClr val="F6EDD5"/>
                       </a:solidFill>
                       <a:prstDash val="solid"/>
                     </a:lnB>
                     <a:solidFill>
-                      <a:srgbClr val="F6EACB"/>
+                      <a:srgbClr val="F6EDD5"/>
                     </a:solidFill>
                   </a:tcPr>
                 </a:tc>
@@ -6938,7 +7297,7 @@
                       <a:r>
                         <a:rPr sz="1400" b="0">
                           <a:solidFill>
-                            <a:srgbClr val="2B2B2B"/>
+                            <a:srgbClr val="26231F"/>
                           </a:solidFill>
                         </a:rPr>
                         <a:t>□</a:t>
@@ -6948,30 +7307,30 @@
                   <a:tcPr anchor="ctr" marL="73152" marR="73152">
                     <a:lnL w="9525" cap="flat" cmpd="sng" algn="ctr">
                       <a:solidFill>
-                        <a:srgbClr val="F6EACB"/>
+                        <a:srgbClr val="F6EDD5"/>
                       </a:solidFill>
                       <a:prstDash val="solid"/>
                     </a:lnL>
                     <a:lnR w="9525" cap="flat" cmpd="sng" algn="ctr">
                       <a:solidFill>
-                        <a:srgbClr val="F6EACB"/>
+                        <a:srgbClr val="F6EDD5"/>
                       </a:solidFill>
                       <a:prstDash val="solid"/>
                     </a:lnR>
                     <a:lnT w="9525" cap="flat" cmpd="sng" algn="ctr">
                       <a:solidFill>
-                        <a:srgbClr val="F6EACB"/>
+                        <a:srgbClr val="F6EDD5"/>
                       </a:solidFill>
                       <a:prstDash val="solid"/>
                     </a:lnT>
                     <a:lnB w="9525" cap="flat" cmpd="sng" algn="ctr">
                       <a:solidFill>
-                        <a:srgbClr val="F6EACB"/>
+                        <a:srgbClr val="F6EDD5"/>
                       </a:solidFill>
                       <a:prstDash val="solid"/>
                     </a:lnB>
                     <a:solidFill>
-                      <a:srgbClr val="FBF8EE"/>
+                      <a:srgbClr val="FBF7EC"/>
                     </a:solidFill>
                   </a:tcPr>
                 </a:tc>
@@ -6984,7 +7343,7 @@
                       <a:r>
                         <a:rPr sz="1400" b="0">
                           <a:solidFill>
-                            <a:srgbClr val="2B2B2B"/>
+                            <a:srgbClr val="26231F"/>
                           </a:solidFill>
                         </a:rPr>
                         <a:t>□</a:t>
@@ -6994,30 +7353,30 @@
                   <a:tcPr anchor="ctr" marL="73152" marR="73152">
                     <a:lnL w="9525" cap="flat" cmpd="sng" algn="ctr">
                       <a:solidFill>
-                        <a:srgbClr val="F6EACB"/>
+                        <a:srgbClr val="F6EDD5"/>
                       </a:solidFill>
                       <a:prstDash val="solid"/>
                     </a:lnL>
                     <a:lnR w="9525" cap="flat" cmpd="sng" algn="ctr">
                       <a:solidFill>
-                        <a:srgbClr val="F6EACB"/>
+                        <a:srgbClr val="F6EDD5"/>
                       </a:solidFill>
                       <a:prstDash val="solid"/>
                     </a:lnR>
                     <a:lnT w="9525" cap="flat" cmpd="sng" algn="ctr">
                       <a:solidFill>
-                        <a:srgbClr val="F6EACB"/>
+                        <a:srgbClr val="F6EDD5"/>
                       </a:solidFill>
                       <a:prstDash val="solid"/>
                     </a:lnT>
                     <a:lnB w="9525" cap="flat" cmpd="sng" algn="ctr">
                       <a:solidFill>
-                        <a:srgbClr val="F6EACB"/>
+                        <a:srgbClr val="F6EDD5"/>
                       </a:solidFill>
                       <a:prstDash val="solid"/>
                     </a:lnB>
                     <a:solidFill>
-                      <a:srgbClr val="FBF8EE"/>
+                      <a:srgbClr val="FBF7EC"/>
                     </a:solidFill>
                   </a:tcPr>
                 </a:tc>
@@ -7030,7 +7389,7 @@
                       <a:r>
                         <a:rPr sz="1400" b="0">
                           <a:solidFill>
-                            <a:srgbClr val="2B2B2B"/>
+                            <a:srgbClr val="26231F"/>
                           </a:solidFill>
                         </a:rPr>
                         <a:t>□</a:t>
@@ -7040,30 +7399,30 @@
                   <a:tcPr anchor="ctr" marL="73152" marR="73152">
                     <a:lnL w="9525" cap="flat" cmpd="sng" algn="ctr">
                       <a:solidFill>
-                        <a:srgbClr val="F6EACB"/>
+                        <a:srgbClr val="F6EDD5"/>
                       </a:solidFill>
                       <a:prstDash val="solid"/>
                     </a:lnL>
                     <a:lnR w="9525" cap="flat" cmpd="sng" algn="ctr">
                       <a:solidFill>
-                        <a:srgbClr val="F6EACB"/>
+                        <a:srgbClr val="F6EDD5"/>
                       </a:solidFill>
                       <a:prstDash val="solid"/>
                     </a:lnR>
                     <a:lnT w="9525" cap="flat" cmpd="sng" algn="ctr">
                       <a:solidFill>
-                        <a:srgbClr val="F6EACB"/>
+                        <a:srgbClr val="F6EDD5"/>
                       </a:solidFill>
                       <a:prstDash val="solid"/>
                     </a:lnT>
                     <a:lnB w="9525" cap="flat" cmpd="sng" algn="ctr">
                       <a:solidFill>
-                        <a:srgbClr val="F6EACB"/>
+                        <a:srgbClr val="F6EDD5"/>
                       </a:solidFill>
                       <a:prstDash val="solid"/>
                     </a:lnB>
                     <a:solidFill>
-                      <a:srgbClr val="FBF8EE"/>
+                      <a:srgbClr val="FBF7EC"/>
                     </a:solidFill>
                   </a:tcPr>
                 </a:tc>
@@ -7078,7 +7437,7 @@
                       <a:r>
                         <a:rPr sz="1400" b="1">
                           <a:solidFill>
-                            <a:srgbClr val="544212"/>
+                            <a:srgbClr val="494027"/>
                           </a:solidFill>
                         </a:rPr>
                         <a:t>입원·수술</a:t>
@@ -7088,30 +7447,30 @@
                   <a:tcPr anchor="ctr" marL="73152" marR="73152">
                     <a:lnL w="9525" cap="flat" cmpd="sng" algn="ctr">
                       <a:solidFill>
-                        <a:srgbClr val="F6EACB"/>
+                        <a:srgbClr val="F6EDD5"/>
                       </a:solidFill>
                       <a:prstDash val="solid"/>
                     </a:lnL>
                     <a:lnR w="9525" cap="flat" cmpd="sng" algn="ctr">
                       <a:solidFill>
-                        <a:srgbClr val="F6EACB"/>
+                        <a:srgbClr val="F6EDD5"/>
                       </a:solidFill>
                       <a:prstDash val="solid"/>
                     </a:lnR>
                     <a:lnT w="9525" cap="flat" cmpd="sng" algn="ctr">
                       <a:solidFill>
-                        <a:srgbClr val="F6EACB"/>
+                        <a:srgbClr val="F6EDD5"/>
                       </a:solidFill>
                       <a:prstDash val="solid"/>
                     </a:lnT>
                     <a:lnB w="9525" cap="flat" cmpd="sng" algn="ctr">
                       <a:solidFill>
-                        <a:srgbClr val="F6EACB"/>
+                        <a:srgbClr val="F6EDD5"/>
                       </a:solidFill>
                       <a:prstDash val="solid"/>
                     </a:lnB>
                     <a:solidFill>
-                      <a:srgbClr val="F6EACB"/>
+                      <a:srgbClr val="F6EDD5"/>
                     </a:solidFill>
                   </a:tcPr>
                 </a:tc>
@@ -7124,7 +7483,7 @@
                       <a:r>
                         <a:rPr sz="1400" b="0">
                           <a:solidFill>
-                            <a:srgbClr val="2B2B2B"/>
+                            <a:srgbClr val="26231F"/>
                           </a:solidFill>
                         </a:rPr>
                         <a:t>□</a:t>
@@ -7134,25 +7493,25 @@
                   <a:tcPr anchor="ctr" marL="73152" marR="73152">
                     <a:lnL w="9525" cap="flat" cmpd="sng" algn="ctr">
                       <a:solidFill>
-                        <a:srgbClr val="F6EACB"/>
+                        <a:srgbClr val="F6EDD5"/>
                       </a:solidFill>
                       <a:prstDash val="solid"/>
                     </a:lnL>
                     <a:lnR w="9525" cap="flat" cmpd="sng" algn="ctr">
                       <a:solidFill>
-                        <a:srgbClr val="F6EACB"/>
+                        <a:srgbClr val="F6EDD5"/>
                       </a:solidFill>
                       <a:prstDash val="solid"/>
                     </a:lnR>
                     <a:lnT w="9525" cap="flat" cmpd="sng" algn="ctr">
                       <a:solidFill>
-                        <a:srgbClr val="F6EACB"/>
+                        <a:srgbClr val="F6EDD5"/>
                       </a:solidFill>
                       <a:prstDash val="solid"/>
                     </a:lnT>
                     <a:lnB w="9525" cap="flat" cmpd="sng" algn="ctr">
                       <a:solidFill>
-                        <a:srgbClr val="F6EACB"/>
+                        <a:srgbClr val="F6EDD5"/>
                       </a:solidFill>
                       <a:prstDash val="solid"/>
                     </a:lnB>
@@ -7170,7 +7529,7 @@
                       <a:r>
                         <a:rPr sz="1400" b="0">
                           <a:solidFill>
-                            <a:srgbClr val="2B2B2B"/>
+                            <a:srgbClr val="26231F"/>
                           </a:solidFill>
                         </a:rPr>
                         <a:t>□</a:t>
@@ -7180,25 +7539,25 @@
                   <a:tcPr anchor="ctr" marL="73152" marR="73152">
                     <a:lnL w="9525" cap="flat" cmpd="sng" algn="ctr">
                       <a:solidFill>
-                        <a:srgbClr val="F6EACB"/>
+                        <a:srgbClr val="F6EDD5"/>
                       </a:solidFill>
                       <a:prstDash val="solid"/>
                     </a:lnL>
                     <a:lnR w="9525" cap="flat" cmpd="sng" algn="ctr">
                       <a:solidFill>
-                        <a:srgbClr val="F6EACB"/>
+                        <a:srgbClr val="F6EDD5"/>
                       </a:solidFill>
                       <a:prstDash val="solid"/>
                     </a:lnR>
                     <a:lnT w="9525" cap="flat" cmpd="sng" algn="ctr">
                       <a:solidFill>
-                        <a:srgbClr val="F6EACB"/>
+                        <a:srgbClr val="F6EDD5"/>
                       </a:solidFill>
                       <a:prstDash val="solid"/>
                     </a:lnT>
                     <a:lnB w="9525" cap="flat" cmpd="sng" algn="ctr">
                       <a:solidFill>
-                        <a:srgbClr val="F6EACB"/>
+                        <a:srgbClr val="F6EDD5"/>
                       </a:solidFill>
                       <a:prstDash val="solid"/>
                     </a:lnB>
@@ -7216,7 +7575,7 @@
                       <a:r>
                         <a:rPr sz="1400" b="0">
                           <a:solidFill>
-                            <a:srgbClr val="2B2B2B"/>
+                            <a:srgbClr val="26231F"/>
                           </a:solidFill>
                         </a:rPr>
                         <a:t>□</a:t>
@@ -7226,25 +7585,25 @@
                   <a:tcPr anchor="ctr" marL="73152" marR="73152">
                     <a:lnL w="9525" cap="flat" cmpd="sng" algn="ctr">
                       <a:solidFill>
-                        <a:srgbClr val="F6EACB"/>
+                        <a:srgbClr val="F6EDD5"/>
                       </a:solidFill>
                       <a:prstDash val="solid"/>
                     </a:lnL>
                     <a:lnR w="9525" cap="flat" cmpd="sng" algn="ctr">
                       <a:solidFill>
-                        <a:srgbClr val="F6EACB"/>
+                        <a:srgbClr val="F6EDD5"/>
                       </a:solidFill>
                       <a:prstDash val="solid"/>
                     </a:lnR>
                     <a:lnT w="9525" cap="flat" cmpd="sng" algn="ctr">
                       <a:solidFill>
-                        <a:srgbClr val="F6EACB"/>
+                        <a:srgbClr val="F6EDD5"/>
                       </a:solidFill>
                       <a:prstDash val="solid"/>
                     </a:lnT>
                     <a:lnB w="9525" cap="flat" cmpd="sng" algn="ctr">
                       <a:solidFill>
-                        <a:srgbClr val="F6EACB"/>
+                        <a:srgbClr val="F6EDD5"/>
                       </a:solidFill>
                       <a:prstDash val="solid"/>
                     </a:lnB>
@@ -7264,7 +7623,7 @@
                       <a:r>
                         <a:rPr sz="1400" b="1">
                           <a:solidFill>
-                            <a:srgbClr val="544212"/>
+                            <a:srgbClr val="494027"/>
                           </a:solidFill>
                         </a:rPr>
                         <a:t>상해</a:t>
@@ -7274,30 +7633,30 @@
                   <a:tcPr anchor="ctr" marL="73152" marR="73152">
                     <a:lnL w="9525" cap="flat" cmpd="sng" algn="ctr">
                       <a:solidFill>
-                        <a:srgbClr val="F6EACB"/>
+                        <a:srgbClr val="F6EDD5"/>
                       </a:solidFill>
                       <a:prstDash val="solid"/>
                     </a:lnL>
                     <a:lnR w="9525" cap="flat" cmpd="sng" algn="ctr">
                       <a:solidFill>
-                        <a:srgbClr val="F6EACB"/>
+                        <a:srgbClr val="F6EDD5"/>
                       </a:solidFill>
                       <a:prstDash val="solid"/>
                     </a:lnR>
                     <a:lnT w="9525" cap="flat" cmpd="sng" algn="ctr">
                       <a:solidFill>
-                        <a:srgbClr val="F6EACB"/>
+                        <a:srgbClr val="F6EDD5"/>
                       </a:solidFill>
                       <a:prstDash val="solid"/>
                     </a:lnT>
                     <a:lnB w="9525" cap="flat" cmpd="sng" algn="ctr">
                       <a:solidFill>
-                        <a:srgbClr val="F6EACB"/>
+                        <a:srgbClr val="F6EDD5"/>
                       </a:solidFill>
                       <a:prstDash val="solid"/>
                     </a:lnB>
                     <a:solidFill>
-                      <a:srgbClr val="F6EACB"/>
+                      <a:srgbClr val="F6EDD5"/>
                     </a:solidFill>
                   </a:tcPr>
                 </a:tc>
@@ -7310,7 +7669,7 @@
                       <a:r>
                         <a:rPr sz="1400" b="0">
                           <a:solidFill>
-                            <a:srgbClr val="2B2B2B"/>
+                            <a:srgbClr val="26231F"/>
                           </a:solidFill>
                         </a:rPr>
                         <a:t>□</a:t>
@@ -7320,30 +7679,30 @@
                   <a:tcPr anchor="ctr" marL="73152" marR="73152">
                     <a:lnL w="9525" cap="flat" cmpd="sng" algn="ctr">
                       <a:solidFill>
-                        <a:srgbClr val="F6EACB"/>
+                        <a:srgbClr val="F6EDD5"/>
                       </a:solidFill>
                       <a:prstDash val="solid"/>
                     </a:lnL>
                     <a:lnR w="9525" cap="flat" cmpd="sng" algn="ctr">
                       <a:solidFill>
-                        <a:srgbClr val="F6EACB"/>
+                        <a:srgbClr val="F6EDD5"/>
                       </a:solidFill>
                       <a:prstDash val="solid"/>
                     </a:lnR>
                     <a:lnT w="9525" cap="flat" cmpd="sng" algn="ctr">
                       <a:solidFill>
-                        <a:srgbClr val="F6EACB"/>
+                        <a:srgbClr val="F6EDD5"/>
                       </a:solidFill>
                       <a:prstDash val="solid"/>
                     </a:lnT>
                     <a:lnB w="9525" cap="flat" cmpd="sng" algn="ctr">
                       <a:solidFill>
-                        <a:srgbClr val="F6EACB"/>
+                        <a:srgbClr val="F6EDD5"/>
                       </a:solidFill>
                       <a:prstDash val="solid"/>
                     </a:lnB>
                     <a:solidFill>
-                      <a:srgbClr val="FBF8EE"/>
+                      <a:srgbClr val="FBF7EC"/>
                     </a:solidFill>
                   </a:tcPr>
                 </a:tc>
@@ -7356,7 +7715,7 @@
                       <a:r>
                         <a:rPr sz="1400" b="0">
                           <a:solidFill>
-                            <a:srgbClr val="2B2B2B"/>
+                            <a:srgbClr val="26231F"/>
                           </a:solidFill>
                         </a:rPr>
                         <a:t>□</a:t>
@@ -7366,30 +7725,30 @@
                   <a:tcPr anchor="ctr" marL="73152" marR="73152">
                     <a:lnL w="9525" cap="flat" cmpd="sng" algn="ctr">
                       <a:solidFill>
-                        <a:srgbClr val="F6EACB"/>
+                        <a:srgbClr val="F6EDD5"/>
                       </a:solidFill>
                       <a:prstDash val="solid"/>
                     </a:lnL>
                     <a:lnR w="9525" cap="flat" cmpd="sng" algn="ctr">
                       <a:solidFill>
-                        <a:srgbClr val="F6EACB"/>
+                        <a:srgbClr val="F6EDD5"/>
                       </a:solidFill>
                       <a:prstDash val="solid"/>
                     </a:lnR>
                     <a:lnT w="9525" cap="flat" cmpd="sng" algn="ctr">
                       <a:solidFill>
-                        <a:srgbClr val="F6EACB"/>
+                        <a:srgbClr val="F6EDD5"/>
                       </a:solidFill>
                       <a:prstDash val="solid"/>
                     </a:lnT>
                     <a:lnB w="9525" cap="flat" cmpd="sng" algn="ctr">
                       <a:solidFill>
-                        <a:srgbClr val="F6EACB"/>
+                        <a:srgbClr val="F6EDD5"/>
                       </a:solidFill>
                       <a:prstDash val="solid"/>
                     </a:lnB>
                     <a:solidFill>
-                      <a:srgbClr val="FBF8EE"/>
+                      <a:srgbClr val="FBF7EC"/>
                     </a:solidFill>
                   </a:tcPr>
                 </a:tc>
@@ -7402,7 +7761,7 @@
                       <a:r>
                         <a:rPr sz="1400" b="0">
                           <a:solidFill>
-                            <a:srgbClr val="2B2B2B"/>
+                            <a:srgbClr val="26231F"/>
                           </a:solidFill>
                         </a:rPr>
                         <a:t>□</a:t>
@@ -7412,30 +7771,30 @@
                   <a:tcPr anchor="ctr" marL="73152" marR="73152">
                     <a:lnL w="9525" cap="flat" cmpd="sng" algn="ctr">
                       <a:solidFill>
-                        <a:srgbClr val="F6EACB"/>
+                        <a:srgbClr val="F6EDD5"/>
                       </a:solidFill>
                       <a:prstDash val="solid"/>
                     </a:lnL>
                     <a:lnR w="9525" cap="flat" cmpd="sng" algn="ctr">
                       <a:solidFill>
-                        <a:srgbClr val="F6EACB"/>
+                        <a:srgbClr val="F6EDD5"/>
                       </a:solidFill>
                       <a:prstDash val="solid"/>
                     </a:lnR>
                     <a:lnT w="9525" cap="flat" cmpd="sng" algn="ctr">
                       <a:solidFill>
-                        <a:srgbClr val="F6EACB"/>
+                        <a:srgbClr val="F6EDD5"/>
                       </a:solidFill>
                       <a:prstDash val="solid"/>
                     </a:lnT>
                     <a:lnB w="9525" cap="flat" cmpd="sng" algn="ctr">
                       <a:solidFill>
-                        <a:srgbClr val="F6EACB"/>
+                        <a:srgbClr val="F6EDD5"/>
                       </a:solidFill>
                       <a:prstDash val="solid"/>
                     </a:lnB>
                     <a:solidFill>
-                      <a:srgbClr val="FBF8EE"/>
+                      <a:srgbClr val="FBF7EC"/>
                     </a:solidFill>
                   </a:tcPr>
                 </a:tc>
@@ -7450,7 +7809,7 @@
                       <a:r>
                         <a:rPr sz="1400" b="1">
                           <a:solidFill>
-                            <a:srgbClr val="544212"/>
+                            <a:srgbClr val="494027"/>
                           </a:solidFill>
                         </a:rPr>
                         <a:t>실손의료</a:t>
@@ -7460,30 +7819,30 @@
                   <a:tcPr anchor="ctr" marL="73152" marR="73152">
                     <a:lnL w="9525" cap="flat" cmpd="sng" algn="ctr">
                       <a:solidFill>
-                        <a:srgbClr val="F6EACB"/>
+                        <a:srgbClr val="F6EDD5"/>
                       </a:solidFill>
                       <a:prstDash val="solid"/>
                     </a:lnL>
                     <a:lnR w="9525" cap="flat" cmpd="sng" algn="ctr">
                       <a:solidFill>
-                        <a:srgbClr val="F6EACB"/>
+                        <a:srgbClr val="F6EDD5"/>
                       </a:solidFill>
                       <a:prstDash val="solid"/>
                     </a:lnR>
                     <a:lnT w="9525" cap="flat" cmpd="sng" algn="ctr">
                       <a:solidFill>
-                        <a:srgbClr val="F6EACB"/>
+                        <a:srgbClr val="F6EDD5"/>
                       </a:solidFill>
                       <a:prstDash val="solid"/>
                     </a:lnT>
                     <a:lnB w="9525" cap="flat" cmpd="sng" algn="ctr">
                       <a:solidFill>
-                        <a:srgbClr val="F6EACB"/>
+                        <a:srgbClr val="F6EDD5"/>
                       </a:solidFill>
                       <a:prstDash val="solid"/>
                     </a:lnB>
                     <a:solidFill>
-                      <a:srgbClr val="F6EACB"/>
+                      <a:srgbClr val="F6EDD5"/>
                     </a:solidFill>
                   </a:tcPr>
                 </a:tc>
@@ -7496,7 +7855,7 @@
                       <a:r>
                         <a:rPr sz="1400" b="0">
                           <a:solidFill>
-                            <a:srgbClr val="2B2B2B"/>
+                            <a:srgbClr val="26231F"/>
                           </a:solidFill>
                         </a:rPr>
                         <a:t>□</a:t>
@@ -7506,25 +7865,25 @@
                   <a:tcPr anchor="ctr" marL="73152" marR="73152">
                     <a:lnL w="9525" cap="flat" cmpd="sng" algn="ctr">
                       <a:solidFill>
-                        <a:srgbClr val="F6EACB"/>
+                        <a:srgbClr val="F6EDD5"/>
                       </a:solidFill>
                       <a:prstDash val="solid"/>
                     </a:lnL>
                     <a:lnR w="9525" cap="flat" cmpd="sng" algn="ctr">
                       <a:solidFill>
-                        <a:srgbClr val="F6EACB"/>
+                        <a:srgbClr val="F6EDD5"/>
                       </a:solidFill>
                       <a:prstDash val="solid"/>
                     </a:lnR>
                     <a:lnT w="9525" cap="flat" cmpd="sng" algn="ctr">
                       <a:solidFill>
-                        <a:srgbClr val="F6EACB"/>
+                        <a:srgbClr val="F6EDD5"/>
                       </a:solidFill>
                       <a:prstDash val="solid"/>
                     </a:lnT>
                     <a:lnB w="9525" cap="flat" cmpd="sng" algn="ctr">
                       <a:solidFill>
-                        <a:srgbClr val="F6EACB"/>
+                        <a:srgbClr val="F6EDD5"/>
                       </a:solidFill>
                       <a:prstDash val="solid"/>
                     </a:lnB>
@@ -7542,7 +7901,7 @@
                       <a:r>
                         <a:rPr sz="1400" b="0">
                           <a:solidFill>
-                            <a:srgbClr val="2B2B2B"/>
+                            <a:srgbClr val="26231F"/>
                           </a:solidFill>
                         </a:rPr>
                         <a:t>□</a:t>
@@ -7552,25 +7911,25 @@
                   <a:tcPr anchor="ctr" marL="73152" marR="73152">
                     <a:lnL w="9525" cap="flat" cmpd="sng" algn="ctr">
                       <a:solidFill>
-                        <a:srgbClr val="F6EACB"/>
+                        <a:srgbClr val="F6EDD5"/>
                       </a:solidFill>
                       <a:prstDash val="solid"/>
                     </a:lnL>
                     <a:lnR w="9525" cap="flat" cmpd="sng" algn="ctr">
                       <a:solidFill>
-                        <a:srgbClr val="F6EACB"/>
+                        <a:srgbClr val="F6EDD5"/>
                       </a:solidFill>
                       <a:prstDash val="solid"/>
                     </a:lnR>
                     <a:lnT w="9525" cap="flat" cmpd="sng" algn="ctr">
                       <a:solidFill>
-                        <a:srgbClr val="F6EACB"/>
+                        <a:srgbClr val="F6EDD5"/>
                       </a:solidFill>
                       <a:prstDash val="solid"/>
                     </a:lnT>
                     <a:lnB w="9525" cap="flat" cmpd="sng" algn="ctr">
                       <a:solidFill>
-                        <a:srgbClr val="F6EACB"/>
+                        <a:srgbClr val="F6EDD5"/>
                       </a:solidFill>
                       <a:prstDash val="solid"/>
                     </a:lnB>
@@ -7588,7 +7947,7 @@
                       <a:r>
                         <a:rPr sz="1400" b="0">
                           <a:solidFill>
-                            <a:srgbClr val="2B2B2B"/>
+                            <a:srgbClr val="26231F"/>
                           </a:solidFill>
                         </a:rPr>
                         <a:t>□</a:t>
@@ -7598,25 +7957,25 @@
                   <a:tcPr anchor="ctr" marL="73152" marR="73152">
                     <a:lnL w="9525" cap="flat" cmpd="sng" algn="ctr">
                       <a:solidFill>
-                        <a:srgbClr val="F6EACB"/>
+                        <a:srgbClr val="F6EDD5"/>
                       </a:solidFill>
                       <a:prstDash val="solid"/>
                     </a:lnL>
                     <a:lnR w="9525" cap="flat" cmpd="sng" algn="ctr">
                       <a:solidFill>
-                        <a:srgbClr val="F6EACB"/>
+                        <a:srgbClr val="F6EDD5"/>
                       </a:solidFill>
                       <a:prstDash val="solid"/>
                     </a:lnR>
                     <a:lnT w="9525" cap="flat" cmpd="sng" algn="ctr">
                       <a:solidFill>
-                        <a:srgbClr val="F6EACB"/>
+                        <a:srgbClr val="F6EDD5"/>
                       </a:solidFill>
                       <a:prstDash val="solid"/>
                     </a:lnT>
                     <a:lnB w="9525" cap="flat" cmpd="sng" algn="ctr">
                       <a:solidFill>
-                        <a:srgbClr val="F6EACB"/>
+                        <a:srgbClr val="F6EDD5"/>
                       </a:solidFill>
                       <a:prstDash val="solid"/>
                     </a:lnB>
@@ -7636,7 +7995,7 @@
                       <a:r>
                         <a:rPr sz="1400" b="1">
                           <a:solidFill>
-                            <a:srgbClr val="544212"/>
+                            <a:srgbClr val="494027"/>
                           </a:solidFill>
                         </a:rPr>
                         <a:t>연금·노후자금</a:t>
@@ -7646,30 +8005,30 @@
                   <a:tcPr anchor="ctr" marL="73152" marR="73152">
                     <a:lnL w="9525" cap="flat" cmpd="sng" algn="ctr">
                       <a:solidFill>
-                        <a:srgbClr val="F6EACB"/>
+                        <a:srgbClr val="F6EDD5"/>
                       </a:solidFill>
                       <a:prstDash val="solid"/>
                     </a:lnL>
                     <a:lnR w="9525" cap="flat" cmpd="sng" algn="ctr">
                       <a:solidFill>
-                        <a:srgbClr val="F6EACB"/>
+                        <a:srgbClr val="F6EDD5"/>
                       </a:solidFill>
                       <a:prstDash val="solid"/>
                     </a:lnR>
                     <a:lnT w="9525" cap="flat" cmpd="sng" algn="ctr">
                       <a:solidFill>
-                        <a:srgbClr val="F6EACB"/>
+                        <a:srgbClr val="F6EDD5"/>
                       </a:solidFill>
                       <a:prstDash val="solid"/>
                     </a:lnT>
                     <a:lnB w="9525" cap="flat" cmpd="sng" algn="ctr">
                       <a:solidFill>
-                        <a:srgbClr val="F6EACB"/>
+                        <a:srgbClr val="F6EDD5"/>
                       </a:solidFill>
                       <a:prstDash val="solid"/>
                     </a:lnB>
                     <a:solidFill>
-                      <a:srgbClr val="F6EACB"/>
+                      <a:srgbClr val="F6EDD5"/>
                     </a:solidFill>
                   </a:tcPr>
                 </a:tc>
@@ -7682,7 +8041,7 @@
                       <a:r>
                         <a:rPr sz="1400" b="0">
                           <a:solidFill>
-                            <a:srgbClr val="2B2B2B"/>
+                            <a:srgbClr val="26231F"/>
                           </a:solidFill>
                         </a:rPr>
                         <a:t>□</a:t>
@@ -7692,30 +8051,30 @@
                   <a:tcPr anchor="ctr" marL="73152" marR="73152">
                     <a:lnL w="9525" cap="flat" cmpd="sng" algn="ctr">
                       <a:solidFill>
-                        <a:srgbClr val="F6EACB"/>
+                        <a:srgbClr val="F6EDD5"/>
                       </a:solidFill>
                       <a:prstDash val="solid"/>
                     </a:lnL>
                     <a:lnR w="9525" cap="flat" cmpd="sng" algn="ctr">
                       <a:solidFill>
-                        <a:srgbClr val="F6EACB"/>
+                        <a:srgbClr val="F6EDD5"/>
                       </a:solidFill>
                       <a:prstDash val="solid"/>
                     </a:lnR>
                     <a:lnT w="9525" cap="flat" cmpd="sng" algn="ctr">
                       <a:solidFill>
-                        <a:srgbClr val="F6EACB"/>
+                        <a:srgbClr val="F6EDD5"/>
                       </a:solidFill>
                       <a:prstDash val="solid"/>
                     </a:lnT>
                     <a:lnB w="9525" cap="flat" cmpd="sng" algn="ctr">
                       <a:solidFill>
-                        <a:srgbClr val="F6EACB"/>
+                        <a:srgbClr val="F6EDD5"/>
                       </a:solidFill>
                       <a:prstDash val="solid"/>
                     </a:lnB>
                     <a:solidFill>
-                      <a:srgbClr val="FBF8EE"/>
+                      <a:srgbClr val="FBF7EC"/>
                     </a:solidFill>
                   </a:tcPr>
                 </a:tc>
@@ -7728,7 +8087,7 @@
                       <a:r>
                         <a:rPr sz="1400" b="0">
                           <a:solidFill>
-                            <a:srgbClr val="2B2B2B"/>
+                            <a:srgbClr val="26231F"/>
                           </a:solidFill>
                         </a:rPr>
                         <a:t>□</a:t>
@@ -7738,30 +8097,30 @@
                   <a:tcPr anchor="ctr" marL="73152" marR="73152">
                     <a:lnL w="9525" cap="flat" cmpd="sng" algn="ctr">
                       <a:solidFill>
-                        <a:srgbClr val="F6EACB"/>
+                        <a:srgbClr val="F6EDD5"/>
                       </a:solidFill>
                       <a:prstDash val="solid"/>
                     </a:lnL>
                     <a:lnR w="9525" cap="flat" cmpd="sng" algn="ctr">
                       <a:solidFill>
-                        <a:srgbClr val="F6EACB"/>
+                        <a:srgbClr val="F6EDD5"/>
                       </a:solidFill>
                       <a:prstDash val="solid"/>
                     </a:lnR>
                     <a:lnT w="9525" cap="flat" cmpd="sng" algn="ctr">
                       <a:solidFill>
-                        <a:srgbClr val="F6EACB"/>
+                        <a:srgbClr val="F6EDD5"/>
                       </a:solidFill>
                       <a:prstDash val="solid"/>
                     </a:lnT>
                     <a:lnB w="9525" cap="flat" cmpd="sng" algn="ctr">
                       <a:solidFill>
-                        <a:srgbClr val="F6EACB"/>
+                        <a:srgbClr val="F6EDD5"/>
                       </a:solidFill>
                       <a:prstDash val="solid"/>
                     </a:lnB>
                     <a:solidFill>
-                      <a:srgbClr val="FBF8EE"/>
+                      <a:srgbClr val="FBF7EC"/>
                     </a:solidFill>
                   </a:tcPr>
                 </a:tc>
@@ -7774,7 +8133,7 @@
                       <a:r>
                         <a:rPr sz="1400" b="0">
                           <a:solidFill>
-                            <a:srgbClr val="2B2B2B"/>
+                            <a:srgbClr val="26231F"/>
                           </a:solidFill>
                         </a:rPr>
                         <a:t>□</a:t>
@@ -7784,30 +8143,30 @@
                   <a:tcPr anchor="ctr" marL="73152" marR="73152">
                     <a:lnL w="9525" cap="flat" cmpd="sng" algn="ctr">
                       <a:solidFill>
-                        <a:srgbClr val="F6EACB"/>
+                        <a:srgbClr val="F6EDD5"/>
                       </a:solidFill>
                       <a:prstDash val="solid"/>
                     </a:lnL>
                     <a:lnR w="9525" cap="flat" cmpd="sng" algn="ctr">
                       <a:solidFill>
-                        <a:srgbClr val="F6EACB"/>
+                        <a:srgbClr val="F6EDD5"/>
                       </a:solidFill>
                       <a:prstDash val="solid"/>
                     </a:lnR>
                     <a:lnT w="9525" cap="flat" cmpd="sng" algn="ctr">
                       <a:solidFill>
-                        <a:srgbClr val="F6EACB"/>
+                        <a:srgbClr val="F6EDD5"/>
                       </a:solidFill>
                       <a:prstDash val="solid"/>
                     </a:lnT>
                     <a:lnB w="9525" cap="flat" cmpd="sng" algn="ctr">
                       <a:solidFill>
-                        <a:srgbClr val="F6EACB"/>
+                        <a:srgbClr val="F6EDD5"/>
                       </a:solidFill>
                       <a:prstDash val="solid"/>
                     </a:lnB>
                     <a:solidFill>
-                      <a:srgbClr val="FBF8EE"/>
+                      <a:srgbClr val="FBF7EC"/>
                     </a:solidFill>
                   </a:tcPr>
                 </a:tc>
@@ -7830,7 +8189,7 @@
     <p:bg>
       <p:bgPr>
         <a:solidFill>
-          <a:srgbClr val="FBF8EE"/>
+          <a:srgbClr val="FFFFFF"/>
         </a:solidFill>
         <a:effectLst/>
       </p:bgPr>
@@ -7849,18 +8208,111 @@
           <p:nvPr/>
         </p:nvSpPr>
         <p:spPr>
-          <a:xfrm rot="10800000">
-            <a:off x="10637215" y="0"/>
-            <a:ext cx="914400" cy="1554480"/>
-          </a:xfrm>
-          <a:prstGeom prst="round2SameRect">
-            <a:avLst>
-              <a:gd name="adj1" fmla="val 50000"/>
-              <a:gd name="adj2" fmla="val 0"/>
-            </a:avLst>
+          <a:xfrm>
+            <a:off x="0" y="6565392"/>
+            <a:ext cx="12191695" cy="292608"/>
+          </a:xfrm>
+          <a:prstGeom prst="rect">
+            <a:avLst/>
           </a:prstGeom>
           <a:solidFill>
-            <a:srgbClr val="F6EACB"/>
+            <a:srgbClr val="EBDAAD"/>
+          </a:solidFill>
+          <a:ln>
+            <a:noFill/>
+          </a:ln>
+        </p:spPr>
+        <p:txBody>
+          <a:bodyPr rtlCol="0" anchor="ctr"/>
+          <a:lstStyle/>
+          <a:p>
+            <a:pPr algn="ctr"/>
+          </a:p>
+        </p:txBody>
+      </p:sp>
+      <p:sp>
+        <p:nvSpPr>
+          <p:cNvPr id="4" name="장식"/>
+          <p:cNvSpPr/>
+          <p:nvPr/>
+        </p:nvSpPr>
+        <p:spPr>
+          <a:xfrm>
+            <a:off x="10180015" y="-1645920"/>
+            <a:ext cx="3474720" cy="3474720"/>
+          </a:xfrm>
+          <a:prstGeom prst="ellipse">
+            <a:avLst/>
+          </a:prstGeom>
+          <a:solidFill>
+            <a:srgbClr val="EBDAAD"/>
+          </a:solidFill>
+          <a:ln>
+            <a:noFill/>
+          </a:ln>
+        </p:spPr>
+        <p:txBody>
+          <a:bodyPr rtlCol="0" anchor="ctr"/>
+          <a:lstStyle/>
+          <a:p>
+            <a:pPr algn="ctr"/>
+          </a:p>
+        </p:txBody>
+      </p:sp>
+      <p:sp>
+        <p:nvSpPr>
+          <p:cNvPr id="5" name="상단 라벨"/>
+          <p:cNvSpPr txBox="1"/>
+          <p:nvPr/>
+        </p:nvSpPr>
+        <p:spPr>
+          <a:xfrm>
+            <a:off x="640080" y="274320"/>
+            <a:ext cx="5486400" cy="274320"/>
+          </a:xfrm>
+          <a:prstGeom prst="rect">
+            <a:avLst/>
+          </a:prstGeom>
+          <a:noFill/>
+        </p:spPr>
+        <p:txBody>
+          <a:bodyPr wrap="square" lIns="54864" rIns="54864" tIns="27432" bIns="27432" anchor="ctr">
+            <a:noAutofit/>
+          </a:bodyPr>
+          <a:lstStyle/>
+          <a:p>
+            <a:pPr algn="l">
+              <a:lnSpc>
+                <a:spcPct val="115000"/>
+              </a:lnSpc>
+            </a:pPr>
+            <a:r>
+              <a:rPr sz="900" b="1" i="0" spc="250">
+                <a:solidFill>
+                  <a:srgbClr val="26231F"/>
+                </a:solidFill>
+              </a:rPr>
+              <a:t>INSURANCE CHECK</a:t>
+            </a:r>
+          </a:p>
+        </p:txBody>
+      </p:sp>
+      <p:sp>
+        <p:nvSpPr>
+          <p:cNvPr id="6" name="포인트"/>
+          <p:cNvSpPr/>
+          <p:nvPr/>
+        </p:nvSpPr>
+        <p:spPr>
+          <a:xfrm>
+            <a:off x="11048695" y="502919"/>
+            <a:ext cx="274320" cy="274320"/>
+          </a:xfrm>
+          <a:prstGeom prst="moon">
+            <a:avLst/>
+          </a:prstGeom>
+          <a:solidFill>
+            <a:srgbClr val="FFFFFF"/>
           </a:solidFill>
           <a:ln>
             <a:noFill/>
@@ -7886,8 +8338,8 @@
         </p:nvSpPr>
         <p:spPr>
           <a:xfrm>
-            <a:off x="640080" y="457200"/>
-            <a:ext cx="9722815" cy="868680"/>
+            <a:off x="640080" y="658368"/>
+            <a:ext cx="9082735" cy="868680"/>
           </a:xfrm>
         </p:spPr>
         <p:txBody>
@@ -7904,7 +8356,7 @@
             <a:r>
               <a:rPr sz="3000" b="1" i="0">
                 <a:solidFill>
-                  <a:srgbClr val="544212"/>
+                  <a:srgbClr val="26231F"/>
                 </a:solidFill>
               </a:rPr>
               <a:t>월 보험료 한눈에</a:t>
@@ -7914,26 +8366,26 @@
       </p:sp>
       <p:sp>
         <p:nvSpPr>
-          <p:cNvPr id="4" name="카드 1"/>
+          <p:cNvPr id="7" name="카드 1"/>
           <p:cNvSpPr/>
           <p:nvPr/>
         </p:nvSpPr>
         <p:spPr>
           <a:xfrm>
-            <a:off x="640080" y="1600200"/>
+            <a:off x="640080" y="1783080"/>
             <a:ext cx="3484778" cy="2926080"/>
           </a:xfrm>
           <a:prstGeom prst="roundRect">
             <a:avLst>
-              <a:gd name="adj" fmla="val 8000"/>
+              <a:gd name="adj" fmla="val 3000"/>
             </a:avLst>
           </a:prstGeom>
           <a:solidFill>
-            <a:srgbClr val="FBF8EE"/>
+            <a:srgbClr val="FFFFFF"/>
           </a:solidFill>
-          <a:ln w="15875">
+          <a:ln w="9525">
             <a:solidFill>
-              <a:srgbClr val="F6EACB"/>
+              <a:srgbClr val="F6EDD5"/>
             </a:solidFill>
           </a:ln>
         </p:spPr>
@@ -7947,20 +8399,49 @@
       </p:sp>
       <p:sp>
         <p:nvSpPr>
-          <p:cNvPr id="5" name="번호 1"/>
+          <p:cNvPr id="8" name="위쪽 띠"/>
           <p:cNvSpPr/>
           <p:nvPr/>
         </p:nvSpPr>
         <p:spPr>
           <a:xfrm>
-            <a:off x="822959" y="1783080"/>
+            <a:off x="649224" y="1792224"/>
+            <a:ext cx="3466490" cy="82296"/>
+          </a:xfrm>
+          <a:prstGeom prst="rect">
+            <a:avLst/>
+          </a:prstGeom>
+          <a:solidFill>
+            <a:srgbClr val="E1CE98"/>
+          </a:solidFill>
+          <a:ln>
+            <a:noFill/>
+          </a:ln>
+        </p:spPr>
+        <p:txBody>
+          <a:bodyPr rtlCol="0" anchor="ctr"/>
+          <a:lstStyle/>
+          <a:p>
+            <a:pPr algn="ctr"/>
+          </a:p>
+        </p:txBody>
+      </p:sp>
+      <p:sp>
+        <p:nvSpPr>
+          <p:cNvPr id="9" name="번호 1"/>
+          <p:cNvSpPr/>
+          <p:nvPr/>
+        </p:nvSpPr>
+        <p:spPr>
+          <a:xfrm>
+            <a:off x="822959" y="1965960"/>
             <a:ext cx="457200" cy="457200"/>
           </a:xfrm>
           <a:prstGeom prst="ellipse">
             <a:avLst/>
           </a:prstGeom>
           <a:solidFill>
-            <a:srgbClr val="A78425"/>
+            <a:srgbClr val="E0EAB8"/>
           </a:solidFill>
           <a:ln>
             <a:noFill/>
@@ -7980,7 +8461,7 @@
             <a:r>
               <a:rPr sz="1600" b="1" i="0">
                 <a:solidFill>
-                  <a:srgbClr val="FFFFFF"/>
+                  <a:srgbClr val="26231F"/>
                 </a:solidFill>
               </a:rPr>
               <a:t>1</a:t>
@@ -7990,13 +8471,13 @@
       </p:sp>
       <p:sp>
         <p:nvSpPr>
-          <p:cNvPr id="6" name="TextBox 5"/>
+          <p:cNvPr id="10" name="TextBox 9"/>
           <p:cNvSpPr txBox="1"/>
           <p:nvPr/>
         </p:nvSpPr>
         <p:spPr>
           <a:xfrm>
-            <a:off x="777240" y="2377440"/>
+            <a:off x="777240" y="2560320"/>
             <a:ext cx="3210458" cy="640080"/>
           </a:xfrm>
           <a:prstGeom prst="rect">
@@ -8018,7 +8499,7 @@
             <a:r>
               <a:rPr sz="1700" b="1" i="0">
                 <a:solidFill>
-                  <a:srgbClr val="544212"/>
+                  <a:srgbClr val="494027"/>
                 </a:solidFill>
               </a:rPr>
               <a:t>월 보험료 합계</a:t>
@@ -8028,13 +8509,13 @@
       </p:sp>
       <p:sp>
         <p:nvSpPr>
-          <p:cNvPr id="7" name="TextBox 6"/>
+          <p:cNvPr id="11" name="TextBox 10"/>
           <p:cNvSpPr txBox="1"/>
           <p:nvPr/>
         </p:nvSpPr>
         <p:spPr>
           <a:xfrm>
-            <a:off x="777240" y="3063240"/>
+            <a:off x="777240" y="3246120"/>
             <a:ext cx="3210458" cy="1325880"/>
           </a:xfrm>
           <a:prstGeom prst="rect">
@@ -8056,7 +8537,7 @@
             <a:r>
               <a:rPr sz="3000" b="0" i="0">
                 <a:solidFill>
-                  <a:srgbClr val="2B2B2B"/>
+                  <a:srgbClr val="26231F"/>
                 </a:solidFill>
               </a:rPr>
               <a:t>0원</a:t>
@@ -8066,26 +8547,26 @@
       </p:sp>
       <p:sp>
         <p:nvSpPr>
-          <p:cNvPr id="8" name="카드 2"/>
+          <p:cNvPr id="12" name="카드 2"/>
           <p:cNvSpPr/>
           <p:nvPr/>
         </p:nvSpPr>
         <p:spPr>
           <a:xfrm>
-            <a:off x="4353458" y="1600200"/>
+            <a:off x="4353458" y="1783080"/>
             <a:ext cx="3484778" cy="2926080"/>
           </a:xfrm>
           <a:prstGeom prst="roundRect">
             <a:avLst>
-              <a:gd name="adj" fmla="val 8000"/>
+              <a:gd name="adj" fmla="val 3000"/>
             </a:avLst>
           </a:prstGeom>
           <a:solidFill>
-            <a:srgbClr val="FBF8EE"/>
+            <a:srgbClr val="FFFFFF"/>
           </a:solidFill>
-          <a:ln w="15875">
+          <a:ln w="9525">
             <a:solidFill>
-              <a:srgbClr val="F6EACB"/>
+              <a:srgbClr val="F6EDD5"/>
             </a:solidFill>
           </a:ln>
         </p:spPr>
@@ -8099,20 +8580,49 @@
       </p:sp>
       <p:sp>
         <p:nvSpPr>
-          <p:cNvPr id="9" name="번호 2"/>
+          <p:cNvPr id="13" name="위쪽 띠"/>
           <p:cNvSpPr/>
           <p:nvPr/>
         </p:nvSpPr>
         <p:spPr>
           <a:xfrm>
-            <a:off x="4536338" y="1783080"/>
+            <a:off x="4362602" y="1792224"/>
+            <a:ext cx="3466490" cy="82296"/>
+          </a:xfrm>
+          <a:prstGeom prst="rect">
+            <a:avLst/>
+          </a:prstGeom>
+          <a:solidFill>
+            <a:srgbClr val="E1CE98"/>
+          </a:solidFill>
+          <a:ln>
+            <a:noFill/>
+          </a:ln>
+        </p:spPr>
+        <p:txBody>
+          <a:bodyPr rtlCol="0" anchor="ctr"/>
+          <a:lstStyle/>
+          <a:p>
+            <a:pPr algn="ctr"/>
+          </a:p>
+        </p:txBody>
+      </p:sp>
+      <p:sp>
+        <p:nvSpPr>
+          <p:cNvPr id="14" name="번호 2"/>
+          <p:cNvSpPr/>
+          <p:nvPr/>
+        </p:nvSpPr>
+        <p:spPr>
+          <a:xfrm>
+            <a:off x="4536338" y="1965960"/>
             <a:ext cx="457200" cy="457200"/>
           </a:xfrm>
           <a:prstGeom prst="ellipse">
             <a:avLst/>
           </a:prstGeom>
           <a:solidFill>
-            <a:srgbClr val="A78425"/>
+            <a:srgbClr val="E0EAB8"/>
           </a:solidFill>
           <a:ln>
             <a:noFill/>
@@ -8132,7 +8642,7 @@
             <a:r>
               <a:rPr sz="1600" b="1" i="0">
                 <a:solidFill>
-                  <a:srgbClr val="FFFFFF"/>
+                  <a:srgbClr val="26231F"/>
                 </a:solidFill>
               </a:rPr>
               <a:t>2</a:t>
@@ -8142,13 +8652,13 @@
       </p:sp>
       <p:sp>
         <p:nvSpPr>
-          <p:cNvPr id="10" name="TextBox 9"/>
+          <p:cNvPr id="15" name="TextBox 14"/>
           <p:cNvSpPr txBox="1"/>
           <p:nvPr/>
         </p:nvSpPr>
         <p:spPr>
           <a:xfrm>
-            <a:off x="4490618" y="2377440"/>
+            <a:off x="4490618" y="2560320"/>
             <a:ext cx="3210458" cy="640080"/>
           </a:xfrm>
           <a:prstGeom prst="rect">
@@ -8170,7 +8680,7 @@
             <a:r>
               <a:rPr sz="1700" b="1" i="0">
                 <a:solidFill>
-                  <a:srgbClr val="544212"/>
+                  <a:srgbClr val="494027"/>
                 </a:solidFill>
               </a:rPr>
               <a:t>연 보험료 합계</a:t>
@@ -8180,13 +8690,13 @@
       </p:sp>
       <p:sp>
         <p:nvSpPr>
-          <p:cNvPr id="11" name="TextBox 10"/>
+          <p:cNvPr id="16" name="TextBox 15"/>
           <p:cNvSpPr txBox="1"/>
           <p:nvPr/>
         </p:nvSpPr>
         <p:spPr>
           <a:xfrm>
-            <a:off x="4490618" y="3063240"/>
+            <a:off x="4490618" y="3246120"/>
             <a:ext cx="3210458" cy="1325880"/>
           </a:xfrm>
           <a:prstGeom prst="rect">
@@ -8208,7 +8718,7 @@
             <a:r>
               <a:rPr sz="3000" b="0" i="0">
                 <a:solidFill>
-                  <a:srgbClr val="2B2B2B"/>
+                  <a:srgbClr val="26231F"/>
                 </a:solidFill>
               </a:rPr>
               <a:t>0원</a:t>
@@ -8218,26 +8728,26 @@
       </p:sp>
       <p:sp>
         <p:nvSpPr>
-          <p:cNvPr id="12" name="카드 3"/>
+          <p:cNvPr id="17" name="카드 3"/>
           <p:cNvSpPr/>
           <p:nvPr/>
         </p:nvSpPr>
         <p:spPr>
           <a:xfrm>
-            <a:off x="8066836" y="1600200"/>
+            <a:off x="8066836" y="1783080"/>
             <a:ext cx="3484778" cy="2926080"/>
           </a:xfrm>
           <a:prstGeom prst="roundRect">
             <a:avLst>
-              <a:gd name="adj" fmla="val 8000"/>
+              <a:gd name="adj" fmla="val 3000"/>
             </a:avLst>
           </a:prstGeom>
           <a:solidFill>
-            <a:srgbClr val="FBF8EE"/>
+            <a:srgbClr val="FFFFFF"/>
           </a:solidFill>
-          <a:ln w="15875">
+          <a:ln w="9525">
             <a:solidFill>
-              <a:srgbClr val="F6EACB"/>
+              <a:srgbClr val="F6EDD5"/>
             </a:solidFill>
           </a:ln>
         </p:spPr>
@@ -8251,20 +8761,49 @@
       </p:sp>
       <p:sp>
         <p:nvSpPr>
-          <p:cNvPr id="13" name="번호 3"/>
+          <p:cNvPr id="18" name="위쪽 띠"/>
           <p:cNvSpPr/>
           <p:nvPr/>
         </p:nvSpPr>
         <p:spPr>
           <a:xfrm>
-            <a:off x="8249716" y="1783080"/>
+            <a:off x="8075980" y="1792224"/>
+            <a:ext cx="3466490" cy="82296"/>
+          </a:xfrm>
+          <a:prstGeom prst="rect">
+            <a:avLst/>
+          </a:prstGeom>
+          <a:solidFill>
+            <a:srgbClr val="E1CE98"/>
+          </a:solidFill>
+          <a:ln>
+            <a:noFill/>
+          </a:ln>
+        </p:spPr>
+        <p:txBody>
+          <a:bodyPr rtlCol="0" anchor="ctr"/>
+          <a:lstStyle/>
+          <a:p>
+            <a:pPr algn="ctr"/>
+          </a:p>
+        </p:txBody>
+      </p:sp>
+      <p:sp>
+        <p:nvSpPr>
+          <p:cNvPr id="19" name="번호 3"/>
+          <p:cNvSpPr/>
+          <p:nvPr/>
+        </p:nvSpPr>
+        <p:spPr>
+          <a:xfrm>
+            <a:off x="8249716" y="1965960"/>
             <a:ext cx="457200" cy="457200"/>
           </a:xfrm>
           <a:prstGeom prst="ellipse">
             <a:avLst/>
           </a:prstGeom>
           <a:solidFill>
-            <a:srgbClr val="A78425"/>
+            <a:srgbClr val="E0EAB8"/>
           </a:solidFill>
           <a:ln>
             <a:noFill/>
@@ -8284,7 +8823,7 @@
             <a:r>
               <a:rPr sz="1600" b="1" i="0">
                 <a:solidFill>
-                  <a:srgbClr val="FFFFFF"/>
+                  <a:srgbClr val="26231F"/>
                 </a:solidFill>
               </a:rPr>
               <a:t>3</a:t>
@@ -8294,13 +8833,13 @@
       </p:sp>
       <p:sp>
         <p:nvSpPr>
-          <p:cNvPr id="14" name="TextBox 13"/>
+          <p:cNvPr id="20" name="TextBox 19"/>
           <p:cNvSpPr txBox="1"/>
           <p:nvPr/>
         </p:nvSpPr>
         <p:spPr>
           <a:xfrm>
-            <a:off x="8203996" y="2377440"/>
+            <a:off x="8203996" y="2560320"/>
             <a:ext cx="3210458" cy="640080"/>
           </a:xfrm>
           <a:prstGeom prst="rect">
@@ -8322,7 +8861,7 @@
             <a:r>
               <a:rPr sz="1700" b="1" i="0">
                 <a:solidFill>
-                  <a:srgbClr val="544212"/>
+                  <a:srgbClr val="494027"/>
                 </a:solidFill>
               </a:rPr>
               <a:t>월 소득 대비</a:t>
@@ -8332,13 +8871,13 @@
       </p:sp>
       <p:sp>
         <p:nvSpPr>
-          <p:cNvPr id="15" name="TextBox 14"/>
+          <p:cNvPr id="21" name="TextBox 20"/>
           <p:cNvSpPr txBox="1"/>
           <p:nvPr/>
         </p:nvSpPr>
         <p:spPr>
           <a:xfrm>
-            <a:off x="8203996" y="3063240"/>
+            <a:off x="8203996" y="3246120"/>
             <a:ext cx="3210458" cy="1325880"/>
           </a:xfrm>
           <a:prstGeom prst="rect">
@@ -8360,7 +8899,7 @@
             <a:r>
               <a:rPr sz="3000" b="0" i="0">
                 <a:solidFill>
-                  <a:srgbClr val="2B2B2B"/>
+                  <a:srgbClr val="26231F"/>
                 </a:solidFill>
               </a:rPr>
               <a:t>0 %</a:t>
@@ -8370,13 +8909,13 @@
       </p:sp>
       <p:sp>
         <p:nvSpPr>
-          <p:cNvPr id="16" name="안내"/>
+          <p:cNvPr id="22" name="안내"/>
           <p:cNvSpPr txBox="1"/>
           <p:nvPr/>
         </p:nvSpPr>
         <p:spPr>
           <a:xfrm>
-            <a:off x="640080" y="4709160"/>
+            <a:off x="640080" y="4892040"/>
             <a:ext cx="10911535" cy="365760"/>
           </a:xfrm>
           <a:prstGeom prst="rect">
@@ -8420,7 +8959,7 @@
     <p:bg>
       <p:bgPr>
         <a:solidFill>
-          <a:srgbClr val="FBF8EE"/>
+          <a:srgbClr val="FFFFFF"/>
         </a:solidFill>
         <a:effectLst/>
       </p:bgPr>
@@ -8439,18 +8978,111 @@
           <p:nvPr/>
         </p:nvSpPr>
         <p:spPr>
-          <a:xfrm rot="10800000">
-            <a:off x="10637215" y="0"/>
-            <a:ext cx="914400" cy="1554480"/>
-          </a:xfrm>
-          <a:prstGeom prst="round2SameRect">
-            <a:avLst>
-              <a:gd name="adj1" fmla="val 50000"/>
-              <a:gd name="adj2" fmla="val 0"/>
-            </a:avLst>
+          <a:xfrm>
+            <a:off x="0" y="6565392"/>
+            <a:ext cx="12191695" cy="292608"/>
+          </a:xfrm>
+          <a:prstGeom prst="rect">
+            <a:avLst/>
           </a:prstGeom>
           <a:solidFill>
-            <a:srgbClr val="F6EACB"/>
+            <a:srgbClr val="EBDAAD"/>
+          </a:solidFill>
+          <a:ln>
+            <a:noFill/>
+          </a:ln>
+        </p:spPr>
+        <p:txBody>
+          <a:bodyPr rtlCol="0" anchor="ctr"/>
+          <a:lstStyle/>
+          <a:p>
+            <a:pPr algn="ctr"/>
+          </a:p>
+        </p:txBody>
+      </p:sp>
+      <p:sp>
+        <p:nvSpPr>
+          <p:cNvPr id="4" name="장식"/>
+          <p:cNvSpPr/>
+          <p:nvPr/>
+        </p:nvSpPr>
+        <p:spPr>
+          <a:xfrm>
+            <a:off x="10180015" y="-1645920"/>
+            <a:ext cx="3474720" cy="3474720"/>
+          </a:xfrm>
+          <a:prstGeom prst="ellipse">
+            <a:avLst/>
+          </a:prstGeom>
+          <a:solidFill>
+            <a:srgbClr val="EBDAAD"/>
+          </a:solidFill>
+          <a:ln>
+            <a:noFill/>
+          </a:ln>
+        </p:spPr>
+        <p:txBody>
+          <a:bodyPr rtlCol="0" anchor="ctr"/>
+          <a:lstStyle/>
+          <a:p>
+            <a:pPr algn="ctr"/>
+          </a:p>
+        </p:txBody>
+      </p:sp>
+      <p:sp>
+        <p:nvSpPr>
+          <p:cNvPr id="5" name="상단 라벨"/>
+          <p:cNvSpPr txBox="1"/>
+          <p:nvPr/>
+        </p:nvSpPr>
+        <p:spPr>
+          <a:xfrm>
+            <a:off x="640080" y="274320"/>
+            <a:ext cx="5486400" cy="274320"/>
+          </a:xfrm>
+          <a:prstGeom prst="rect">
+            <a:avLst/>
+          </a:prstGeom>
+          <a:noFill/>
+        </p:spPr>
+        <p:txBody>
+          <a:bodyPr wrap="square" lIns="54864" rIns="54864" tIns="27432" bIns="27432" anchor="ctr">
+            <a:noAutofit/>
+          </a:bodyPr>
+          <a:lstStyle/>
+          <a:p>
+            <a:pPr algn="l">
+              <a:lnSpc>
+                <a:spcPct val="115000"/>
+              </a:lnSpc>
+            </a:pPr>
+            <a:r>
+              <a:rPr sz="900" b="1" i="0" spc="250">
+                <a:solidFill>
+                  <a:srgbClr val="26231F"/>
+                </a:solidFill>
+              </a:rPr>
+              <a:t>INSURANCE CHECK</a:t>
+            </a:r>
+          </a:p>
+        </p:txBody>
+      </p:sp>
+      <p:sp>
+        <p:nvSpPr>
+          <p:cNvPr id="6" name="포인트"/>
+          <p:cNvSpPr/>
+          <p:nvPr/>
+        </p:nvSpPr>
+        <p:spPr>
+          <a:xfrm>
+            <a:off x="11048695" y="502919"/>
+            <a:ext cx="274320" cy="274320"/>
+          </a:xfrm>
+          <a:prstGeom prst="moon">
+            <a:avLst/>
+          </a:prstGeom>
+          <a:solidFill>
+            <a:srgbClr val="FFFFFF"/>
           </a:solidFill>
           <a:ln>
             <a:noFill/>
@@ -8476,8 +9108,8 @@
         </p:nvSpPr>
         <p:spPr>
           <a:xfrm>
-            <a:off x="640080" y="457200"/>
-            <a:ext cx="9722815" cy="868680"/>
+            <a:off x="640080" y="658368"/>
+            <a:ext cx="9082735" cy="868680"/>
           </a:xfrm>
         </p:spPr>
         <p:txBody>
@@ -8494,7 +9126,7 @@
             <a:r>
               <a:rPr sz="3000" b="1" i="0">
                 <a:solidFill>
-                  <a:srgbClr val="544212"/>
+                  <a:srgbClr val="26231F"/>
                 </a:solidFill>
               </a:rPr>
               <a:t>점검 메모와 다음 할 일</a:t>
@@ -8504,26 +9136,26 @@
       </p:sp>
       <p:sp>
         <p:nvSpPr>
-          <p:cNvPr id="4" name="카드 1"/>
+          <p:cNvPr id="7" name="카드 1"/>
           <p:cNvSpPr/>
           <p:nvPr/>
         </p:nvSpPr>
         <p:spPr>
           <a:xfrm>
-            <a:off x="640080" y="1600200"/>
-            <a:ext cx="3484778" cy="4160520"/>
+            <a:off x="640080" y="1783080"/>
+            <a:ext cx="3484778" cy="3749039"/>
           </a:xfrm>
           <a:prstGeom prst="roundRect">
             <a:avLst>
-              <a:gd name="adj" fmla="val 8000"/>
+              <a:gd name="adj" fmla="val 3000"/>
             </a:avLst>
           </a:prstGeom>
           <a:solidFill>
-            <a:srgbClr val="FBF8EE"/>
+            <a:srgbClr val="FFFFFF"/>
           </a:solidFill>
-          <a:ln w="15875">
+          <a:ln w="9525">
             <a:solidFill>
-              <a:srgbClr val="F6EACB"/>
+              <a:srgbClr val="F6EDD5"/>
             </a:solidFill>
           </a:ln>
         </p:spPr>
@@ -8537,20 +9169,49 @@
       </p:sp>
       <p:sp>
         <p:nvSpPr>
-          <p:cNvPr id="5" name="번호 1"/>
+          <p:cNvPr id="8" name="위쪽 띠"/>
           <p:cNvSpPr/>
           <p:nvPr/>
         </p:nvSpPr>
         <p:spPr>
           <a:xfrm>
-            <a:off x="822959" y="1783080"/>
+            <a:off x="649224" y="1792224"/>
+            <a:ext cx="3466490" cy="82296"/>
+          </a:xfrm>
+          <a:prstGeom prst="rect">
+            <a:avLst/>
+          </a:prstGeom>
+          <a:solidFill>
+            <a:srgbClr val="E1CE98"/>
+          </a:solidFill>
+          <a:ln>
+            <a:noFill/>
+          </a:ln>
+        </p:spPr>
+        <p:txBody>
+          <a:bodyPr rtlCol="0" anchor="ctr"/>
+          <a:lstStyle/>
+          <a:p>
+            <a:pPr algn="ctr"/>
+          </a:p>
+        </p:txBody>
+      </p:sp>
+      <p:sp>
+        <p:nvSpPr>
+          <p:cNvPr id="9" name="번호 1"/>
+          <p:cNvSpPr/>
+          <p:nvPr/>
+        </p:nvSpPr>
+        <p:spPr>
+          <a:xfrm>
+            <a:off x="822959" y="1965960"/>
             <a:ext cx="457200" cy="457200"/>
           </a:xfrm>
           <a:prstGeom prst="ellipse">
             <a:avLst/>
           </a:prstGeom>
           <a:solidFill>
-            <a:srgbClr val="A78425"/>
+            <a:srgbClr val="E0EAB8"/>
           </a:solidFill>
           <a:ln>
             <a:noFill/>
@@ -8570,7 +9231,7 @@
             <a:r>
               <a:rPr sz="1600" b="1" i="0">
                 <a:solidFill>
-                  <a:srgbClr val="FFFFFF"/>
+                  <a:srgbClr val="26231F"/>
                 </a:solidFill>
               </a:rPr>
               <a:t>1</a:t>
@@ -8580,13 +9241,13 @@
       </p:sp>
       <p:sp>
         <p:nvSpPr>
-          <p:cNvPr id="6" name="TextBox 5"/>
+          <p:cNvPr id="10" name="TextBox 9"/>
           <p:cNvSpPr txBox="1"/>
           <p:nvPr/>
         </p:nvSpPr>
         <p:spPr>
           <a:xfrm>
-            <a:off x="777240" y="2377440"/>
+            <a:off x="777240" y="2560320"/>
             <a:ext cx="3210458" cy="640080"/>
           </a:xfrm>
           <a:prstGeom prst="rect">
@@ -8608,7 +9269,7 @@
             <a:r>
               <a:rPr sz="1800" b="1" i="0">
                 <a:solidFill>
-                  <a:srgbClr val="544212"/>
+                  <a:srgbClr val="494027"/>
                 </a:solidFill>
               </a:rPr>
               <a:t>확인할 것</a:t>
@@ -8618,14 +9279,14 @@
       </p:sp>
       <p:sp>
         <p:nvSpPr>
-          <p:cNvPr id="7" name="TextBox 6"/>
+          <p:cNvPr id="11" name="TextBox 10"/>
           <p:cNvSpPr txBox="1"/>
           <p:nvPr/>
         </p:nvSpPr>
         <p:spPr>
           <a:xfrm>
-            <a:off x="777240" y="3063240"/>
-            <a:ext cx="3210458" cy="2560320"/>
+            <a:off x="777240" y="3246120"/>
+            <a:ext cx="3210458" cy="2148839"/>
           </a:xfrm>
           <a:prstGeom prst="rect">
             <a:avLst/>
@@ -8646,7 +9307,7 @@
             <a:r>
               <a:rPr sz="1500" b="0" i="0">
                 <a:solidFill>
-                  <a:srgbClr val="2B2B2B"/>
+                  <a:srgbClr val="26231F"/>
                 </a:solidFill>
               </a:rPr>
               <a:t>내용을 입력하세요</a:t>
@@ -8656,26 +9317,26 @@
       </p:sp>
       <p:sp>
         <p:nvSpPr>
-          <p:cNvPr id="8" name="카드 2"/>
+          <p:cNvPr id="12" name="카드 2"/>
           <p:cNvSpPr/>
           <p:nvPr/>
         </p:nvSpPr>
         <p:spPr>
           <a:xfrm>
-            <a:off x="4353458" y="1600200"/>
-            <a:ext cx="3484778" cy="4160520"/>
+            <a:off x="4353458" y="1783080"/>
+            <a:ext cx="3484778" cy="3749039"/>
           </a:xfrm>
           <a:prstGeom prst="roundRect">
             <a:avLst>
-              <a:gd name="adj" fmla="val 8000"/>
+              <a:gd name="adj" fmla="val 3000"/>
             </a:avLst>
           </a:prstGeom>
           <a:solidFill>
-            <a:srgbClr val="FBF8EE"/>
+            <a:srgbClr val="FFFFFF"/>
           </a:solidFill>
-          <a:ln w="15875">
+          <a:ln w="9525">
             <a:solidFill>
-              <a:srgbClr val="F6EACB"/>
+              <a:srgbClr val="F6EDD5"/>
             </a:solidFill>
           </a:ln>
         </p:spPr>
@@ -8689,20 +9350,49 @@
       </p:sp>
       <p:sp>
         <p:nvSpPr>
-          <p:cNvPr id="9" name="번호 2"/>
+          <p:cNvPr id="13" name="위쪽 띠"/>
           <p:cNvSpPr/>
           <p:nvPr/>
         </p:nvSpPr>
         <p:spPr>
           <a:xfrm>
-            <a:off x="4536338" y="1783080"/>
+            <a:off x="4362602" y="1792224"/>
+            <a:ext cx="3466490" cy="82296"/>
+          </a:xfrm>
+          <a:prstGeom prst="rect">
+            <a:avLst/>
+          </a:prstGeom>
+          <a:solidFill>
+            <a:srgbClr val="E1CE98"/>
+          </a:solidFill>
+          <a:ln>
+            <a:noFill/>
+          </a:ln>
+        </p:spPr>
+        <p:txBody>
+          <a:bodyPr rtlCol="0" anchor="ctr"/>
+          <a:lstStyle/>
+          <a:p>
+            <a:pPr algn="ctr"/>
+          </a:p>
+        </p:txBody>
+      </p:sp>
+      <p:sp>
+        <p:nvSpPr>
+          <p:cNvPr id="14" name="번호 2"/>
+          <p:cNvSpPr/>
+          <p:nvPr/>
+        </p:nvSpPr>
+        <p:spPr>
+          <a:xfrm>
+            <a:off x="4536338" y="1965960"/>
             <a:ext cx="457200" cy="457200"/>
           </a:xfrm>
           <a:prstGeom prst="ellipse">
             <a:avLst/>
           </a:prstGeom>
           <a:solidFill>
-            <a:srgbClr val="A78425"/>
+            <a:srgbClr val="E0EAB8"/>
           </a:solidFill>
           <a:ln>
             <a:noFill/>
@@ -8722,7 +9412,7 @@
             <a:r>
               <a:rPr sz="1600" b="1" i="0">
                 <a:solidFill>
-                  <a:srgbClr val="FFFFFF"/>
+                  <a:srgbClr val="26231F"/>
                 </a:solidFill>
               </a:rPr>
               <a:t>2</a:t>
@@ -8732,13 +9422,13 @@
       </p:sp>
       <p:sp>
         <p:nvSpPr>
-          <p:cNvPr id="10" name="TextBox 9"/>
+          <p:cNvPr id="15" name="TextBox 14"/>
           <p:cNvSpPr txBox="1"/>
           <p:nvPr/>
         </p:nvSpPr>
         <p:spPr>
           <a:xfrm>
-            <a:off x="4490618" y="2377440"/>
+            <a:off x="4490618" y="2560320"/>
             <a:ext cx="3210458" cy="640080"/>
           </a:xfrm>
           <a:prstGeom prst="rect">
@@ -8760,7 +9450,7 @@
             <a:r>
               <a:rPr sz="1800" b="1" i="0">
                 <a:solidFill>
-                  <a:srgbClr val="544212"/>
+                  <a:srgbClr val="494027"/>
                 </a:solidFill>
               </a:rPr>
               <a:t>문의할 것</a:t>
@@ -8770,14 +9460,14 @@
       </p:sp>
       <p:sp>
         <p:nvSpPr>
-          <p:cNvPr id="11" name="TextBox 10"/>
+          <p:cNvPr id="16" name="TextBox 15"/>
           <p:cNvSpPr txBox="1"/>
           <p:nvPr/>
         </p:nvSpPr>
         <p:spPr>
           <a:xfrm>
-            <a:off x="4490618" y="3063240"/>
-            <a:ext cx="3210458" cy="2560320"/>
+            <a:off x="4490618" y="3246120"/>
+            <a:ext cx="3210458" cy="2148839"/>
           </a:xfrm>
           <a:prstGeom prst="rect">
             <a:avLst/>
@@ -8798,7 +9488,7 @@
             <a:r>
               <a:rPr sz="1500" b="0" i="0">
                 <a:solidFill>
-                  <a:srgbClr val="2B2B2B"/>
+                  <a:srgbClr val="26231F"/>
                 </a:solidFill>
               </a:rPr>
               <a:t>내용을 입력하세요</a:t>
@@ -8808,26 +9498,26 @@
       </p:sp>
       <p:sp>
         <p:nvSpPr>
-          <p:cNvPr id="12" name="카드 3"/>
+          <p:cNvPr id="17" name="카드 3"/>
           <p:cNvSpPr/>
           <p:nvPr/>
         </p:nvSpPr>
         <p:spPr>
           <a:xfrm>
-            <a:off x="8066836" y="1600200"/>
-            <a:ext cx="3484778" cy="4160520"/>
+            <a:off x="8066836" y="1783080"/>
+            <a:ext cx="3484778" cy="3749039"/>
           </a:xfrm>
           <a:prstGeom prst="roundRect">
             <a:avLst>
-              <a:gd name="adj" fmla="val 8000"/>
+              <a:gd name="adj" fmla="val 3000"/>
             </a:avLst>
           </a:prstGeom>
           <a:solidFill>
-            <a:srgbClr val="FBF8EE"/>
+            <a:srgbClr val="FFFFFF"/>
           </a:solidFill>
-          <a:ln w="15875">
+          <a:ln w="9525">
             <a:solidFill>
-              <a:srgbClr val="F6EACB"/>
+              <a:srgbClr val="F6EDD5"/>
             </a:solidFill>
           </a:ln>
         </p:spPr>
@@ -8841,20 +9531,49 @@
       </p:sp>
       <p:sp>
         <p:nvSpPr>
-          <p:cNvPr id="13" name="번호 3"/>
+          <p:cNvPr id="18" name="위쪽 띠"/>
           <p:cNvSpPr/>
           <p:nvPr/>
         </p:nvSpPr>
         <p:spPr>
           <a:xfrm>
-            <a:off x="8249716" y="1783080"/>
+            <a:off x="8075980" y="1792224"/>
+            <a:ext cx="3466490" cy="82296"/>
+          </a:xfrm>
+          <a:prstGeom prst="rect">
+            <a:avLst/>
+          </a:prstGeom>
+          <a:solidFill>
+            <a:srgbClr val="E1CE98"/>
+          </a:solidFill>
+          <a:ln>
+            <a:noFill/>
+          </a:ln>
+        </p:spPr>
+        <p:txBody>
+          <a:bodyPr rtlCol="0" anchor="ctr"/>
+          <a:lstStyle/>
+          <a:p>
+            <a:pPr algn="ctr"/>
+          </a:p>
+        </p:txBody>
+      </p:sp>
+      <p:sp>
+        <p:nvSpPr>
+          <p:cNvPr id="19" name="번호 3"/>
+          <p:cNvSpPr/>
+          <p:nvPr/>
+        </p:nvSpPr>
+        <p:spPr>
+          <a:xfrm>
+            <a:off x="8249716" y="1965960"/>
             <a:ext cx="457200" cy="457200"/>
           </a:xfrm>
           <a:prstGeom prst="ellipse">
             <a:avLst/>
           </a:prstGeom>
           <a:solidFill>
-            <a:srgbClr val="A78425"/>
+            <a:srgbClr val="E0EAB8"/>
           </a:solidFill>
           <a:ln>
             <a:noFill/>
@@ -8874,7 +9593,7 @@
             <a:r>
               <a:rPr sz="1600" b="1" i="0">
                 <a:solidFill>
-                  <a:srgbClr val="FFFFFF"/>
+                  <a:srgbClr val="26231F"/>
                 </a:solidFill>
               </a:rPr>
               <a:t>3</a:t>
@@ -8884,13 +9603,13 @@
       </p:sp>
       <p:sp>
         <p:nvSpPr>
-          <p:cNvPr id="14" name="TextBox 13"/>
+          <p:cNvPr id="20" name="TextBox 19"/>
           <p:cNvSpPr txBox="1"/>
           <p:nvPr/>
         </p:nvSpPr>
         <p:spPr>
           <a:xfrm>
-            <a:off x="8203996" y="2377440"/>
+            <a:off x="8203996" y="2560320"/>
             <a:ext cx="3210458" cy="640080"/>
           </a:xfrm>
           <a:prstGeom prst="rect">
@@ -8912,7 +9631,7 @@
             <a:r>
               <a:rPr sz="1800" b="1" i="0">
                 <a:solidFill>
-                  <a:srgbClr val="544212"/>
+                  <a:srgbClr val="494027"/>
                 </a:solidFill>
               </a:rPr>
               <a:t>정리할 날짜</a:t>
@@ -8922,14 +9641,14 @@
       </p:sp>
       <p:sp>
         <p:nvSpPr>
-          <p:cNvPr id="15" name="TextBox 14"/>
+          <p:cNvPr id="21" name="TextBox 20"/>
           <p:cNvSpPr txBox="1"/>
           <p:nvPr/>
         </p:nvSpPr>
         <p:spPr>
           <a:xfrm>
-            <a:off x="8203996" y="3063240"/>
-            <a:ext cx="3210458" cy="2560320"/>
+            <a:off x="8203996" y="3246120"/>
+            <a:ext cx="3210458" cy="2148839"/>
           </a:xfrm>
           <a:prstGeom prst="rect">
             <a:avLst/>
@@ -8950,7 +9669,7 @@
             <a:r>
               <a:rPr sz="1500" b="0" i="0">
                 <a:solidFill>
-                  <a:srgbClr val="2B2B2B"/>
+                  <a:srgbClr val="26231F"/>
                 </a:solidFill>
               </a:rPr>
               <a:t>내용을 입력하세요</a:t>
@@ -8960,13 +9679,13 @@
       </p:sp>
       <p:sp>
         <p:nvSpPr>
-          <p:cNvPr id="16" name="안내 문구"/>
+          <p:cNvPr id="22" name="안내 문구"/>
           <p:cNvSpPr txBox="1"/>
           <p:nvPr/>
         </p:nvSpPr>
         <p:spPr>
           <a:xfrm>
-            <a:off x="640080" y="5852160"/>
+            <a:off x="640080" y="5623560"/>
             <a:ext cx="10911535" cy="548640"/>
           </a:xfrm>
           <a:prstGeom prst="rect">
@@ -9015,34 +9734,34 @@
         <a:sysClr val="window" lastClr="FFFFFF"/>
       </a:lt1>
       <a:dk2>
-        <a:srgbClr val="544212"/>
+        <a:srgbClr val="494027"/>
       </a:dk2>
       <a:lt2>
-        <a:srgbClr val="FBF8EE"/>
+        <a:srgbClr val="FBF7EC"/>
       </a:lt2>
       <a:accent1>
-        <a:srgbClr val="A78425"/>
+        <a:srgbClr val="E1CE98"/>
       </a:accent1>
       <a:accent2>
-        <a:srgbClr val="3B7D91"/>
+        <a:srgbClr val="E0EAB8"/>
       </a:accent2>
       <a:accent3>
-        <a:srgbClr val="544212"/>
+        <a:srgbClr val="494027"/>
       </a:accent3>
       <a:accent4>
-        <a:srgbClr val="F6EACB"/>
+        <a:srgbClr val="F6EDD5"/>
       </a:accent4>
       <a:accent5>
-        <a:srgbClr val="71805B"/>
+        <a:srgbClr val="E0DCA8"/>
       </a:accent5>
       <a:accent6>
-        <a:srgbClr val="988E71"/>
+        <a:srgbClr val="928C7D"/>
       </a:accent6>
       <a:hlink>
-        <a:srgbClr val="A78425"/>
+        <a:srgbClr val="E1CE98"/>
       </a:hlink>
       <a:folHlink>
-        <a:srgbClr val="544212"/>
+        <a:srgbClr val="494027"/>
       </a:folHlink>
     </a:clrScheme>
     <a:fontScheme name="Office">
